--- a/skills/dsh-academic-ppt/references/templates/paper.pptx
+++ b/skills/dsh-academic-ppt/references/templates/paper.pptx
@@ -511,8 +511,15 @@
 全部文本为填写指引，图表值是合成演示值，不是任何研究结果。使用前替换论文、数据、原图与来源。
 内容职责：研究问题；方法改变了什么；结果及适用范围。
 建议讲述时间只是排练起点，按实际内容调整。
+原图来源：T1
+示例图
+响应曲线；合成演示值
+https://github.com/YuZhou0311/dsh-academic-ppt
+原创排版教学示例 v0.3.0
+MIT; all plotted values are synthetic
+完整原图，无裁切
 参考文献（完整题名）
-T1 · Full article title: connecting decision models, experimental evidence and independent validation in crop cultivation · 期刊与卷页（替换） · 2026 · 待替换 · 书目占位，非真实文献</a:t>
+T1 · Full article title: connecting decision models, experimental evidence and independent validation in crop cultivation · 期刊与卷页（替换） · 2026 · 书目占位；图表均为合成示例 · 书目占位，非真实文献</a:t>
             </a:r>
             <a:endParaRPr lang="en-US" dirty="0"/>
           </a:p>
@@ -605,7 +612,7 @@
 内容职责：已有认识；尚存缺口；可检验假说；预期观测与反证。
 建议讲述时间只是排练起点，按实际内容调整。
 参考文献（完整题名）
-T1 · Full article title: connecting decision models, experimental evidence and independent validation in crop cultivation · 期刊与卷页（替换） · 2026 · 待替换 · 书目占位，非真实文献</a:t>
+T1 · Full article title: connecting decision models, experimental evidence and independent validation in crop cultivation · 期刊与卷页（替换） · 2026 · 书目占位；图表均为合成示例 · 书目占位，非真实文献</a:t>
             </a:r>
             <a:endParaRPr lang="en-US" dirty="0"/>
           </a:p>
@@ -697,8 +704,22 @@
 全部文本为填写指引，图表值是合成演示值，不是任何研究结果。使用前替换论文、数据、原图与来源。
 内容职责：论点一的依据；论点二的依据。
 建议讲述时间只是排练起点，按实际内容调整。
+原图来源：T1
+示例图
+响应曲线；合成演示值
+https://github.com/YuZhou0311/dsh-academic-ppt
+原创排版教学示例 v0.3.0
+MIT; all plotted values are synthetic
+完整原图，无裁切
+原图来源：T1
+示例图
+效应与区间；合成演示值
+https://github.com/YuZhou0311/dsh-academic-ppt
+原创排版教学示例 v0.3.0
+MIT; all plotted values are synthetic
+完整原图，无裁切
 参考文献（完整题名）
-T1 · Full article title: connecting decision models, experimental evidence and independent validation in crop cultivation · 期刊与卷页（替换） · 2026 · 待替换 · 书目占位，非真实文献</a:t>
+T1 · Full article title: connecting decision models, experimental evidence and independent validation in crop cultivation · 期刊与卷页（替换） · 2026 · 书目占位；图表均为合成示例 · 书目占位，非真实文献</a:t>
             </a:r>
             <a:endParaRPr lang="en-US" dirty="0"/>
           </a:p>
@@ -791,7 +812,7 @@
 内容职责：研究对象；分析任务；实验身份；实际验证内容；外推范围。
 建议讲述时间只是排练起点，按实际内容调整。
 参考文献（完整题名）
-T1 · Full article title: connecting decision models, experimental evidence and independent validation in crop cultivation · 期刊与卷页（替换） · 2026 · 待替换 · 书目占位，非真实文献</a:t>
+T1 · Full article title: connecting decision models, experimental evidence and independent validation in crop cultivation · 期刊与卷页（替换） · 2026 · 书目占位；图表均为合成示例 · 书目占位，非真实文献</a:t>
             </a:r>
             <a:endParaRPr lang="en-US" dirty="0"/>
           </a:p>
@@ -879,12 +900,12 @@
           <a:p>
             <a:r>
               <a:rPr lang="en-US" dirty="0"/>
-              <a:t>本页为原创学术版式模板，ID paper-contribution-comparison。原生表格仅用于严格维度映射，侧栏说明新增贡献与公平性。
+              <a:t>本页为原创学术版式模板，ID paper-contribution-comparison。完整书目下以通栏表映射比较维度，两项说明紧贴实际表底，解释新增贡献与公平性。
 全部文本为填写指引，图表值是合成演示值，不是任何研究结果。使用前替换论文、数据、原图与来源。
 内容职责：关键改变；比较条件。
 建议讲述时间只是排练起点，按实际内容调整。
 参考文献（完整题名）
-T1 · Full article title: connecting decision models, experimental evidence and independent validation in crop cultivation · 期刊与卷页（替换） · 2026 · 待替换 · 书目占位，非真实文献</a:t>
+T1 · Full article title: connecting decision models, experimental evidence and independent validation in crop cultivation · 期刊与卷页（替换） · 2026 · 书目占位；图表均为合成示例 · 书目占位，非真实文献</a:t>
             </a:r>
             <a:endParaRPr lang="en-US" dirty="0"/>
           </a:p>
@@ -976,8 +997,15 @@
 全部文本为填写指引，图表值是合成演示值，不是任何研究结果。使用前替换论文、数据、原图与来源。
 内容职责：本次讨论问题；方法审查；实验审查。
 建议讲述时间只是排练起点，按实际内容调整。
+原图来源：T1
+示例图
+响应曲线；合成演示值
+https://github.com/YuZhou0311/dsh-academic-ppt
+原创排版教学示例 v0.3.0
+MIT; all plotted values are synthetic
+完整原图，无裁切
 参考文献（完整题名）
-T1 · Full article title: connecting decision models, experimental evidence and independent validation in crop cultivation · 期刊与卷页（替换） · 2026 · 待替换 · 书目占位，非真实文献</a:t>
+T1 · Full article title: connecting decision models, experimental evidence and independent validation in crop cultivation · 期刊与卷页（替换） · 2026 · 书目占位；图表均为合成示例 · 书目占位，非真实文献</a:t>
             </a:r>
             <a:endParaRPr lang="en-US" dirty="0"/>
           </a:p>
@@ -1421,14 +1449,14 @@
       </p:sp>
       <p:sp>
         <p:nvSpPr>
-          <p:cNvPr id="4" name="T01/kicker"/>
-          <p:cNvSpPr/>
-          <p:nvPr/>
-        </p:nvSpPr>
-        <p:spPr>
-          <a:xfrm>
-            <a:off x="457200" y="152400"/>
-            <a:ext cx="11277600" cy="190500"/>
+          <p:cNvPr id="4" name="T01/title"/>
+          <p:cNvSpPr/>
+          <p:nvPr/>
+        </p:nvSpPr>
+        <p:spPr>
+          <a:xfrm>
+            <a:off x="457200" y="209550"/>
+            <a:ext cx="11277600" cy="438150"/>
           </a:xfrm>
           <a:prstGeom prst="rect">
             <a:avLst/>
@@ -1442,54 +1470,12 @@
           <a:p>
             <a:pPr algn="l" indent="0" marL="0">
               <a:lnSpc>
-                <a:spcPts val="1320"/>
-              </a:lnSpc>
-              <a:buNone/>
-            </a:pPr>
-            <a:r>
-              <a:rPr lang="zh-CN" altLang="en-US" sz="1200" dirty="0">
-                <a:solidFill>
-                  <a:srgbClr val="515B68"/>
-                </a:solidFill>
-                <a:latin typeface="Noto Sans CJK SC" pitchFamily="34" charset="0"/>
-                <a:ea typeface="Noto Sans CJK SC" pitchFamily="34" charset="-122"/>
-                <a:cs typeface="Noto Sans CJK SC" pitchFamily="34" charset="-120"/>
-              </a:rPr>
-              <a:t>结构模板 / 占位说明与合成数据</a:t>
-            </a:r>
-            <a:endParaRPr lang="zh-CN" sz="1200" dirty="0"/>
-          </a:p>
-        </p:txBody>
-      </p:sp>
-      <p:sp>
-        <p:nvSpPr>
-          <p:cNvPr id="5" name="T01/title"/>
-          <p:cNvSpPr/>
-          <p:nvPr/>
-        </p:nvSpPr>
-        <p:spPr>
-          <a:xfrm>
-            <a:off x="457200" y="381000"/>
-            <a:ext cx="11277600" cy="400050"/>
-          </a:xfrm>
-          <a:prstGeom prst="rect">
-            <a:avLst/>
-          </a:prstGeom>
-          <a:noFill/>
-          <a:ln/>
-        </p:spPr>
-        <p:txBody>
-          <a:bodyPr wrap="none" lIns="0" tIns="0" rIns="0" bIns="0" rtlCol="0" anchor="t"/>
-          <a:lstStyle/>
-          <a:p>
-            <a:pPr algn="l" indent="0" marL="0">
-              <a:lnSpc>
-                <a:spcPts val="2856"/>
-              </a:lnSpc>
-              <a:buNone/>
-            </a:pPr>
-            <a:r>
-              <a:rPr lang="zh-CN" altLang="en-US" sz="2550" b="1" dirty="0">
+                <a:spcPts val="3360"/>
+              </a:lnSpc>
+              <a:buNone/>
+            </a:pPr>
+            <a:r>
+              <a:rPr lang="zh-CN" altLang="en-US" sz="3000" b="1" dirty="0">
                 <a:solidFill>
                   <a:srgbClr val="1C2430"/>
                 </a:solidFill>
@@ -1499,26 +1485,49 @@
               </a:rPr>
               <a:t>单篇论文全景</a:t>
             </a:r>
-            <a:endParaRPr lang="zh-CN" sz="2550" dirty="0"/>
-          </a:p>
-        </p:txBody>
-      </p:sp>
-      <p:sp>
-        <p:nvSpPr>
-          <p:cNvPr id="6" name="T01/header-rule"/>
-          <p:cNvSpPr/>
-          <p:nvPr/>
-        </p:nvSpPr>
-        <p:spPr>
-          <a:xfrm>
-            <a:off x="457200" y="876300"/>
+            <a:endParaRPr lang="zh-CN" sz="3000" dirty="0"/>
+          </a:p>
+        </p:txBody>
+      </p:sp>
+      <p:sp>
+        <p:nvSpPr>
+          <p:cNvPr id="5" name="T01/header-rule"/>
+          <p:cNvSpPr/>
+          <p:nvPr/>
+        </p:nvSpPr>
+        <p:spPr>
+          <a:xfrm>
+            <a:off x="457200" y="752475"/>
             <a:ext cx="11277600" cy="0"/>
           </a:xfrm>
           <a:prstGeom prst="line">
             <a:avLst/>
           </a:prstGeom>
           <a:noFill/>
-          <a:ln w="11430">
+          <a:ln w="10478">
+            <a:solidFill>
+              <a:srgbClr val="BEC8D4"/>
+            </a:solidFill>
+            <a:prstDash val="solid"/>
+          </a:ln>
+        </p:spPr>
+      </p:sp>
+      <p:sp>
+        <p:nvSpPr>
+          <p:cNvPr id="6" name="T01/header-accent"/>
+          <p:cNvSpPr/>
+          <p:nvPr/>
+        </p:nvSpPr>
+        <p:spPr>
+          <a:xfrm>
+            <a:off x="457200" y="752475"/>
+            <a:ext cx="704850" cy="0"/>
+          </a:xfrm>
+          <a:prstGeom prst="line">
+            <a:avLst/>
+          </a:prstGeom>
+          <a:noFill/>
+          <a:ln w="28575">
             <a:solidFill>
               <a:srgbClr val="173C70"/>
             </a:solidFill>
@@ -1534,8 +1543,8 @@
         </p:nvSpPr>
         <p:spPr>
           <a:xfrm>
-            <a:off x="457200" y="2514600"/>
-            <a:ext cx="6496050" cy="3524250"/>
+            <a:off x="457200" y="2373916"/>
+            <a:ext cx="6496050" cy="3659791"/>
           </a:xfrm>
           <a:prstGeom prst="rect">
             <a:avLst/>
@@ -1559,14 +1568,14 @@
         </p:nvSpPr>
         <p:spPr>
           <a:xfrm>
-            <a:off x="466725" y="2524125"/>
+            <a:off x="466725" y="2383441"/>
             <a:ext cx="6477000" cy="381000"/>
           </a:xfrm>
           <a:prstGeom prst="rect">
             <a:avLst/>
           </a:prstGeom>
           <a:solidFill>
-            <a:srgbClr val="EEF3F8"/>
+            <a:srgbClr val="E9F4F0"/>
           </a:solidFill>
           <a:ln w="12700">
             <a:solidFill>
@@ -1586,7 +1595,7 @@
         </p:nvSpPr>
         <p:spPr>
           <a:xfrm>
-            <a:off x="457200" y="2905125"/>
+            <a:off x="457200" y="2764441"/>
             <a:ext cx="6496050" cy="0"/>
           </a:xfrm>
           <a:prstGeom prst="line">
@@ -1609,8 +1618,8 @@
         </p:nvSpPr>
         <p:spPr>
           <a:xfrm>
-            <a:off x="581025" y="2571750"/>
-            <a:ext cx="6248400" cy="295275"/>
+            <a:off x="581025" y="2421541"/>
+            <a:ext cx="6248400" cy="304800"/>
           </a:xfrm>
           <a:prstGeom prst="rect">
             <a:avLst/>
@@ -1624,14 +1633,14 @@
           <a:p>
             <a:pPr algn="l" indent="0" marL="0">
               <a:lnSpc>
-                <a:spcPts val="2070"/>
-              </a:lnSpc>
-              <a:buNone/>
-            </a:pPr>
-            <a:r>
-              <a:rPr lang="zh-CN" altLang="en-US" sz="1800" b="1" dirty="0">
-                <a:solidFill>
-                  <a:srgbClr val="173C70"/>
+                <a:spcPts val="2242"/>
+              </a:lnSpc>
+              <a:buNone/>
+            </a:pPr>
+            <a:r>
+              <a:rPr lang="zh-CN" altLang="en-US" sz="1950" b="1" dirty="0">
+                <a:solidFill>
+                  <a:srgbClr val="146C63"/>
                 </a:solidFill>
                 <a:latin typeface="Noto Sans CJK SC" pitchFamily="34" charset="0"/>
                 <a:ea typeface="Noto Sans CJK SC" pitchFamily="34" charset="-122"/>
@@ -1639,7 +1648,7 @@
               </a:rPr>
               <a:t>关键证据图</a:t>
             </a:r>
-            <a:endParaRPr lang="zh-CN" sz="1800" dirty="0"/>
+            <a:endParaRPr lang="zh-CN" sz="1950" dirty="0"/>
           </a:p>
         </p:txBody>
       </p:sp>
@@ -1651,7 +1660,7 @@
         </p:nvSpPr>
         <p:spPr>
           <a:xfrm>
-            <a:off x="457200" y="1219200"/>
+            <a:off x="457200" y="1028700"/>
             <a:ext cx="11277600" cy="571500"/>
           </a:xfrm>
           <a:prstGeom prst="rect">
@@ -1713,8 +1722,8 @@
         </p:nvSpPr>
         <p:spPr>
           <a:xfrm>
-            <a:off x="457200" y="1847850"/>
-            <a:ext cx="11277600" cy="514350"/>
+            <a:off x="457200" y="1657350"/>
+            <a:ext cx="11277600" cy="558356"/>
           </a:xfrm>
           <a:prstGeom prst="rect">
             <a:avLst/>
@@ -1741,7 +1750,7 @@
                 <a:ea typeface="Noto Sans CJK SC" pitchFamily="34" charset="-122"/>
                 <a:cs typeface="Noto Sans CJK SC" pitchFamily="34" charset="-120"/>
               </a:rPr>
-              <a:t>作者姓名（替换） · 期刊与卷页（替换） · 2026 · DOI: 待替换</a:t>
+              <a:t>作者姓名（替换） · 期刊与卷页（替换） · 2026 · DOI: 书目占位；图表均为合成示例</a:t>
             </a:r>
             <a:endParaRPr lang="zh-CN" sz="1275" dirty="0"/>
           </a:p>
@@ -1755,14 +1764,135 @@
         </p:nvSpPr>
         <p:spPr>
           <a:xfrm>
-            <a:off x="590550" y="2971800"/>
-            <a:ext cx="6229350" cy="2914650"/>
+            <a:off x="1920094" y="2867787"/>
+            <a:ext cx="3570263" cy="2645759"/>
           </a:xfrm>
           <a:prstGeom prst="rect">
             <a:avLst/>
           </a:prstGeom>
           <a:solidFill>
             <a:srgbClr val="FFFFFF"/>
+          </a:solidFill>
+          <a:ln w="7620">
+            <a:solidFill>
+              <a:srgbClr val="CCD4DD"/>
+            </a:solidFill>
+            <a:prstDash val="solid"/>
+          </a:ln>
+          <a:effectLst>
+            <a:outerShdw sx="100000" sy="100000" kx="0" ky="0" algn="bl" rotWithShape="0" blurRad="28575" dist="19050" dir="5400000">
+              <a:srgbClr val="263B50">
+                <a:alpha val="12000"/>
+              </a:srgbClr>
+            </a:outerShdw>
+          </a:effectLst>
+        </p:spPr>
+      </p:sp>
+      <p:pic>
+        <p:nvPicPr>
+          <p:cNvPr id="14" name="T01/figure:0:image" descr="A/B 为条件；合成数据">    </p:cNvPr>
+          <p:cNvPicPr>
+            <a:picLocks noChangeAspect="1"/>
+          </p:cNvPicPr>
+          <p:nvPr/>
+        </p:nvPicPr>
+        <p:blipFill>
+          <a:blip r:embed="rId1"/>
+          <a:stretch>
+            <a:fillRect/>
+          </a:stretch>
+        </p:blipFill>
+        <p:spPr>
+          <a:xfrm>
+            <a:off x="1948669" y="2896362"/>
+            <a:ext cx="3513113" cy="2588609"/>
+          </a:xfrm>
+          <a:prstGeom prst="rect">
+            <a:avLst/>
+          </a:prstGeom>
+        </p:spPr>
+      </p:pic>
+      <p:sp>
+        <p:nvSpPr>
+          <p:cNvPr id="15" name="T01/figure:0:caption"/>
+          <p:cNvSpPr/>
+          <p:nvPr/>
+        </p:nvSpPr>
+        <p:spPr>
+          <a:xfrm>
+            <a:off x="590550" y="5618321"/>
+            <a:ext cx="6229350" cy="257175"/>
+          </a:xfrm>
+          <a:prstGeom prst="rect">
+            <a:avLst/>
+          </a:prstGeom>
+          <a:noFill/>
+          <a:ln/>
+        </p:spPr>
+        <p:txBody>
+          <a:bodyPr wrap="none" lIns="0" tIns="0" rIns="0" bIns="0" rtlCol="0" anchor="t"/>
+          <a:lstStyle/>
+          <a:p>
+            <a:pPr algn="l" indent="0" marL="0">
+              <a:lnSpc>
+                <a:spcPts val="1674"/>
+              </a:lnSpc>
+              <a:buNone/>
+            </a:pPr>
+            <a:r>
+              <a:rPr lang="zh-CN" altLang="en-US" sz="1350" dirty="0">
+                <a:solidFill>
+                  <a:srgbClr val="515B68"/>
+                </a:solidFill>
+                <a:latin typeface="Noto Sans CJK SC" pitchFamily="34" charset="0"/>
+                <a:ea typeface="Noto Sans CJK SC" pitchFamily="34" charset="-122"/>
+                <a:cs typeface="Noto Sans CJK SC" pitchFamily="34" charset="-120"/>
+              </a:rPr>
+              <a:t>A/B 为条件；合成数据</a:t>
+            </a:r>
+            <a:endParaRPr lang="zh-CN" sz="1350" dirty="0"/>
+          </a:p>
+        </p:txBody>
+      </p:sp>
+      <p:sp>
+        <p:nvSpPr>
+          <p:cNvPr id="16" name="T01/card/region-1/base-rule"/>
+          <p:cNvSpPr/>
+          <p:nvPr/>
+        </p:nvSpPr>
+        <p:spPr>
+          <a:xfrm>
+            <a:off x="7200900" y="3541109"/>
+            <a:ext cx="4533900" cy="0"/>
+          </a:xfrm>
+          <a:prstGeom prst="line">
+            <a:avLst/>
+          </a:prstGeom>
+          <a:noFill/>
+          <a:ln w="10478">
+            <a:solidFill>
+              <a:srgbClr val="BEC8D4"/>
+            </a:solidFill>
+            <a:prstDash val="solid"/>
+          </a:ln>
+        </p:spPr>
+      </p:sp>
+      <p:sp>
+        <p:nvSpPr>
+          <p:cNvPr id="17" name="T01/card/region-1/side-mark"/>
+          <p:cNvSpPr/>
+          <p:nvPr/>
+        </p:nvSpPr>
+        <p:spPr>
+          <a:xfrm>
+            <a:off x="7200900" y="2392966"/>
+            <a:ext cx="47625" cy="295275"/>
+          </a:xfrm>
+          <a:prstGeom prst="rect">
+            <a:avLst/>
+          </a:prstGeom>
+          <a:solidFill>
+            <a:srgbClr val="6C528E"/>
           </a:solidFill>
           <a:ln w="12700">
             <a:solidFill>
@@ -1774,40 +1904,16 @@
           </a:ln>
         </p:spPr>
       </p:sp>
-      <p:pic>
-        <p:nvPicPr>
-          <p:cNvPr id="14" name="T01/figure:0:image" descr="T1 · 示例图 · 响应曲线；合成演示值">    </p:cNvPr>
-          <p:cNvPicPr>
-            <a:picLocks noChangeAspect="1"/>
-          </p:cNvPicPr>
-          <p:nvPr/>
-        </p:nvPicPr>
-        <p:blipFill>
-          <a:blip r:embed="rId1"/>
-          <a:stretch>
-            <a:fillRect/>
-          </a:stretch>
-        </p:blipFill>
-        <p:spPr>
-          <a:xfrm>
-            <a:off x="1562100" y="2971800"/>
-            <a:ext cx="4286250" cy="2571750"/>
-          </a:xfrm>
-          <a:prstGeom prst="rect">
-            <a:avLst/>
-          </a:prstGeom>
-        </p:spPr>
-      </p:pic>
-      <p:sp>
-        <p:nvSpPr>
-          <p:cNvPr id="15" name="T01/figure:0:caption"/>
-          <p:cNvSpPr/>
-          <p:nvPr/>
-        </p:nvSpPr>
-        <p:spPr>
-          <a:xfrm>
-            <a:off x="590550" y="5629275"/>
-            <a:ext cx="6229350" cy="257175"/>
+      <p:sp>
+        <p:nvSpPr>
+          <p:cNvPr id="18" name="T01/card/region-1/title"/>
+          <p:cNvSpPr/>
+          <p:nvPr/>
+        </p:nvSpPr>
+        <p:spPr>
+          <a:xfrm>
+            <a:off x="7353300" y="2392966"/>
+            <a:ext cx="4381500" cy="304800"/>
           </a:xfrm>
           <a:prstGeom prst="rect">
             <a:avLst/>
@@ -1821,85 +1927,35 @@
           <a:p>
             <a:pPr algn="l" indent="0" marL="0">
               <a:lnSpc>
-                <a:spcPts val="1674"/>
-              </a:lnSpc>
-              <a:buNone/>
-            </a:pPr>
-            <a:r>
-              <a:rPr lang="zh-CN" altLang="en-US" sz="1350" dirty="0">
-                <a:solidFill>
-                  <a:srgbClr val="515B68"/>
-                </a:solidFill>
-                <a:latin typeface="Noto Sans CJK SC" pitchFamily="34" charset="0"/>
-                <a:ea typeface="Noto Sans CJK SC" pitchFamily="34" charset="-122"/>
-                <a:cs typeface="Noto Sans CJK SC" pitchFamily="34" charset="-120"/>
-              </a:rPr>
-              <a:t>T1 · 示例图 · 响应曲线；合成演示值</a:t>
-            </a:r>
-            <a:endParaRPr lang="zh-CN" sz="1350" dirty="0"/>
-          </a:p>
-        </p:txBody>
-      </p:sp>
-      <p:sp>
-        <p:nvSpPr>
-          <p:cNvPr id="16" name="T01/card/region-1/base-rule"/>
-          <p:cNvSpPr/>
-          <p:nvPr/>
-        </p:nvSpPr>
-        <p:spPr>
-          <a:xfrm>
-            <a:off x="7200900" y="3638550"/>
-            <a:ext cx="4533900" cy="0"/>
-          </a:xfrm>
-          <a:prstGeom prst="line">
-            <a:avLst/>
-          </a:prstGeom>
-          <a:noFill/>
-          <a:ln w="10478">
-            <a:solidFill>
-              <a:srgbClr val="BEC8D4"/>
-            </a:solidFill>
-            <a:prstDash val="solid"/>
-          </a:ln>
-        </p:spPr>
-      </p:sp>
-      <p:sp>
-        <p:nvSpPr>
-          <p:cNvPr id="17" name="T01/card/region-1/side-mark"/>
-          <p:cNvSpPr/>
-          <p:nvPr/>
-        </p:nvSpPr>
-        <p:spPr>
-          <a:xfrm>
-            <a:off x="7200900" y="2533650"/>
-            <a:ext cx="47625" cy="295275"/>
-          </a:xfrm>
-          <a:prstGeom prst="rect">
-            <a:avLst/>
-          </a:prstGeom>
-          <a:solidFill>
-            <a:srgbClr val="355D88"/>
-          </a:solidFill>
-          <a:ln w="12700">
-            <a:solidFill>
-              <a:srgbClr val="FFFFFF">
-                <a:alpha val="0"/>
-              </a:srgbClr>
-            </a:solidFill>
-            <a:prstDash val="solid"/>
-          </a:ln>
-        </p:spPr>
-      </p:sp>
-      <p:sp>
-        <p:nvSpPr>
-          <p:cNvPr id="18" name="T01/card/region-1/title"/>
-          <p:cNvSpPr/>
-          <p:nvPr/>
-        </p:nvSpPr>
-        <p:spPr>
-          <a:xfrm>
-            <a:off x="7353300" y="2533650"/>
-            <a:ext cx="4381500" cy="304800"/>
+                <a:spcPts val="2242"/>
+              </a:lnSpc>
+              <a:buNone/>
+            </a:pPr>
+            <a:r>
+              <a:rPr lang="zh-CN" altLang="en-US" sz="1950" b="1" dirty="0">
+                <a:solidFill>
+                  <a:srgbClr val="6C528E"/>
+                </a:solidFill>
+                <a:latin typeface="Noto Sans CJK SC" pitchFamily="34" charset="0"/>
+                <a:ea typeface="Noto Sans CJK SC" pitchFamily="34" charset="-122"/>
+                <a:cs typeface="Noto Sans CJK SC" pitchFamily="34" charset="-120"/>
+              </a:rPr>
+              <a:t>研究问题</a:t>
+            </a:r>
+            <a:endParaRPr lang="zh-CN" sz="1950" dirty="0"/>
+          </a:p>
+        </p:txBody>
+      </p:sp>
+      <p:sp>
+        <p:nvSpPr>
+          <p:cNvPr id="19" name="T01/card/region-1/body"/>
+          <p:cNvSpPr/>
+          <p:nvPr/>
+        </p:nvSpPr>
+        <p:spPr>
+          <a:xfrm>
+            <a:off x="7353300" y="2812066"/>
+            <a:ext cx="4381500" cy="633793"/>
           </a:xfrm>
           <a:prstGeom prst="rect">
             <a:avLst/>
@@ -1913,54 +1969,187 @@
           <a:p>
             <a:pPr algn="l" indent="0" marL="0">
               <a:lnSpc>
-                <a:spcPts val="2070"/>
+                <a:spcPts val="2232"/>
+              </a:lnSpc>
+              <a:buNone/>
+            </a:pPr>
+            <a:r>
+              <a:rPr lang="zh-CN" altLang="en-US" sz="1800" dirty="0">
+                <a:solidFill>
+                  <a:srgbClr val="1C2430"/>
+                </a:solidFill>
+                <a:latin typeface="Noto Sans CJK SC" pitchFamily="34" charset="0"/>
+                <a:ea typeface="Noto Sans CJK SC" pitchFamily="34" charset="-122"/>
+                <a:cs typeface="Noto Sans CJK SC" pitchFamily="34" charset="-120"/>
+              </a:rPr>
+              <a:t>明确研究对象与问题边界</a:t>
+            </a:r>
+            <a:endParaRPr lang="zh-CN" sz="1800" dirty="0"/>
+          </a:p>
+          <a:p>
+            <a:pPr algn="l" indent="0" marL="0">
+              <a:lnSpc>
+                <a:spcPts val="2232"/>
+              </a:lnSpc>
+              <a:buNone/>
+            </a:pPr>
+            <a:r>
+              <a:rPr lang="zh-CN" altLang="en-US" sz="1800" dirty="0">
+                <a:solidFill>
+                  <a:srgbClr val="1C2430"/>
+                </a:solidFill>
+                <a:latin typeface="Noto Sans CJK SC" pitchFamily="34" charset="0"/>
+                <a:ea typeface="Noto Sans CJK SC" pitchFamily="34" charset="-122"/>
+                <a:cs typeface="Noto Sans CJK SC" pitchFamily="34" charset="-120"/>
+              </a:rPr>
+              <a:t>给出当前方法尚未解释的关系</a:t>
+            </a:r>
+            <a:endParaRPr lang="zh-CN" sz="1800" dirty="0"/>
+          </a:p>
+        </p:txBody>
+      </p:sp>
+      <p:sp>
+        <p:nvSpPr>
+          <p:cNvPr id="20" name="T01/card/region-2/title"/>
+          <p:cNvSpPr/>
+          <p:nvPr/>
+        </p:nvSpPr>
+        <p:spPr>
+          <a:xfrm>
+            <a:off x="7200900" y="3678841"/>
+            <a:ext cx="4533900" cy="323850"/>
+          </a:xfrm>
+          <a:prstGeom prst="rect">
+            <a:avLst/>
+          </a:prstGeom>
+          <a:noFill/>
+          <a:ln/>
+        </p:spPr>
+        <p:txBody>
+          <a:bodyPr wrap="none" lIns="0" tIns="0" rIns="0" bIns="0" rtlCol="0" anchor="t"/>
+          <a:lstStyle/>
+          <a:p>
+            <a:pPr algn="l" indent="0" marL="0">
+              <a:lnSpc>
+                <a:spcPts val="2242"/>
+              </a:lnSpc>
+              <a:buNone/>
+            </a:pPr>
+            <a:r>
+              <a:rPr lang="zh-CN" altLang="en-US" sz="1950" b="1" dirty="0">
+                <a:solidFill>
+                  <a:srgbClr val="235E96"/>
+                </a:solidFill>
+                <a:latin typeface="Noto Sans CJK SC" pitchFamily="34" charset="0"/>
+                <a:ea typeface="Noto Sans CJK SC" pitchFamily="34" charset="-122"/>
+                <a:cs typeface="Noto Sans CJK SC" pitchFamily="34" charset="-120"/>
+              </a:rPr>
+              <a:t>方法改变了什么</a:t>
+            </a:r>
+            <a:endParaRPr lang="zh-CN" sz="1950" dirty="0"/>
+          </a:p>
+        </p:txBody>
+      </p:sp>
+      <p:sp>
+        <p:nvSpPr>
+          <p:cNvPr id="21" name="T01/card/region-2/body"/>
+          <p:cNvSpPr/>
+          <p:nvPr/>
+        </p:nvSpPr>
+        <p:spPr>
+          <a:xfrm>
+            <a:off x="7200900" y="4059841"/>
+            <a:ext cx="4533900" cy="669703"/>
+          </a:xfrm>
+          <a:prstGeom prst="rect">
+            <a:avLst/>
+          </a:prstGeom>
+          <a:noFill/>
+          <a:ln/>
+        </p:spPr>
+        <p:txBody>
+          <a:bodyPr wrap="none" lIns="0" tIns="0" rIns="0" bIns="0" rtlCol="0" anchor="t"/>
+          <a:lstStyle/>
+          <a:p>
+            <a:pPr algn="l" indent="0" marL="0">
+              <a:lnSpc>
+                <a:spcPts val="2232"/>
+              </a:lnSpc>
+              <a:buNone/>
+            </a:pPr>
+            <a:r>
+              <a:rPr lang="zh-CN" altLang="en-US" sz="1800" dirty="0">
+                <a:solidFill>
+                  <a:srgbClr val="1C2430"/>
+                </a:solidFill>
+                <a:latin typeface="Noto Sans CJK SC" pitchFamily="34" charset="0"/>
+                <a:ea typeface="Noto Sans CJK SC" pitchFamily="34" charset="-122"/>
+                <a:cs typeface="Noto Sans CJK SC" pitchFamily="34" charset="-120"/>
+              </a:rPr>
+              <a:t>说明</a:t>
+            </a:r>
+            <a:pPr algn="l" indent="0" marL="0">
+              <a:lnSpc>
+                <a:spcPts val="2232"/>
               </a:lnSpc>
               <a:buNone/>
             </a:pPr>
             <a:r>
               <a:rPr lang="zh-CN" altLang="en-US" sz="1800" b="1" dirty="0">
                 <a:solidFill>
-                  <a:srgbClr val="355D88"/>
-                </a:solidFill>
-                <a:latin typeface="Noto Sans CJK SC" pitchFamily="34" charset="0"/>
-                <a:ea typeface="Noto Sans CJK SC" pitchFamily="34" charset="-122"/>
-                <a:cs typeface="Noto Sans CJK SC" pitchFamily="34" charset="-120"/>
-              </a:rPr>
-              <a:t>研究问题</a:t>
+                  <a:srgbClr val="235E96"/>
+                </a:solidFill>
+                <a:latin typeface="Noto Sans CJK SC" pitchFamily="34" charset="0"/>
+                <a:ea typeface="Noto Sans CJK SC" pitchFamily="34" charset="-122"/>
+                <a:cs typeface="Noto Sans CJK SC" pitchFamily="34" charset="-120"/>
+              </a:rPr>
+              <a:t>输入</a:t>
+            </a:r>
+            <a:pPr algn="l" indent="0" marL="0">
+              <a:lnSpc>
+                <a:spcPts val="2232"/>
+              </a:lnSpc>
+              <a:buNone/>
+            </a:pPr>
+            <a:r>
+              <a:rPr lang="zh-CN" altLang="en-US" sz="1800" dirty="0">
+                <a:solidFill>
+                  <a:srgbClr val="1C2430"/>
+                </a:solidFill>
+                <a:latin typeface="Noto Sans CJK SC" pitchFamily="34" charset="0"/>
+                <a:ea typeface="Noto Sans CJK SC" pitchFamily="34" charset="-122"/>
+                <a:cs typeface="Noto Sans CJK SC" pitchFamily="34" charset="-120"/>
+              </a:rPr>
+              <a:t>、处理与</a:t>
+            </a:r>
+            <a:pPr algn="l" indent="0" marL="0">
+              <a:lnSpc>
+                <a:spcPts val="2232"/>
+              </a:lnSpc>
+              <a:buNone/>
+            </a:pPr>
+            <a:r>
+              <a:rPr lang="zh-CN" altLang="en-US" sz="1800" b="1" dirty="0">
+                <a:solidFill>
+                  <a:srgbClr val="235E96"/>
+                </a:solidFill>
+                <a:latin typeface="Noto Sans CJK SC" pitchFamily="34" charset="0"/>
+                <a:ea typeface="Noto Sans CJK SC" pitchFamily="34" charset="-122"/>
+                <a:cs typeface="Noto Sans CJK SC" pitchFamily="34" charset="-120"/>
+              </a:rPr>
+              <a:t>输出</a:t>
             </a:r>
             <a:endParaRPr lang="zh-CN" sz="1800" dirty="0"/>
           </a:p>
-        </p:txBody>
-      </p:sp>
-      <p:sp>
-        <p:nvSpPr>
-          <p:cNvPr id="19" name="T01/card/region-1/body"/>
-          <p:cNvSpPr/>
-          <p:nvPr/>
-        </p:nvSpPr>
-        <p:spPr>
-          <a:xfrm>
-            <a:off x="7353300" y="2952750"/>
-            <a:ext cx="4381500" cy="590550"/>
-          </a:xfrm>
-          <a:prstGeom prst="rect">
-            <a:avLst/>
-          </a:prstGeom>
-          <a:noFill/>
-          <a:ln/>
-        </p:spPr>
-        <p:txBody>
-          <a:bodyPr wrap="none" lIns="0" tIns="0" rIns="0" bIns="0" rtlCol="0" anchor="t"/>
-          <a:lstStyle/>
-          <a:p>
-            <a:pPr algn="l" indent="0" marL="0">
-              <a:lnSpc>
-                <a:spcPts val="2139"/>
-              </a:lnSpc>
-              <a:buNone/>
-            </a:pPr>
-            <a:r>
-              <a:rPr lang="zh-CN" altLang="en-US" sz="1725" dirty="0">
+          <a:p>
+            <a:pPr algn="l" indent="0" marL="0">
+              <a:lnSpc>
+                <a:spcPts val="2232"/>
+              </a:lnSpc>
+              <a:buNone/>
+            </a:pPr>
+            <a:r>
+              <a:rPr lang="zh-CN" altLang="en-US" sz="1800" dirty="0">
                 <a:solidFill>
                   <a:srgbClr val="1C2430"/>
                 </a:solidFill>
@@ -1968,133 +2157,9 @@
                 <a:ea typeface="Noto Sans CJK SC" pitchFamily="34" charset="-122"/>
                 <a:cs typeface="Noto Sans CJK SC" pitchFamily="34" charset="-120"/>
               </a:rPr>
-              <a:t>明确研究对象与问题边界</a:t>
-            </a:r>
-            <a:endParaRPr lang="zh-CN" sz="1725" dirty="0"/>
-          </a:p>
-          <a:p>
-            <a:pPr algn="l" indent="0" marL="0">
-              <a:lnSpc>
-                <a:spcPts val="2139"/>
-              </a:lnSpc>
-              <a:buNone/>
-            </a:pPr>
-            <a:r>
-              <a:rPr lang="zh-CN" altLang="en-US" sz="1725" dirty="0">
-                <a:solidFill>
-                  <a:srgbClr val="1C2430"/>
-                </a:solidFill>
-                <a:latin typeface="Noto Sans CJK SC" pitchFamily="34" charset="0"/>
-                <a:ea typeface="Noto Sans CJK SC" pitchFamily="34" charset="-122"/>
-                <a:cs typeface="Noto Sans CJK SC" pitchFamily="34" charset="-120"/>
-              </a:rPr>
-              <a:t>给出当前方法尚未解释的关系</a:t>
-            </a:r>
-            <a:endParaRPr lang="zh-CN" sz="1725" dirty="0"/>
-          </a:p>
-        </p:txBody>
-      </p:sp>
-      <p:sp>
-        <p:nvSpPr>
-          <p:cNvPr id="20" name="T01/card/region-2/title"/>
-          <p:cNvSpPr/>
-          <p:nvPr/>
-        </p:nvSpPr>
-        <p:spPr>
-          <a:xfrm>
-            <a:off x="7200900" y="3771900"/>
-            <a:ext cx="4533900" cy="323850"/>
-          </a:xfrm>
-          <a:prstGeom prst="rect">
-            <a:avLst/>
-          </a:prstGeom>
-          <a:noFill/>
-          <a:ln/>
-        </p:spPr>
-        <p:txBody>
-          <a:bodyPr wrap="none" lIns="0" tIns="0" rIns="0" bIns="0" rtlCol="0" anchor="t"/>
-          <a:lstStyle/>
-          <a:p>
-            <a:pPr algn="l" indent="0" marL="0">
-              <a:lnSpc>
-                <a:spcPts val="2156"/>
-              </a:lnSpc>
-              <a:buNone/>
-            </a:pPr>
-            <a:r>
-              <a:rPr lang="zh-CN" altLang="en-US" sz="1875" b="1" dirty="0">
-                <a:solidFill>
-                  <a:srgbClr val="173C70"/>
-                </a:solidFill>
-                <a:latin typeface="Noto Sans CJK SC" pitchFamily="34" charset="0"/>
-                <a:ea typeface="Noto Sans CJK SC" pitchFamily="34" charset="-122"/>
-                <a:cs typeface="Noto Sans CJK SC" pitchFamily="34" charset="-120"/>
-              </a:rPr>
-              <a:t>方法改变了什么</a:t>
-            </a:r>
-            <a:endParaRPr lang="zh-CN" sz="1875" dirty="0"/>
-          </a:p>
-        </p:txBody>
-      </p:sp>
-      <p:sp>
-        <p:nvSpPr>
-          <p:cNvPr id="21" name="T01/card/region-2/body"/>
-          <p:cNvSpPr/>
-          <p:nvPr/>
-        </p:nvSpPr>
-        <p:spPr>
-          <a:xfrm>
-            <a:off x="7200900" y="4152900"/>
-            <a:ext cx="4533900" cy="628650"/>
-          </a:xfrm>
-          <a:prstGeom prst="rect">
-            <a:avLst/>
-          </a:prstGeom>
-          <a:noFill/>
-          <a:ln/>
-        </p:spPr>
-        <p:txBody>
-          <a:bodyPr wrap="none" lIns="0" tIns="0" rIns="0" bIns="0" rtlCol="0" anchor="t"/>
-          <a:lstStyle/>
-          <a:p>
-            <a:pPr algn="l" indent="0" marL="0">
-              <a:lnSpc>
-                <a:spcPts val="2139"/>
-              </a:lnSpc>
-              <a:buNone/>
-            </a:pPr>
-            <a:r>
-              <a:rPr lang="zh-CN" altLang="en-US" sz="1725" dirty="0">
-                <a:solidFill>
-                  <a:srgbClr val="1C2430"/>
-                </a:solidFill>
-                <a:latin typeface="Noto Sans CJK SC" pitchFamily="34" charset="0"/>
-                <a:ea typeface="Noto Sans CJK SC" pitchFamily="34" charset="-122"/>
-                <a:cs typeface="Noto Sans CJK SC" pitchFamily="34" charset="-120"/>
-              </a:rPr>
-              <a:t>说明输入、处理与输出</a:t>
-            </a:r>
-            <a:endParaRPr lang="zh-CN" sz="1725" dirty="0"/>
-          </a:p>
-          <a:p>
-            <a:pPr algn="l" indent="0" marL="0">
-              <a:lnSpc>
-                <a:spcPts val="2139"/>
-              </a:lnSpc>
-              <a:buNone/>
-            </a:pPr>
-            <a:r>
-              <a:rPr lang="zh-CN" altLang="en-US" sz="1725" dirty="0">
-                <a:solidFill>
-                  <a:srgbClr val="1C2430"/>
-                </a:solidFill>
-                <a:latin typeface="Noto Sans CJK SC" pitchFamily="34" charset="0"/>
-                <a:ea typeface="Noto Sans CJK SC" pitchFamily="34" charset="-122"/>
-                <a:cs typeface="Noto Sans CJK SC" pitchFamily="34" charset="-120"/>
-              </a:rPr>
               <a:t>指出新增方法实际介入的环节</a:t>
             </a:r>
-            <a:endParaRPr lang="zh-CN" sz="1725" dirty="0"/>
+            <a:endParaRPr lang="zh-CN" sz="1800" dirty="0"/>
           </a:p>
         </p:txBody>
       </p:sp>
@@ -2106,7 +2171,7 @@
         </p:nvSpPr>
         <p:spPr>
           <a:xfrm>
-            <a:off x="7200900" y="5295900"/>
+            <a:off x="7200900" y="5248275"/>
             <a:ext cx="4533900" cy="0"/>
           </a:xfrm>
           <a:prstGeom prst="line">
@@ -2129,7 +2194,7 @@
         </p:nvSpPr>
         <p:spPr>
           <a:xfrm>
-            <a:off x="7200900" y="5295900"/>
+            <a:off x="7200900" y="5248275"/>
             <a:ext cx="342900" cy="0"/>
           </a:xfrm>
           <a:prstGeom prst="line">
@@ -2138,7 +2203,7 @@
           <a:noFill/>
           <a:ln w="17145">
             <a:solidFill>
-              <a:srgbClr val="173C70"/>
+              <a:srgbClr val="146C63"/>
             </a:solidFill>
             <a:prstDash val="solid"/>
           </a:ln>
@@ -2152,7 +2217,7 @@
         </p:nvSpPr>
         <p:spPr>
           <a:xfrm>
-            <a:off x="7200900" y="4953000"/>
+            <a:off x="7200900" y="4905375"/>
             <a:ext cx="4533900" cy="323850"/>
           </a:xfrm>
           <a:prstGeom prst="rect">
@@ -2167,14 +2232,14 @@
           <a:p>
             <a:pPr algn="l" indent="0" marL="0">
               <a:lnSpc>
-                <a:spcPts val="2156"/>
-              </a:lnSpc>
-              <a:buNone/>
-            </a:pPr>
-            <a:r>
-              <a:rPr lang="zh-CN" altLang="en-US" sz="1875" b="1" dirty="0">
-                <a:solidFill>
-                  <a:srgbClr val="173C70"/>
+                <a:spcPts val="2242"/>
+              </a:lnSpc>
+              <a:buNone/>
+            </a:pPr>
+            <a:r>
+              <a:rPr lang="zh-CN" altLang="en-US" sz="1950" b="1" dirty="0">
+                <a:solidFill>
+                  <a:srgbClr val="146C63"/>
                 </a:solidFill>
                 <a:latin typeface="Noto Sans CJK SC" pitchFamily="34" charset="0"/>
                 <a:ea typeface="Noto Sans CJK SC" pitchFamily="34" charset="-122"/>
@@ -2182,7 +2247,7 @@
               </a:rPr>
               <a:t>结果及适用范围</a:t>
             </a:r>
-            <a:endParaRPr lang="zh-CN" sz="1875" dirty="0"/>
+            <a:endParaRPr lang="zh-CN" sz="1950" dirty="0"/>
           </a:p>
         </p:txBody>
       </p:sp>
@@ -2194,8 +2259,8 @@
         </p:nvSpPr>
         <p:spPr>
           <a:xfrm>
-            <a:off x="7200900" y="5429250"/>
-            <a:ext cx="4533900" cy="571500"/>
+            <a:off x="7200900" y="5381625"/>
+            <a:ext cx="4533900" cy="613982"/>
           </a:xfrm>
           <a:prstGeom prst="rect">
             <a:avLst/>
@@ -2284,7 +2349,7 @@
                 <a:ea typeface="Noto Sans CJK SC" pitchFamily="34" charset="-122"/>
                 <a:cs typeface="Noto Sans CJK SC" pitchFamily="34" charset="-120"/>
               </a:rPr>
-              <a:t>T1 · 2026 · 待替换</a:t>
+              <a:t>T1 · 2026 · 书目占位；图表均为合成示例</a:t>
             </a:r>
             <a:endParaRPr lang="zh-CN" sz="1125" dirty="0"/>
           </a:p>
@@ -2393,14 +2458,14 @@
       </p:sp>
       <p:sp>
         <p:nvSpPr>
-          <p:cNvPr id="4" name="T02/kicker"/>
-          <p:cNvSpPr/>
-          <p:nvPr/>
-        </p:nvSpPr>
-        <p:spPr>
-          <a:xfrm>
-            <a:off x="457200" y="152400"/>
-            <a:ext cx="11277600" cy="190500"/>
+          <p:cNvPr id="4" name="T02/title"/>
+          <p:cNvSpPr/>
+          <p:nvPr/>
+        </p:nvSpPr>
+        <p:spPr>
+          <a:xfrm>
+            <a:off x="457200" y="209550"/>
+            <a:ext cx="11277600" cy="438150"/>
           </a:xfrm>
           <a:prstGeom prst="rect">
             <a:avLst/>
@@ -2414,54 +2479,12 @@
           <a:p>
             <a:pPr algn="l" indent="0" marL="0">
               <a:lnSpc>
-                <a:spcPts val="1320"/>
-              </a:lnSpc>
-              <a:buNone/>
-            </a:pPr>
-            <a:r>
-              <a:rPr lang="zh-CN" altLang="en-US" sz="1200" dirty="0">
-                <a:solidFill>
-                  <a:srgbClr val="515B68"/>
-                </a:solidFill>
-                <a:latin typeface="Noto Sans CJK SC" pitchFamily="34" charset="0"/>
-                <a:ea typeface="Noto Sans CJK SC" pitchFamily="34" charset="-122"/>
-                <a:cs typeface="Noto Sans CJK SC" pitchFamily="34" charset="-120"/>
-              </a:rPr>
-              <a:t>结构模板 / 占位说明与合成数据</a:t>
-            </a:r>
-            <a:endParaRPr lang="zh-CN" sz="1200" dirty="0"/>
-          </a:p>
-        </p:txBody>
-      </p:sp>
-      <p:sp>
-        <p:nvSpPr>
-          <p:cNvPr id="5" name="T02/title"/>
-          <p:cNvSpPr/>
-          <p:nvPr/>
-        </p:nvSpPr>
-        <p:spPr>
-          <a:xfrm>
-            <a:off x="457200" y="381000"/>
-            <a:ext cx="11277600" cy="400050"/>
-          </a:xfrm>
-          <a:prstGeom prst="rect">
-            <a:avLst/>
-          </a:prstGeom>
-          <a:noFill/>
-          <a:ln/>
-        </p:spPr>
-        <p:txBody>
-          <a:bodyPr wrap="none" lIns="0" tIns="0" rIns="0" bIns="0" rtlCol="0" anchor="t"/>
-          <a:lstStyle/>
-          <a:p>
-            <a:pPr algn="l" indent="0" marL="0">
-              <a:lnSpc>
-                <a:spcPts val="2856"/>
-              </a:lnSpc>
-              <a:buNone/>
-            </a:pPr>
-            <a:r>
-              <a:rPr lang="zh-CN" altLang="en-US" sz="2550" b="1" dirty="0">
+                <a:spcPts val="3360"/>
+              </a:lnSpc>
+              <a:buNone/>
+            </a:pPr>
+            <a:r>
+              <a:rPr lang="zh-CN" altLang="en-US" sz="3000" b="1" dirty="0">
                 <a:solidFill>
                   <a:srgbClr val="1C2430"/>
                 </a:solidFill>
@@ -2471,258 +2494,25 @@
               </a:rPr>
               <a:t>缺口与假说</a:t>
             </a:r>
-            <a:endParaRPr lang="zh-CN" sz="2550" dirty="0"/>
-          </a:p>
-        </p:txBody>
-      </p:sp>
-      <p:sp>
-        <p:nvSpPr>
-          <p:cNvPr id="6" name="T02/header-rule"/>
-          <p:cNvSpPr/>
-          <p:nvPr/>
-        </p:nvSpPr>
-        <p:spPr>
-          <a:xfrm>
-            <a:off x="457200" y="876300"/>
+            <a:endParaRPr lang="zh-CN" sz="3000" dirty="0"/>
+          </a:p>
+        </p:txBody>
+      </p:sp>
+      <p:sp>
+        <p:nvSpPr>
+          <p:cNvPr id="5" name="T02/header-rule"/>
+          <p:cNvSpPr/>
+          <p:nvPr/>
+        </p:nvSpPr>
+        <p:spPr>
+          <a:xfrm>
+            <a:off x="457200" y="752475"/>
             <a:ext cx="11277600" cy="0"/>
           </a:xfrm>
           <a:prstGeom prst="line">
             <a:avLst/>
           </a:prstGeom>
           <a:noFill/>
-          <a:ln w="11430">
-            <a:solidFill>
-              <a:srgbClr val="173C70"/>
-            </a:solidFill>
-            <a:prstDash val="solid"/>
-          </a:ln>
-        </p:spPr>
-      </p:sp>
-      <p:sp>
-        <p:nvSpPr>
-          <p:cNvPr id="7" name="T02/paper-title"/>
-          <p:cNvSpPr/>
-          <p:nvPr/>
-        </p:nvSpPr>
-        <p:spPr>
-          <a:xfrm>
-            <a:off x="457200" y="1219200"/>
-            <a:ext cx="11277600" cy="571500"/>
-          </a:xfrm>
-          <a:prstGeom prst="rect">
-            <a:avLst/>
-          </a:prstGeom>
-          <a:noFill/>
-          <a:ln/>
-        </p:spPr>
-        <p:txBody>
-          <a:bodyPr wrap="none" lIns="0" tIns="0" rIns="0" bIns="0" rtlCol="0" anchor="t"/>
-          <a:lstStyle/>
-          <a:p>
-            <a:pPr algn="l" indent="0" marL="0">
-              <a:lnSpc>
-                <a:spcPts val="2250"/>
-              </a:lnSpc>
-              <a:buNone/>
-            </a:pPr>
-            <a:r>
-              <a:rPr lang="zh-CN" altLang="en-US" sz="1875" b="1" dirty="0">
-                <a:solidFill>
-                  <a:srgbClr val="1C2430"/>
-                </a:solidFill>
-                <a:latin typeface="Noto Sans CJK SC" pitchFamily="34" charset="0"/>
-                <a:ea typeface="Noto Sans CJK SC" pitchFamily="34" charset="-122"/>
-                <a:cs typeface="Noto Sans CJK SC" pitchFamily="34" charset="-120"/>
-              </a:rPr>
-              <a:t>Full article title: connecting decision models, experimental evidence and independent </a:t>
-            </a:r>
-            <a:endParaRPr lang="zh-CN" sz="1875" dirty="0"/>
-          </a:p>
-          <a:p>
-            <a:pPr algn="l" indent="0" marL="0">
-              <a:lnSpc>
-                <a:spcPts val="2250"/>
-              </a:lnSpc>
-              <a:buNone/>
-            </a:pPr>
-            <a:r>
-              <a:rPr lang="zh-CN" altLang="en-US" sz="1875" b="1" dirty="0">
-                <a:solidFill>
-                  <a:srgbClr val="1C2430"/>
-                </a:solidFill>
-                <a:latin typeface="Noto Sans CJK SC" pitchFamily="34" charset="0"/>
-                <a:ea typeface="Noto Sans CJK SC" pitchFamily="34" charset="-122"/>
-                <a:cs typeface="Noto Sans CJK SC" pitchFamily="34" charset="-120"/>
-              </a:rPr>
-              <a:t>validation in crop cultivation</a:t>
-            </a:r>
-            <a:endParaRPr lang="zh-CN" sz="1875" dirty="0"/>
-          </a:p>
-        </p:txBody>
-      </p:sp>
-      <p:sp>
-        <p:nvSpPr>
-          <p:cNvPr id="8" name="T02/paper-bibliography"/>
-          <p:cNvSpPr/>
-          <p:nvPr/>
-        </p:nvSpPr>
-        <p:spPr>
-          <a:xfrm>
-            <a:off x="457200" y="1847850"/>
-            <a:ext cx="11277600" cy="514350"/>
-          </a:xfrm>
-          <a:prstGeom prst="rect">
-            <a:avLst/>
-          </a:prstGeom>
-          <a:noFill/>
-          <a:ln/>
-        </p:spPr>
-        <p:txBody>
-          <a:bodyPr wrap="none" lIns="0" tIns="0" rIns="0" bIns="0" rtlCol="0" anchor="t"/>
-          <a:lstStyle/>
-          <a:p>
-            <a:pPr algn="l" indent="0" marL="0">
-              <a:lnSpc>
-                <a:spcPts val="1556"/>
-              </a:lnSpc>
-              <a:buNone/>
-            </a:pPr>
-            <a:r>
-              <a:rPr lang="zh-CN" altLang="en-US" sz="1275" dirty="0">
-                <a:solidFill>
-                  <a:srgbClr val="515B68"/>
-                </a:solidFill>
-                <a:latin typeface="Noto Sans CJK SC" pitchFamily="34" charset="0"/>
-                <a:ea typeface="Noto Sans CJK SC" pitchFamily="34" charset="-122"/>
-                <a:cs typeface="Noto Sans CJK SC" pitchFamily="34" charset="-120"/>
-              </a:rPr>
-              <a:t>作者姓名（替换） · 期刊与卷页（替换） · 2026 · DOI: 待替换</a:t>
-            </a:r>
-            <a:endParaRPr lang="zh-CN" sz="1275" dirty="0"/>
-          </a:p>
-        </p:txBody>
-      </p:sp>
-      <p:sp>
-        <p:nvSpPr>
-          <p:cNvPr id="9" name="T02/card/region-1/title"/>
-          <p:cNvSpPr/>
-          <p:nvPr/>
-        </p:nvSpPr>
-        <p:spPr>
-          <a:xfrm>
-            <a:off x="457200" y="2590800"/>
-            <a:ext cx="5410200" cy="323850"/>
-          </a:xfrm>
-          <a:prstGeom prst="rect">
-            <a:avLst/>
-          </a:prstGeom>
-          <a:noFill/>
-          <a:ln/>
-        </p:spPr>
-        <p:txBody>
-          <a:bodyPr wrap="none" lIns="0" tIns="0" rIns="0" bIns="0" rtlCol="0" anchor="t"/>
-          <a:lstStyle/>
-          <a:p>
-            <a:pPr algn="l" indent="0" marL="0">
-              <a:lnSpc>
-                <a:spcPts val="2156"/>
-              </a:lnSpc>
-              <a:buNone/>
-            </a:pPr>
-            <a:r>
-              <a:rPr lang="zh-CN" altLang="en-US" sz="1875" b="1" dirty="0">
-                <a:solidFill>
-                  <a:srgbClr val="173C70"/>
-                </a:solidFill>
-                <a:latin typeface="Noto Sans CJK SC" pitchFamily="34" charset="0"/>
-                <a:ea typeface="Noto Sans CJK SC" pitchFamily="34" charset="-122"/>
-                <a:cs typeface="Noto Sans CJK SC" pitchFamily="34" charset="-120"/>
-              </a:rPr>
-              <a:t>已有认识</a:t>
-            </a:r>
-            <a:endParaRPr lang="zh-CN" sz="1875" dirty="0"/>
-          </a:p>
-        </p:txBody>
-      </p:sp>
-      <p:sp>
-        <p:nvSpPr>
-          <p:cNvPr id="10" name="T02/card/region-1/body"/>
-          <p:cNvSpPr/>
-          <p:nvPr/>
-        </p:nvSpPr>
-        <p:spPr>
-          <a:xfrm>
-            <a:off x="457200" y="3038475"/>
-            <a:ext cx="5410200" cy="1000125"/>
-          </a:xfrm>
-          <a:prstGeom prst="rect">
-            <a:avLst/>
-          </a:prstGeom>
-          <a:noFill/>
-          <a:ln/>
-        </p:spPr>
-        <p:txBody>
-          <a:bodyPr wrap="none" lIns="0" tIns="0" rIns="0" bIns="0" rtlCol="0" anchor="t"/>
-          <a:lstStyle/>
-          <a:p>
-            <a:pPr algn="l" indent="0" marL="0">
-              <a:lnSpc>
-                <a:spcPts val="2232"/>
-              </a:lnSpc>
-              <a:buNone/>
-            </a:pPr>
-            <a:r>
-              <a:rPr lang="zh-CN" altLang="en-US" sz="1800" dirty="0">
-                <a:solidFill>
-                  <a:srgbClr val="1C2430"/>
-                </a:solidFill>
-                <a:latin typeface="Noto Sans CJK SC" pitchFamily="34" charset="0"/>
-                <a:ea typeface="Noto Sans CJK SC" pitchFamily="34" charset="-122"/>
-                <a:cs typeface="Noto Sans CJK SC" pitchFamily="34" charset="-120"/>
-              </a:rPr>
-              <a:t>列出已有研究共同支持的结论</a:t>
-            </a:r>
-            <a:endParaRPr lang="zh-CN" sz="1800" dirty="0"/>
-          </a:p>
-          <a:p>
-            <a:pPr algn="l" indent="0" marL="0">
-              <a:lnSpc>
-                <a:spcPts val="2232"/>
-              </a:lnSpc>
-              <a:buNone/>
-            </a:pPr>
-            <a:r>
-              <a:rPr lang="zh-CN" altLang="en-US" sz="1800" dirty="0">
-                <a:solidFill>
-                  <a:srgbClr val="1C2430"/>
-                </a:solidFill>
-                <a:latin typeface="Noto Sans CJK SC" pitchFamily="34" charset="0"/>
-                <a:ea typeface="Noto Sans CJK SC" pitchFamily="34" charset="-122"/>
-                <a:cs typeface="Noto Sans CJK SC" pitchFamily="34" charset="-120"/>
-              </a:rPr>
-              <a:t>说明该结论依赖的数据条件</a:t>
-            </a:r>
-            <a:endParaRPr lang="zh-CN" sz="1800" dirty="0"/>
-          </a:p>
-        </p:txBody>
-      </p:sp>
-      <p:sp>
-        <p:nvSpPr>
-          <p:cNvPr id="11" name="T02/card/region-2/frame"/>
-          <p:cNvSpPr/>
-          <p:nvPr/>
-        </p:nvSpPr>
-        <p:spPr>
-          <a:xfrm>
-            <a:off x="6153150" y="2686050"/>
-            <a:ext cx="5581650" cy="1390650"/>
-          </a:xfrm>
-          <a:prstGeom prst="rect">
-            <a:avLst/>
-          </a:prstGeom>
-          <a:solidFill>
-            <a:srgbClr val="FFFFFF"/>
-          </a:solidFill>
           <a:ln w="10478">
             <a:solidFill>
               <a:srgbClr val="BEC8D4"/>
@@ -2733,14 +2523,164 @@
       </p:sp>
       <p:sp>
         <p:nvSpPr>
-          <p:cNvPr id="12" name="T02/card/region-2/tab"/>
-          <p:cNvSpPr/>
-          <p:nvPr/>
-        </p:nvSpPr>
-        <p:spPr>
-          <a:xfrm>
-            <a:off x="6267450" y="2571750"/>
-            <a:ext cx="1181100" cy="320040"/>
+          <p:cNvPr id="6" name="T02/header-accent"/>
+          <p:cNvSpPr/>
+          <p:nvPr/>
+        </p:nvSpPr>
+        <p:spPr>
+          <a:xfrm>
+            <a:off x="457200" y="752475"/>
+            <a:ext cx="704850" cy="0"/>
+          </a:xfrm>
+          <a:prstGeom prst="line">
+            <a:avLst/>
+          </a:prstGeom>
+          <a:noFill/>
+          <a:ln w="28575">
+            <a:solidFill>
+              <a:srgbClr val="173C70"/>
+            </a:solidFill>
+            <a:prstDash val="solid"/>
+          </a:ln>
+        </p:spPr>
+      </p:sp>
+      <p:sp>
+        <p:nvSpPr>
+          <p:cNvPr id="7" name="T02/paper-title"/>
+          <p:cNvSpPr/>
+          <p:nvPr/>
+        </p:nvSpPr>
+        <p:spPr>
+          <a:xfrm>
+            <a:off x="457200" y="1028700"/>
+            <a:ext cx="11277600" cy="571500"/>
+          </a:xfrm>
+          <a:prstGeom prst="rect">
+            <a:avLst/>
+          </a:prstGeom>
+          <a:noFill/>
+          <a:ln/>
+        </p:spPr>
+        <p:txBody>
+          <a:bodyPr wrap="none" lIns="0" tIns="0" rIns="0" bIns="0" rtlCol="0" anchor="t"/>
+          <a:lstStyle/>
+          <a:p>
+            <a:pPr algn="l" indent="0" marL="0">
+              <a:lnSpc>
+                <a:spcPts val="2250"/>
+              </a:lnSpc>
+              <a:buNone/>
+            </a:pPr>
+            <a:r>
+              <a:rPr lang="zh-CN" altLang="en-US" sz="1875" b="1" dirty="0">
+                <a:solidFill>
+                  <a:srgbClr val="1C2430"/>
+                </a:solidFill>
+                <a:latin typeface="Noto Sans CJK SC" pitchFamily="34" charset="0"/>
+                <a:ea typeface="Noto Sans CJK SC" pitchFamily="34" charset="-122"/>
+                <a:cs typeface="Noto Sans CJK SC" pitchFamily="34" charset="-120"/>
+              </a:rPr>
+              <a:t>Full article title: connecting decision models, experimental evidence and independent </a:t>
+            </a:r>
+            <a:endParaRPr lang="zh-CN" sz="1875" dirty="0"/>
+          </a:p>
+          <a:p>
+            <a:pPr algn="l" indent="0" marL="0">
+              <a:lnSpc>
+                <a:spcPts val="2250"/>
+              </a:lnSpc>
+              <a:buNone/>
+            </a:pPr>
+            <a:r>
+              <a:rPr lang="zh-CN" altLang="en-US" sz="1875" b="1" dirty="0">
+                <a:solidFill>
+                  <a:srgbClr val="1C2430"/>
+                </a:solidFill>
+                <a:latin typeface="Noto Sans CJK SC" pitchFamily="34" charset="0"/>
+                <a:ea typeface="Noto Sans CJK SC" pitchFamily="34" charset="-122"/>
+                <a:cs typeface="Noto Sans CJK SC" pitchFamily="34" charset="-120"/>
+              </a:rPr>
+              <a:t>validation in crop cultivation</a:t>
+            </a:r>
+            <a:endParaRPr lang="zh-CN" sz="1875" dirty="0"/>
+          </a:p>
+        </p:txBody>
+      </p:sp>
+      <p:sp>
+        <p:nvSpPr>
+          <p:cNvPr id="8" name="T02/paper-bibliography"/>
+          <p:cNvSpPr/>
+          <p:nvPr/>
+        </p:nvSpPr>
+        <p:spPr>
+          <a:xfrm>
+            <a:off x="457200" y="1657350"/>
+            <a:ext cx="11277600" cy="558356"/>
+          </a:xfrm>
+          <a:prstGeom prst="rect">
+            <a:avLst/>
+          </a:prstGeom>
+          <a:noFill/>
+          <a:ln/>
+        </p:spPr>
+        <p:txBody>
+          <a:bodyPr wrap="none" lIns="0" tIns="0" rIns="0" bIns="0" rtlCol="0" anchor="t"/>
+          <a:lstStyle/>
+          <a:p>
+            <a:pPr algn="l" indent="0" marL="0">
+              <a:lnSpc>
+                <a:spcPts val="1556"/>
+              </a:lnSpc>
+              <a:buNone/>
+            </a:pPr>
+            <a:r>
+              <a:rPr lang="zh-CN" altLang="en-US" sz="1275" dirty="0">
+                <a:solidFill>
+                  <a:srgbClr val="515B68"/>
+                </a:solidFill>
+                <a:latin typeface="Noto Sans CJK SC" pitchFamily="34" charset="0"/>
+                <a:ea typeface="Noto Sans CJK SC" pitchFamily="34" charset="-122"/>
+                <a:cs typeface="Noto Sans CJK SC" pitchFamily="34" charset="-120"/>
+              </a:rPr>
+              <a:t>作者姓名（替换） · 期刊与卷页（替换） · 2026 · DOI: 书目占位；图表均为合成示例</a:t>
+            </a:r>
+            <a:endParaRPr lang="zh-CN" sz="1275" dirty="0"/>
+          </a:p>
+        </p:txBody>
+      </p:sp>
+      <p:sp>
+        <p:nvSpPr>
+          <p:cNvPr id="9" name="T02/card/region-1/base-rule"/>
+          <p:cNvSpPr/>
+          <p:nvPr/>
+        </p:nvSpPr>
+        <p:spPr>
+          <a:xfrm>
+            <a:off x="457200" y="3996119"/>
+            <a:ext cx="5410200" cy="0"/>
+          </a:xfrm>
+          <a:prstGeom prst="line">
+            <a:avLst/>
+          </a:prstGeom>
+          <a:noFill/>
+          <a:ln w="10478">
+            <a:solidFill>
+              <a:srgbClr val="BEC8D4"/>
+            </a:solidFill>
+            <a:prstDash val="solid"/>
+          </a:ln>
+        </p:spPr>
+      </p:sp>
+      <p:sp>
+        <p:nvSpPr>
+          <p:cNvPr id="10" name="T02/card/region-1/side-mark"/>
+          <p:cNvSpPr/>
+          <p:nvPr/>
+        </p:nvSpPr>
+        <p:spPr>
+          <a:xfrm>
+            <a:off x="457200" y="2452307"/>
+            <a:ext cx="47625" cy="295275"/>
           </a:xfrm>
           <a:prstGeom prst="rect">
             <a:avLst/>
@@ -2760,14 +2700,14 @@
       </p:sp>
       <p:sp>
         <p:nvSpPr>
-          <p:cNvPr id="13" name="T02/card/region-2/title"/>
-          <p:cNvSpPr/>
-          <p:nvPr/>
-        </p:nvSpPr>
-        <p:spPr>
-          <a:xfrm>
-            <a:off x="6372225" y="2600325"/>
-            <a:ext cx="971550" cy="262890"/>
+          <p:cNvPr id="11" name="T02/card/region-1/title"/>
+          <p:cNvSpPr/>
+          <p:nvPr/>
+        </p:nvSpPr>
+        <p:spPr>
+          <a:xfrm>
+            <a:off x="609600" y="2452307"/>
+            <a:ext cx="5257800" cy="304800"/>
           </a:xfrm>
           <a:prstGeom prst="rect">
             <a:avLst/>
@@ -2781,54 +2721,74 @@
           <a:p>
             <a:pPr algn="l" indent="0" marL="0">
               <a:lnSpc>
-                <a:spcPts val="2070"/>
-              </a:lnSpc>
-              <a:buNone/>
-            </a:pPr>
-            <a:r>
-              <a:rPr lang="zh-CN" altLang="en-US" sz="1800" b="1" dirty="0">
-                <a:solidFill>
-                  <a:srgbClr val="FFFFFF"/>
-                </a:solidFill>
-                <a:latin typeface="Noto Sans CJK SC" pitchFamily="34" charset="0"/>
-                <a:ea typeface="Noto Sans CJK SC" pitchFamily="34" charset="-122"/>
-                <a:cs typeface="Noto Sans CJK SC" pitchFamily="34" charset="-120"/>
-              </a:rPr>
-              <a:t>尚存缺口</a:t>
+                <a:spcPts val="2242"/>
+              </a:lnSpc>
+              <a:buNone/>
+            </a:pPr>
+            <a:r>
+              <a:rPr lang="zh-CN" altLang="en-US" sz="1950" b="1" dirty="0">
+                <a:solidFill>
+                  <a:srgbClr val="173C70"/>
+                </a:solidFill>
+                <a:latin typeface="Noto Sans CJK SC" pitchFamily="34" charset="0"/>
+                <a:ea typeface="Noto Sans CJK SC" pitchFamily="34" charset="-122"/>
+                <a:cs typeface="Noto Sans CJK SC" pitchFamily="34" charset="-120"/>
+              </a:rPr>
+              <a:t>已有认识</a:t>
+            </a:r>
+            <a:endParaRPr lang="zh-CN" sz="1950" dirty="0"/>
+          </a:p>
+        </p:txBody>
+      </p:sp>
+      <p:sp>
+        <p:nvSpPr>
+          <p:cNvPr id="12" name="T02/card/region-1/body"/>
+          <p:cNvSpPr/>
+          <p:nvPr/>
+        </p:nvSpPr>
+        <p:spPr>
+          <a:xfrm>
+            <a:off x="609600" y="2871407"/>
+            <a:ext cx="5257800" cy="1029462"/>
+          </a:xfrm>
+          <a:prstGeom prst="rect">
+            <a:avLst/>
+          </a:prstGeom>
+          <a:noFill/>
+          <a:ln/>
+        </p:spPr>
+        <p:txBody>
+          <a:bodyPr wrap="none" lIns="0" tIns="0" rIns="0" bIns="0" rtlCol="0" anchor="t"/>
+          <a:lstStyle/>
+          <a:p>
+            <a:pPr algn="l" indent="0" marL="0">
+              <a:lnSpc>
+                <a:spcPts val="2232"/>
+              </a:lnSpc>
+              <a:buNone/>
+            </a:pPr>
+            <a:r>
+              <a:rPr lang="zh-CN" altLang="en-US" sz="1800" dirty="0">
+                <a:solidFill>
+                  <a:srgbClr val="1C2430"/>
+                </a:solidFill>
+                <a:latin typeface="Noto Sans CJK SC" pitchFamily="34" charset="0"/>
+                <a:ea typeface="Noto Sans CJK SC" pitchFamily="34" charset="-122"/>
+                <a:cs typeface="Noto Sans CJK SC" pitchFamily="34" charset="-120"/>
+              </a:rPr>
+              <a:t>列出已有研究共同支持的结论</a:t>
             </a:r>
             <a:endParaRPr lang="zh-CN" sz="1800" dirty="0"/>
           </a:p>
-        </p:txBody>
-      </p:sp>
-      <p:sp>
-        <p:nvSpPr>
-          <p:cNvPr id="14" name="T02/card/region-2/body"/>
-          <p:cNvSpPr/>
-          <p:nvPr/>
-        </p:nvSpPr>
-        <p:spPr>
-          <a:xfrm>
-            <a:off x="6286500" y="3034665"/>
-            <a:ext cx="5314950" cy="946785"/>
-          </a:xfrm>
-          <a:prstGeom prst="rect">
-            <a:avLst/>
-          </a:prstGeom>
-          <a:noFill/>
-          <a:ln/>
-        </p:spPr>
-        <p:txBody>
-          <a:bodyPr wrap="none" lIns="0" tIns="0" rIns="0" bIns="0" rtlCol="0" anchor="t"/>
-          <a:lstStyle/>
-          <a:p>
-            <a:pPr algn="l" indent="0" marL="0">
-              <a:lnSpc>
-                <a:spcPts val="2139"/>
-              </a:lnSpc>
-              <a:buNone/>
-            </a:pPr>
-            <a:r>
-              <a:rPr lang="zh-CN" altLang="en-US" sz="1725" dirty="0">
+          <a:p>
+            <a:pPr algn="l" indent="0" marL="0">
+              <a:lnSpc>
+                <a:spcPts val="2232"/>
+              </a:lnSpc>
+              <a:buNone/>
+            </a:pPr>
+            <a:r>
+              <a:rPr lang="zh-CN" altLang="en-US" sz="1800" dirty="0">
                 <a:solidFill>
                   <a:srgbClr val="1C2430"/>
                 </a:solidFill>
@@ -2836,42 +2796,22 @@
                 <a:ea typeface="Noto Sans CJK SC" pitchFamily="34" charset="-122"/>
                 <a:cs typeface="Noto Sans CJK SC" pitchFamily="34" charset="-120"/>
               </a:rPr>
-              <a:t>指出尚未验证的机制或条件</a:t>
-            </a:r>
-            <a:endParaRPr lang="zh-CN" sz="1725" dirty="0"/>
-          </a:p>
-          <a:p>
-            <a:pPr algn="l" indent="0" marL="0">
-              <a:lnSpc>
-                <a:spcPts val="2139"/>
-              </a:lnSpc>
-              <a:buNone/>
-            </a:pPr>
-            <a:r>
-              <a:rPr lang="zh-CN" altLang="en-US" sz="1725" dirty="0">
-                <a:solidFill>
-                  <a:srgbClr val="1C2430"/>
-                </a:solidFill>
-                <a:latin typeface="Noto Sans CJK SC" pitchFamily="34" charset="0"/>
-                <a:ea typeface="Noto Sans CJK SC" pitchFamily="34" charset="-122"/>
-                <a:cs typeface="Noto Sans CJK SC" pitchFamily="34" charset="-120"/>
-              </a:rPr>
-              <a:t>将缺口定位到具体决策接口</a:t>
-            </a:r>
-            <a:endParaRPr lang="zh-CN" sz="1725" dirty="0"/>
-          </a:p>
-        </p:txBody>
-      </p:sp>
-      <p:sp>
-        <p:nvSpPr>
-          <p:cNvPr id="15" name="T02/card/region-3/frame"/>
-          <p:cNvSpPr/>
-          <p:nvPr/>
-        </p:nvSpPr>
-        <p:spPr>
-          <a:xfrm>
-            <a:off x="457200" y="4324350"/>
-            <a:ext cx="7315200" cy="1714500"/>
+              <a:t>说明该结论依赖的数据条件</a:t>
+            </a:r>
+            <a:endParaRPr lang="zh-CN" sz="1800" dirty="0"/>
+          </a:p>
+        </p:txBody>
+      </p:sp>
+      <p:sp>
+        <p:nvSpPr>
+          <p:cNvPr id="13" name="T02/card/region-2/frame"/>
+          <p:cNvSpPr/>
+          <p:nvPr/>
+        </p:nvSpPr>
+        <p:spPr>
+          <a:xfrm>
+            <a:off x="6153150" y="2547557"/>
+            <a:ext cx="5581650" cy="1448562"/>
           </a:xfrm>
           <a:prstGeom prst="rect">
             <a:avLst/>
@@ -2889,20 +2829,20 @@
       </p:sp>
       <p:sp>
         <p:nvSpPr>
-          <p:cNvPr id="16" name="T02/card/region-3/heading-fill"/>
-          <p:cNvSpPr/>
-          <p:nvPr/>
-        </p:nvSpPr>
-        <p:spPr>
-          <a:xfrm>
-            <a:off x="466725" y="4333875"/>
-            <a:ext cx="7296150" cy="371475"/>
+          <p:cNvPr id="14" name="T02/card/region-2/tab"/>
+          <p:cNvSpPr/>
+          <p:nvPr/>
+        </p:nvSpPr>
+        <p:spPr>
+          <a:xfrm>
+            <a:off x="6267450" y="2433257"/>
+            <a:ext cx="1257300" cy="342900"/>
           </a:xfrm>
           <a:prstGeom prst="rect">
             <a:avLst/>
           </a:prstGeom>
           <a:solidFill>
-            <a:srgbClr val="EEF3F8"/>
+            <a:srgbClr val="173C70"/>
           </a:solidFill>
           <a:ln w="12700">
             <a:solidFill>
@@ -2916,14 +2856,343 @@
       </p:sp>
       <p:sp>
         <p:nvSpPr>
-          <p:cNvPr id="17" name="T02/card/region-3/heading-rule"/>
-          <p:cNvSpPr/>
-          <p:nvPr/>
-        </p:nvSpPr>
-        <p:spPr>
-          <a:xfrm>
-            <a:off x="457200" y="4705350"/>
-            <a:ext cx="7315200" cy="0"/>
+          <p:cNvPr id="15" name="T02/card/region-2/title"/>
+          <p:cNvSpPr/>
+          <p:nvPr/>
+        </p:nvSpPr>
+        <p:spPr>
+          <a:xfrm>
+            <a:off x="6372225" y="2461832"/>
+            <a:ext cx="1047750" cy="285750"/>
+          </a:xfrm>
+          <a:prstGeom prst="rect">
+            <a:avLst/>
+          </a:prstGeom>
+          <a:noFill/>
+          <a:ln/>
+        </p:spPr>
+        <p:txBody>
+          <a:bodyPr wrap="none" lIns="0" tIns="0" rIns="0" bIns="0" rtlCol="0" anchor="t"/>
+          <a:lstStyle/>
+          <a:p>
+            <a:pPr algn="l" indent="0" marL="0">
+              <a:lnSpc>
+                <a:spcPts val="2242"/>
+              </a:lnSpc>
+              <a:buNone/>
+            </a:pPr>
+            <a:r>
+              <a:rPr lang="zh-CN" altLang="en-US" sz="1950" b="1" dirty="0">
+                <a:solidFill>
+                  <a:srgbClr val="FFFFFF"/>
+                </a:solidFill>
+                <a:latin typeface="Noto Sans CJK SC" pitchFamily="34" charset="0"/>
+                <a:ea typeface="Noto Sans CJK SC" pitchFamily="34" charset="-122"/>
+                <a:cs typeface="Noto Sans CJK SC" pitchFamily="34" charset="-120"/>
+              </a:rPr>
+              <a:t>尚存缺口</a:t>
+            </a:r>
+            <a:endParaRPr lang="zh-CN" sz="1950" dirty="0"/>
+          </a:p>
+        </p:txBody>
+      </p:sp>
+      <p:sp>
+        <p:nvSpPr>
+          <p:cNvPr id="16" name="T02/card/region-2/body"/>
+          <p:cNvSpPr/>
+          <p:nvPr/>
+        </p:nvSpPr>
+        <p:spPr>
+          <a:xfrm>
+            <a:off x="6286500" y="2919032"/>
+            <a:ext cx="5314950" cy="981837"/>
+          </a:xfrm>
+          <a:prstGeom prst="rect">
+            <a:avLst/>
+          </a:prstGeom>
+          <a:noFill/>
+          <a:ln/>
+        </p:spPr>
+        <p:txBody>
+          <a:bodyPr wrap="none" lIns="0" tIns="0" rIns="0" bIns="0" rtlCol="0" anchor="t"/>
+          <a:lstStyle/>
+          <a:p>
+            <a:pPr algn="l" indent="0" marL="0">
+              <a:lnSpc>
+                <a:spcPts val="2232"/>
+              </a:lnSpc>
+              <a:buNone/>
+            </a:pPr>
+            <a:r>
+              <a:rPr lang="zh-CN" altLang="en-US" sz="1800" dirty="0">
+                <a:solidFill>
+                  <a:srgbClr val="1C2430"/>
+                </a:solidFill>
+                <a:latin typeface="Noto Sans CJK SC" pitchFamily="34" charset="0"/>
+                <a:ea typeface="Noto Sans CJK SC" pitchFamily="34" charset="-122"/>
+                <a:cs typeface="Noto Sans CJK SC" pitchFamily="34" charset="-120"/>
+              </a:rPr>
+              <a:t>指出尚未验证的机制或条件</a:t>
+            </a:r>
+            <a:endParaRPr lang="zh-CN" sz="1800" dirty="0"/>
+          </a:p>
+          <a:p>
+            <a:pPr algn="l" indent="0" marL="0">
+              <a:lnSpc>
+                <a:spcPts val="2232"/>
+              </a:lnSpc>
+              <a:buNone/>
+            </a:pPr>
+            <a:r>
+              <a:rPr lang="zh-CN" altLang="en-US" sz="1800" dirty="0">
+                <a:solidFill>
+                  <a:srgbClr val="1C2430"/>
+                </a:solidFill>
+                <a:latin typeface="Noto Sans CJK SC" pitchFamily="34" charset="0"/>
+                <a:ea typeface="Noto Sans CJK SC" pitchFamily="34" charset="-122"/>
+                <a:cs typeface="Noto Sans CJK SC" pitchFamily="34" charset="-120"/>
+              </a:rPr>
+              <a:t>将缺口定位到具体决策接口</a:t>
+            </a:r>
+            <a:endParaRPr lang="zh-CN" sz="1800" dirty="0"/>
+          </a:p>
+        </p:txBody>
+      </p:sp>
+      <p:sp>
+        <p:nvSpPr>
+          <p:cNvPr id="17" name="T02/card/region-3/frame"/>
+          <p:cNvSpPr/>
+          <p:nvPr/>
+        </p:nvSpPr>
+        <p:spPr>
+          <a:xfrm>
+            <a:off x="457200" y="4253294"/>
+            <a:ext cx="7315200" cy="1780413"/>
+          </a:xfrm>
+          <a:prstGeom prst="rect">
+            <a:avLst/>
+          </a:prstGeom>
+          <a:solidFill>
+            <a:srgbClr val="F2EDF7"/>
+          </a:solidFill>
+          <a:ln w="12383">
+            <a:solidFill>
+              <a:srgbClr val="6C528E"/>
+            </a:solidFill>
+            <a:prstDash val="dash"/>
+          </a:ln>
+        </p:spPr>
+      </p:sp>
+      <p:sp>
+        <p:nvSpPr>
+          <p:cNvPr id="18" name="T02/card/region-3/corner-white"/>
+          <p:cNvSpPr/>
+          <p:nvPr/>
+        </p:nvSpPr>
+        <p:spPr>
+          <a:xfrm>
+            <a:off x="7505700" y="4253294"/>
+            <a:ext cx="266700" cy="266700"/>
+          </a:xfrm>
+          <a:prstGeom prst="rect">
+            <a:avLst/>
+          </a:prstGeom>
+          <a:solidFill>
+            <a:srgbClr val="FFFFFF"/>
+          </a:solidFill>
+          <a:ln w="12700">
+            <a:solidFill>
+              <a:srgbClr val="FFFFFF">
+                <a:alpha val="0"/>
+              </a:srgbClr>
+            </a:solidFill>
+            <a:prstDash val="solid"/>
+          </a:ln>
+        </p:spPr>
+      </p:sp>
+      <p:sp>
+        <p:nvSpPr>
+          <p:cNvPr id="19" name="T02/card/region-3/fold-diagonal"/>
+          <p:cNvSpPr/>
+          <p:nvPr/>
+        </p:nvSpPr>
+        <p:spPr>
+          <a:xfrm>
+            <a:off x="7505700" y="4253294"/>
+            <a:ext cx="266700" cy="266700"/>
+          </a:xfrm>
+          <a:prstGeom prst="line">
+            <a:avLst/>
+          </a:prstGeom>
+          <a:noFill/>
+          <a:ln w="13335">
+            <a:solidFill>
+              <a:srgbClr val="6C528E"/>
+            </a:solidFill>
+            <a:prstDash val="solid"/>
+          </a:ln>
+        </p:spPr>
+      </p:sp>
+      <p:sp>
+        <p:nvSpPr>
+          <p:cNvPr id="20" name="T02/card/region-3/fold-left"/>
+          <p:cNvSpPr/>
+          <p:nvPr/>
+        </p:nvSpPr>
+        <p:spPr>
+          <a:xfrm>
+            <a:off x="7505700" y="4253294"/>
+            <a:ext cx="0" cy="266700"/>
+          </a:xfrm>
+          <a:prstGeom prst="line">
+            <a:avLst/>
+          </a:prstGeom>
+          <a:noFill/>
+          <a:ln w="13335">
+            <a:solidFill>
+              <a:srgbClr val="6C528E"/>
+            </a:solidFill>
+            <a:prstDash val="solid"/>
+          </a:ln>
+        </p:spPr>
+      </p:sp>
+      <p:sp>
+        <p:nvSpPr>
+          <p:cNvPr id="21" name="T02/card/region-3/fold-bottom"/>
+          <p:cNvSpPr/>
+          <p:nvPr/>
+        </p:nvSpPr>
+        <p:spPr>
+          <a:xfrm>
+            <a:off x="7505700" y="4519994"/>
+            <a:ext cx="266700" cy="0"/>
+          </a:xfrm>
+          <a:prstGeom prst="line">
+            <a:avLst/>
+          </a:prstGeom>
+          <a:noFill/>
+          <a:ln w="13335">
+            <a:solidFill>
+              <a:srgbClr val="6C528E"/>
+            </a:solidFill>
+            <a:prstDash val="solid"/>
+          </a:ln>
+        </p:spPr>
+      </p:sp>
+      <p:sp>
+        <p:nvSpPr>
+          <p:cNvPr id="22" name="T02/card/region-3/title"/>
+          <p:cNvSpPr/>
+          <p:nvPr/>
+        </p:nvSpPr>
+        <p:spPr>
+          <a:xfrm>
+            <a:off x="647700" y="4415219"/>
+            <a:ext cx="6743700" cy="361950"/>
+          </a:xfrm>
+          <a:prstGeom prst="rect">
+            <a:avLst/>
+          </a:prstGeom>
+          <a:noFill/>
+          <a:ln/>
+        </p:spPr>
+        <p:txBody>
+          <a:bodyPr wrap="none" lIns="0" tIns="0" rIns="0" bIns="0" rtlCol="0" anchor="t"/>
+          <a:lstStyle/>
+          <a:p>
+            <a:pPr algn="l" indent="0" marL="0">
+              <a:lnSpc>
+                <a:spcPts val="2242"/>
+              </a:lnSpc>
+              <a:buNone/>
+            </a:pPr>
+            <a:r>
+              <a:rPr lang="zh-CN" altLang="en-US" sz="1950" b="1" dirty="0">
+                <a:solidFill>
+                  <a:srgbClr val="6C528E"/>
+                </a:solidFill>
+                <a:latin typeface="Noto Sans CJK SC" pitchFamily="34" charset="0"/>
+                <a:ea typeface="Noto Sans CJK SC" pitchFamily="34" charset="-122"/>
+                <a:cs typeface="Noto Sans CJK SC" pitchFamily="34" charset="-120"/>
+              </a:rPr>
+              <a:t>可检验假说</a:t>
+            </a:r>
+            <a:endParaRPr lang="zh-CN" sz="1950" dirty="0"/>
+          </a:p>
+        </p:txBody>
+      </p:sp>
+      <p:sp>
+        <p:nvSpPr>
+          <p:cNvPr id="23" name="T02/card/region-3/body"/>
+          <p:cNvSpPr/>
+          <p:nvPr/>
+        </p:nvSpPr>
+        <p:spPr>
+          <a:xfrm>
+            <a:off x="647700" y="4872419"/>
+            <a:ext cx="6934200" cy="970788"/>
+          </a:xfrm>
+          <a:prstGeom prst="rect">
+            <a:avLst/>
+          </a:prstGeom>
+          <a:noFill/>
+          <a:ln/>
+        </p:spPr>
+        <p:txBody>
+          <a:bodyPr wrap="none" lIns="0" tIns="0" rIns="0" bIns="0" rtlCol="0" anchor="t"/>
+          <a:lstStyle/>
+          <a:p>
+            <a:pPr algn="l" indent="0" marL="0">
+              <a:lnSpc>
+                <a:spcPts val="2232"/>
+              </a:lnSpc>
+              <a:buNone/>
+            </a:pPr>
+            <a:r>
+              <a:rPr lang="zh-CN" altLang="en-US" sz="1800" dirty="0">
+                <a:solidFill>
+                  <a:srgbClr val="1C2430"/>
+                </a:solidFill>
+                <a:latin typeface="Noto Sans CJK SC" pitchFamily="34" charset="0"/>
+                <a:ea typeface="Noto Sans CJK SC" pitchFamily="34" charset="-122"/>
+                <a:cs typeface="Noto Sans CJK SC" pitchFamily="34" charset="-120"/>
+              </a:rPr>
+              <a:t>明确干预变量与预期结果</a:t>
+            </a:r>
+            <a:endParaRPr lang="zh-CN" sz="1800" dirty="0"/>
+          </a:p>
+          <a:p>
+            <a:pPr algn="l" indent="0" marL="0">
+              <a:lnSpc>
+                <a:spcPts val="2232"/>
+              </a:lnSpc>
+              <a:buNone/>
+            </a:pPr>
+            <a:r>
+              <a:rPr lang="zh-CN" altLang="en-US" sz="1800" dirty="0">
+                <a:solidFill>
+                  <a:srgbClr val="1C2430"/>
+                </a:solidFill>
+                <a:latin typeface="Noto Sans CJK SC" pitchFamily="34" charset="0"/>
+                <a:ea typeface="Noto Sans CJK SC" pitchFamily="34" charset="-122"/>
+                <a:cs typeface="Noto Sans CJK SC" pitchFamily="34" charset="-120"/>
+              </a:rPr>
+              <a:t>给出能够区分替代解释的观测</a:t>
+            </a:r>
+            <a:endParaRPr lang="zh-CN" sz="1800" dirty="0"/>
+          </a:p>
+        </p:txBody>
+      </p:sp>
+      <p:sp>
+        <p:nvSpPr>
+          <p:cNvPr id="24" name="T02/card/region-4/heading-rule"/>
+          <p:cNvSpPr/>
+          <p:nvPr/>
+        </p:nvSpPr>
+        <p:spPr>
+          <a:xfrm>
+            <a:off x="8077200" y="4615244"/>
+            <a:ext cx="3657600" cy="0"/>
           </a:xfrm>
           <a:prstGeom prst="line">
             <a:avLst/>
@@ -2939,126 +3208,22 @@
       </p:sp>
       <p:sp>
         <p:nvSpPr>
-          <p:cNvPr id="18" name="T02/card/region-3/title"/>
-          <p:cNvSpPr/>
-          <p:nvPr/>
-        </p:nvSpPr>
-        <p:spPr>
-          <a:xfrm>
-            <a:off x="581025" y="4381500"/>
-            <a:ext cx="7067550" cy="276225"/>
-          </a:xfrm>
-          <a:prstGeom prst="rect">
-            <a:avLst/>
-          </a:prstGeom>
-          <a:noFill/>
-          <a:ln/>
-        </p:spPr>
-        <p:txBody>
-          <a:bodyPr wrap="none" lIns="0" tIns="0" rIns="0" bIns="0" rtlCol="0" anchor="t"/>
-          <a:lstStyle/>
-          <a:p>
-            <a:pPr algn="l" indent="0" marL="0">
-              <a:lnSpc>
-                <a:spcPts val="2070"/>
-              </a:lnSpc>
-              <a:buNone/>
-            </a:pPr>
-            <a:r>
-              <a:rPr lang="zh-CN" altLang="en-US" sz="1800" b="1" dirty="0">
-                <a:solidFill>
-                  <a:srgbClr val="355D88"/>
-                </a:solidFill>
-                <a:latin typeface="Noto Sans CJK SC" pitchFamily="34" charset="0"/>
-                <a:ea typeface="Noto Sans CJK SC" pitchFamily="34" charset="-122"/>
-                <a:cs typeface="Noto Sans CJK SC" pitchFamily="34" charset="-120"/>
-              </a:rPr>
-              <a:t>可检验假说</a:t>
-            </a:r>
-            <a:endParaRPr lang="zh-CN" sz="1800" dirty="0"/>
-          </a:p>
-        </p:txBody>
-      </p:sp>
-      <p:sp>
-        <p:nvSpPr>
-          <p:cNvPr id="19" name="T02/card/region-3/body"/>
-          <p:cNvSpPr/>
-          <p:nvPr/>
-        </p:nvSpPr>
-        <p:spPr>
-          <a:xfrm>
-            <a:off x="590550" y="4819650"/>
-            <a:ext cx="7048500" cy="1123950"/>
-          </a:xfrm>
-          <a:prstGeom prst="rect">
-            <a:avLst/>
-          </a:prstGeom>
-          <a:noFill/>
-          <a:ln/>
-        </p:spPr>
-        <p:txBody>
-          <a:bodyPr wrap="none" lIns="0" tIns="0" rIns="0" bIns="0" rtlCol="0" anchor="t"/>
-          <a:lstStyle/>
-          <a:p>
-            <a:pPr algn="l" indent="0" marL="0">
-              <a:lnSpc>
-                <a:spcPts val="2139"/>
-              </a:lnSpc>
-              <a:buNone/>
-            </a:pPr>
-            <a:r>
-              <a:rPr lang="zh-CN" altLang="en-US" sz="1725" dirty="0">
-                <a:solidFill>
-                  <a:srgbClr val="1C2430"/>
-                </a:solidFill>
-                <a:latin typeface="Noto Sans CJK SC" pitchFamily="34" charset="0"/>
-                <a:ea typeface="Noto Sans CJK SC" pitchFamily="34" charset="-122"/>
-                <a:cs typeface="Noto Sans CJK SC" pitchFamily="34" charset="-120"/>
-              </a:rPr>
-              <a:t>明确干预变量与预期结果</a:t>
-            </a:r>
-            <a:endParaRPr lang="zh-CN" sz="1725" dirty="0"/>
-          </a:p>
-          <a:p>
-            <a:pPr algn="l" indent="0" marL="0">
-              <a:lnSpc>
-                <a:spcPts val="2139"/>
-              </a:lnSpc>
-              <a:buNone/>
-            </a:pPr>
-            <a:r>
-              <a:rPr lang="zh-CN" altLang="en-US" sz="1725" dirty="0">
-                <a:solidFill>
-                  <a:srgbClr val="1C2430"/>
-                </a:solidFill>
-                <a:latin typeface="Noto Sans CJK SC" pitchFamily="34" charset="0"/>
-                <a:ea typeface="Noto Sans CJK SC" pitchFamily="34" charset="-122"/>
-                <a:cs typeface="Noto Sans CJK SC" pitchFamily="34" charset="-120"/>
-              </a:rPr>
-              <a:t>给出能够区分替代解释的观测</a:t>
-            </a:r>
-            <a:endParaRPr lang="zh-CN" sz="1725" dirty="0"/>
-          </a:p>
-        </p:txBody>
-      </p:sp>
-      <p:sp>
-        <p:nvSpPr>
-          <p:cNvPr id="20" name="T02/card/region-4/heading-rule"/>
-          <p:cNvSpPr/>
-          <p:nvPr/>
-        </p:nvSpPr>
-        <p:spPr>
-          <a:xfrm>
-            <a:off x="8077200" y="4686300"/>
-            <a:ext cx="3657600" cy="0"/>
+          <p:cNvPr id="25" name="T02/card/region-4/heading-mark"/>
+          <p:cNvSpPr/>
+          <p:nvPr/>
+        </p:nvSpPr>
+        <p:spPr>
+          <a:xfrm>
+            <a:off x="8077200" y="4615244"/>
+            <a:ext cx="342900" cy="0"/>
           </a:xfrm>
           <a:prstGeom prst="line">
             <a:avLst/>
           </a:prstGeom>
           <a:noFill/>
-          <a:ln w="9525">
+          <a:ln w="17145">
             <a:solidFill>
-              <a:srgbClr val="BEC8D4"/>
+              <a:srgbClr val="A24736"/>
             </a:solidFill>
             <a:prstDash val="solid"/>
           </a:ln>
@@ -3066,36 +3231,13 @@
       </p:sp>
       <p:sp>
         <p:nvSpPr>
-          <p:cNvPr id="21" name="T02/card/region-4/heading-mark"/>
-          <p:cNvSpPr/>
-          <p:nvPr/>
-        </p:nvSpPr>
-        <p:spPr>
-          <a:xfrm>
-            <a:off x="8077200" y="4686300"/>
-            <a:ext cx="342900" cy="0"/>
-          </a:xfrm>
-          <a:prstGeom prst="line">
-            <a:avLst/>
-          </a:prstGeom>
-          <a:noFill/>
-          <a:ln w="17145">
-            <a:solidFill>
-              <a:srgbClr val="903543"/>
-            </a:solidFill>
-            <a:prstDash val="solid"/>
-          </a:ln>
-        </p:spPr>
-      </p:sp>
-      <p:sp>
-        <p:nvSpPr>
-          <p:cNvPr id="22" name="T02/card/region-4/title"/>
-          <p:cNvSpPr/>
-          <p:nvPr/>
-        </p:nvSpPr>
-        <p:spPr>
-          <a:xfrm>
-            <a:off x="8077200" y="4343400"/>
+          <p:cNvPr id="26" name="T02/card/region-4/title"/>
+          <p:cNvSpPr/>
+          <p:nvPr/>
+        </p:nvSpPr>
+        <p:spPr>
+          <a:xfrm>
+            <a:off x="8077200" y="4272344"/>
             <a:ext cx="3657600" cy="323850"/>
           </a:xfrm>
           <a:prstGeom prst="rect">
@@ -3110,14 +3252,14 @@
           <a:p>
             <a:pPr algn="l" indent="0" marL="0">
               <a:lnSpc>
-                <a:spcPts val="2156"/>
-              </a:lnSpc>
-              <a:buNone/>
-            </a:pPr>
-            <a:r>
-              <a:rPr lang="zh-CN" altLang="en-US" sz="1875" b="1" dirty="0">
-                <a:solidFill>
-                  <a:srgbClr val="903543"/>
+                <a:spcPts val="2242"/>
+              </a:lnSpc>
+              <a:buNone/>
+            </a:pPr>
+            <a:r>
+              <a:rPr lang="zh-CN" altLang="en-US" sz="1950" b="1" dirty="0">
+                <a:solidFill>
+                  <a:srgbClr val="A24736"/>
                 </a:solidFill>
                 <a:latin typeface="Noto Sans CJK SC" pitchFamily="34" charset="0"/>
                 <a:ea typeface="Noto Sans CJK SC" pitchFamily="34" charset="-122"/>
@@ -3125,20 +3267,20 @@
               </a:rPr>
               <a:t>预期观测与反证</a:t>
             </a:r>
-            <a:endParaRPr lang="zh-CN" sz="1875" dirty="0"/>
-          </a:p>
-        </p:txBody>
-      </p:sp>
-      <p:sp>
-        <p:nvSpPr>
-          <p:cNvPr id="23" name="T02/card/region-4/body"/>
-          <p:cNvSpPr/>
-          <p:nvPr/>
-        </p:nvSpPr>
-        <p:spPr>
-          <a:xfrm>
-            <a:off x="8077200" y="4819650"/>
-            <a:ext cx="3657600" cy="1181100"/>
+            <a:endParaRPr lang="zh-CN" sz="1950" dirty="0"/>
+          </a:p>
+        </p:txBody>
+      </p:sp>
+      <p:sp>
+        <p:nvSpPr>
+          <p:cNvPr id="27" name="T02/card/region-4/body"/>
+          <p:cNvSpPr/>
+          <p:nvPr/>
+        </p:nvSpPr>
+        <p:spPr>
+          <a:xfrm>
+            <a:off x="8077200" y="4748594"/>
+            <a:ext cx="3657600" cy="1247013"/>
           </a:xfrm>
           <a:prstGeom prst="rect">
             <a:avLst/>
@@ -3193,7 +3335,7 @@
       </p:sp>
       <p:sp>
         <p:nvSpPr>
-          <p:cNvPr id="24" name="T02/sources"/>
+          <p:cNvPr id="28" name="T02/sources"/>
           <p:cNvSpPr/>
           <p:nvPr/>
         </p:nvSpPr>
@@ -3227,7 +3369,7 @@
                 <a:ea typeface="Noto Sans CJK SC" pitchFamily="34" charset="-122"/>
                 <a:cs typeface="Noto Sans CJK SC" pitchFamily="34" charset="-120"/>
               </a:rPr>
-              <a:t>T1 · 2026 · 待替换</a:t>
+              <a:t>T1 · 2026 · 书目占位；图表均为合成示例</a:t>
             </a:r>
             <a:endParaRPr lang="zh-CN" sz="1125" dirty="0"/>
           </a:p>
@@ -3336,14 +3478,14 @@
       </p:sp>
       <p:sp>
         <p:nvSpPr>
-          <p:cNvPr id="4" name="T03/kicker"/>
-          <p:cNvSpPr/>
-          <p:nvPr/>
-        </p:nvSpPr>
-        <p:spPr>
-          <a:xfrm>
-            <a:off x="457200" y="152400"/>
-            <a:ext cx="11277600" cy="190500"/>
+          <p:cNvPr id="4" name="T03/title"/>
+          <p:cNvSpPr/>
+          <p:nvPr/>
+        </p:nvSpPr>
+        <p:spPr>
+          <a:xfrm>
+            <a:off x="457200" y="209550"/>
+            <a:ext cx="11277600" cy="438150"/>
           </a:xfrm>
           <a:prstGeom prst="rect">
             <a:avLst/>
@@ -3357,54 +3499,12 @@
           <a:p>
             <a:pPr algn="l" indent="0" marL="0">
               <a:lnSpc>
-                <a:spcPts val="1320"/>
-              </a:lnSpc>
-              <a:buNone/>
-            </a:pPr>
-            <a:r>
-              <a:rPr lang="zh-CN" altLang="en-US" sz="1200" dirty="0">
-                <a:solidFill>
-                  <a:srgbClr val="515B68"/>
-                </a:solidFill>
-                <a:latin typeface="Noto Sans CJK SC" pitchFamily="34" charset="0"/>
-                <a:ea typeface="Noto Sans CJK SC" pitchFamily="34" charset="-122"/>
-                <a:cs typeface="Noto Sans CJK SC" pitchFamily="34" charset="-120"/>
-              </a:rPr>
-              <a:t>结构模板 / 占位说明与合成数据</a:t>
-            </a:r>
-            <a:endParaRPr lang="zh-CN" sz="1200" dirty="0"/>
-          </a:p>
-        </p:txBody>
-      </p:sp>
-      <p:sp>
-        <p:nvSpPr>
-          <p:cNvPr id="5" name="T03/title"/>
-          <p:cNvSpPr/>
-          <p:nvPr/>
-        </p:nvSpPr>
-        <p:spPr>
-          <a:xfrm>
-            <a:off x="457200" y="381000"/>
-            <a:ext cx="11277600" cy="400050"/>
-          </a:xfrm>
-          <a:prstGeom prst="rect">
-            <a:avLst/>
-          </a:prstGeom>
-          <a:noFill/>
-          <a:ln/>
-        </p:spPr>
-        <p:txBody>
-          <a:bodyPr wrap="none" lIns="0" tIns="0" rIns="0" bIns="0" rtlCol="0" anchor="t"/>
-          <a:lstStyle/>
-          <a:p>
-            <a:pPr algn="l" indent="0" marL="0">
-              <a:lnSpc>
-                <a:spcPts val="2856"/>
-              </a:lnSpc>
-              <a:buNone/>
-            </a:pPr>
-            <a:r>
-              <a:rPr lang="zh-CN" altLang="en-US" sz="2550" b="1" dirty="0">
+                <a:spcPts val="3360"/>
+              </a:lnSpc>
+              <a:buNone/>
+            </a:pPr>
+            <a:r>
+              <a:rPr lang="zh-CN" altLang="en-US" sz="3000" b="1" dirty="0">
                 <a:solidFill>
                   <a:srgbClr val="1C2430"/>
                 </a:solidFill>
@@ -3414,26 +3514,49 @@
               </a:rPr>
               <a:t>核心论点与证据对应</a:t>
             </a:r>
-            <a:endParaRPr lang="zh-CN" sz="2550" dirty="0"/>
-          </a:p>
-        </p:txBody>
-      </p:sp>
-      <p:sp>
-        <p:nvSpPr>
-          <p:cNvPr id="6" name="T03/header-rule"/>
-          <p:cNvSpPr/>
-          <p:nvPr/>
-        </p:nvSpPr>
-        <p:spPr>
-          <a:xfrm>
-            <a:off x="457200" y="876300"/>
+            <a:endParaRPr lang="zh-CN" sz="3000" dirty="0"/>
+          </a:p>
+        </p:txBody>
+      </p:sp>
+      <p:sp>
+        <p:nvSpPr>
+          <p:cNvPr id="5" name="T03/header-rule"/>
+          <p:cNvSpPr/>
+          <p:nvPr/>
+        </p:nvSpPr>
+        <p:spPr>
+          <a:xfrm>
+            <a:off x="457200" y="752475"/>
             <a:ext cx="11277600" cy="0"/>
           </a:xfrm>
           <a:prstGeom prst="line">
             <a:avLst/>
           </a:prstGeom>
           <a:noFill/>
-          <a:ln w="11430">
+          <a:ln w="10478">
+            <a:solidFill>
+              <a:srgbClr val="BEC8D4"/>
+            </a:solidFill>
+            <a:prstDash val="solid"/>
+          </a:ln>
+        </p:spPr>
+      </p:sp>
+      <p:sp>
+        <p:nvSpPr>
+          <p:cNvPr id="6" name="T03/header-accent"/>
+          <p:cNvSpPr/>
+          <p:nvPr/>
+        </p:nvSpPr>
+        <p:spPr>
+          <a:xfrm>
+            <a:off x="457200" y="752475"/>
+            <a:ext cx="704850" cy="0"/>
+          </a:xfrm>
+          <a:prstGeom prst="line">
+            <a:avLst/>
+          </a:prstGeom>
+          <a:noFill/>
+          <a:ln w="28575">
             <a:solidFill>
               <a:srgbClr val="173C70"/>
             </a:solidFill>
@@ -3449,8 +3572,8 @@
         </p:nvSpPr>
         <p:spPr>
           <a:xfrm>
-            <a:off x="457200" y="1295400"/>
-            <a:ext cx="4267200" cy="4210050"/>
+            <a:off x="457200" y="1107853"/>
+            <a:ext cx="4267200" cy="4668679"/>
           </a:xfrm>
           <a:prstGeom prst="rect">
             <a:avLst/>
@@ -3474,14 +3597,14 @@
         </p:nvSpPr>
         <p:spPr>
           <a:xfrm>
-            <a:off x="466725" y="1304925"/>
+            <a:off x="466725" y="1117378"/>
             <a:ext cx="4248150" cy="381000"/>
           </a:xfrm>
           <a:prstGeom prst="rect">
             <a:avLst/>
           </a:prstGeom>
           <a:solidFill>
-            <a:srgbClr val="EEF3F8"/>
+            <a:srgbClr val="E9F4F0"/>
           </a:solidFill>
           <a:ln w="12700">
             <a:solidFill>
@@ -3501,7 +3624,7 @@
         </p:nvSpPr>
         <p:spPr>
           <a:xfrm>
-            <a:off x="457200" y="1685925"/>
+            <a:off x="457200" y="1498378"/>
             <a:ext cx="4267200" cy="0"/>
           </a:xfrm>
           <a:prstGeom prst="line">
@@ -3524,8 +3647,8 @@
         </p:nvSpPr>
         <p:spPr>
           <a:xfrm>
-            <a:off x="581025" y="1352550"/>
-            <a:ext cx="4019550" cy="295275"/>
+            <a:off x="581025" y="1155478"/>
+            <a:ext cx="4019550" cy="304800"/>
           </a:xfrm>
           <a:prstGeom prst="rect">
             <a:avLst/>
@@ -3539,14 +3662,14 @@
           <a:p>
             <a:pPr algn="l" indent="0" marL="0">
               <a:lnSpc>
-                <a:spcPts val="2070"/>
-              </a:lnSpc>
-              <a:buNone/>
-            </a:pPr>
-            <a:r>
-              <a:rPr lang="zh-CN" altLang="en-US" sz="1800" b="1" dirty="0">
-                <a:solidFill>
-                  <a:srgbClr val="173C70"/>
+                <a:spcPts val="2242"/>
+              </a:lnSpc>
+              <a:buNone/>
+            </a:pPr>
+            <a:r>
+              <a:rPr lang="zh-CN" altLang="en-US" sz="1950" b="1" dirty="0">
+                <a:solidFill>
+                  <a:srgbClr val="146C63"/>
                 </a:solidFill>
                 <a:latin typeface="Noto Sans CJK SC" pitchFamily="34" charset="0"/>
                 <a:ea typeface="Noto Sans CJK SC" pitchFamily="34" charset="-122"/>
@@ -3554,7 +3677,7 @@
               </a:rPr>
               <a:t>证据一：测量对象</a:t>
             </a:r>
-            <a:endParaRPr lang="zh-CN" sz="1800" dirty="0"/>
+            <a:endParaRPr lang="zh-CN" sz="1950" dirty="0"/>
           </a:p>
         </p:txBody>
       </p:sp>
@@ -3566,8 +3689,8 @@
         </p:nvSpPr>
         <p:spPr>
           <a:xfrm>
-            <a:off x="5010150" y="1295400"/>
-            <a:ext cx="6724650" cy="4210050"/>
+            <a:off x="5010150" y="1107853"/>
+            <a:ext cx="6724650" cy="4668679"/>
           </a:xfrm>
           <a:prstGeom prst="rect">
             <a:avLst/>
@@ -3591,14 +3714,14 @@
         </p:nvSpPr>
         <p:spPr>
           <a:xfrm>
-            <a:off x="5019675" y="1304925"/>
+            <a:off x="5019675" y="1117378"/>
             <a:ext cx="6705600" cy="381000"/>
           </a:xfrm>
           <a:prstGeom prst="rect">
             <a:avLst/>
           </a:prstGeom>
           <a:solidFill>
-            <a:srgbClr val="EEF3F8"/>
+            <a:srgbClr val="E9F4F0"/>
           </a:solidFill>
           <a:ln w="12700">
             <a:solidFill>
@@ -3618,7 +3741,7 @@
         </p:nvSpPr>
         <p:spPr>
           <a:xfrm>
-            <a:off x="5010150" y="1685925"/>
+            <a:off x="5010150" y="1498378"/>
             <a:ext cx="6724650" cy="0"/>
           </a:xfrm>
           <a:prstGeom prst="line">
@@ -3641,8 +3764,8 @@
         </p:nvSpPr>
         <p:spPr>
           <a:xfrm>
-            <a:off x="5133975" y="1352550"/>
-            <a:ext cx="6477000" cy="295275"/>
+            <a:off x="5133975" y="1155478"/>
+            <a:ext cx="6477000" cy="304800"/>
           </a:xfrm>
           <a:prstGeom prst="rect">
             <a:avLst/>
@@ -3656,7 +3779,49 @@
           <a:p>
             <a:pPr algn="l" indent="0" marL="0">
               <a:lnSpc>
-                <a:spcPts val="2070"/>
+                <a:spcPts val="2242"/>
+              </a:lnSpc>
+              <a:buNone/>
+            </a:pPr>
+            <a:r>
+              <a:rPr lang="zh-CN" altLang="en-US" sz="1950" b="1" dirty="0">
+                <a:solidFill>
+                  <a:srgbClr val="146C63"/>
+                </a:solidFill>
+                <a:latin typeface="Noto Sans CJK SC" pitchFamily="34" charset="0"/>
+                <a:ea typeface="Noto Sans CJK SC" pitchFamily="34" charset="-122"/>
+                <a:cs typeface="Noto Sans CJK SC" pitchFamily="34" charset="-120"/>
+              </a:rPr>
+              <a:t>证据二：效应与解释</a:t>
+            </a:r>
+            <a:endParaRPr lang="zh-CN" sz="1950" dirty="0"/>
+          </a:p>
+        </p:txBody>
+      </p:sp>
+      <p:sp>
+        <p:nvSpPr>
+          <p:cNvPr id="15" name="T03/takeaway"/>
+          <p:cNvSpPr/>
+          <p:nvPr/>
+        </p:nvSpPr>
+        <p:spPr>
+          <a:xfrm>
+            <a:off x="457200" y="5855684"/>
+            <a:ext cx="11277600" cy="316516"/>
+          </a:xfrm>
+          <a:prstGeom prst="rect">
+            <a:avLst/>
+          </a:prstGeom>
+          <a:noFill/>
+          <a:ln/>
+        </p:spPr>
+        <p:txBody>
+          <a:bodyPr wrap="none" lIns="0" tIns="0" rIns="0" bIns="0" rtlCol="0" anchor="t"/>
+          <a:lstStyle/>
+          <a:p>
+            <a:pPr algn="l" indent="0" marL="0">
+              <a:lnSpc>
+                <a:spcPts val="2160"/>
               </a:lnSpc>
               <a:buNone/>
             </a:pPr>
@@ -3669,7 +3834,7 @@
                 <a:ea typeface="Noto Sans CJK SC" pitchFamily="34" charset="-122"/>
                 <a:cs typeface="Noto Sans CJK SC" pitchFamily="34" charset="-120"/>
               </a:rPr>
-              <a:t>证据二：效应与解释</a:t>
+              <a:t>统计口径、样本单位和适用条件需与原文一致</a:t>
             </a:r>
             <a:endParaRPr lang="zh-CN" sz="1800" dirty="0"/>
           </a:p>
@@ -3677,56 +3842,14 @@
       </p:sp>
       <p:sp>
         <p:nvSpPr>
-          <p:cNvPr id="15" name="T03/takeaway"/>
-          <p:cNvSpPr/>
-          <p:nvPr/>
-        </p:nvSpPr>
-        <p:spPr>
-          <a:xfrm>
-            <a:off x="457200" y="5676900"/>
-            <a:ext cx="11277600" cy="419100"/>
-          </a:xfrm>
-          <a:prstGeom prst="rect">
-            <a:avLst/>
-          </a:prstGeom>
-          <a:noFill/>
-          <a:ln/>
-        </p:spPr>
-        <p:txBody>
-          <a:bodyPr wrap="none" lIns="0" tIns="0" rIns="0" bIns="0" rtlCol="0" anchor="t"/>
-          <a:lstStyle/>
-          <a:p>
-            <a:pPr algn="l" indent="0" marL="0">
-              <a:lnSpc>
-                <a:spcPts val="2160"/>
-              </a:lnSpc>
-              <a:buNone/>
-            </a:pPr>
-            <a:r>
-              <a:rPr lang="zh-CN" altLang="en-US" sz="1800" b="1" dirty="0">
-                <a:solidFill>
-                  <a:srgbClr val="173C70"/>
-                </a:solidFill>
-                <a:latin typeface="Noto Sans CJK SC" pitchFamily="34" charset="0"/>
-                <a:ea typeface="Noto Sans CJK SC" pitchFamily="34" charset="-122"/>
-                <a:cs typeface="Noto Sans CJK SC" pitchFamily="34" charset="-120"/>
-              </a:rPr>
-              <a:t>解释必须由本页证据支持，并保留样本、对照与适用条件。</a:t>
-            </a:r>
-            <a:endParaRPr lang="zh-CN" sz="1800" dirty="0"/>
-          </a:p>
-        </p:txBody>
-      </p:sp>
-      <p:sp>
-        <p:nvSpPr>
           <p:cNvPr id="16" name="T03/figure:0:paper"/>
           <p:cNvSpPr/>
           <p:nvPr/>
         </p:nvSpPr>
         <p:spPr>
           <a:xfrm>
-            <a:off x="590550" y="1790700"/>
-            <a:ext cx="4000500" cy="2457450"/>
+            <a:off x="845936" y="1641253"/>
+            <a:ext cx="3489729" cy="2586419"/>
           </a:xfrm>
           <a:prstGeom prst="rect">
             <a:avLst/>
@@ -3734,19 +3857,24 @@
           <a:solidFill>
             <a:srgbClr val="FFFFFF"/>
           </a:solidFill>
-          <a:ln w="12700">
+          <a:ln w="7620">
             <a:solidFill>
-              <a:srgbClr val="FFFFFF">
-                <a:alpha val="0"/>
-              </a:srgbClr>
+              <a:srgbClr val="CCD4DD"/>
             </a:solidFill>
             <a:prstDash val="solid"/>
           </a:ln>
+          <a:effectLst>
+            <a:outerShdw sx="100000" sy="100000" kx="0" ky="0" algn="bl" rotWithShape="0" blurRad="28575" dist="19050" dir="5400000">
+              <a:srgbClr val="263B50">
+                <a:alpha val="12000"/>
+              </a:srgbClr>
+            </a:outerShdw>
+          </a:effectLst>
         </p:spPr>
       </p:sp>
       <p:pic>
         <p:nvPicPr>
-          <p:cNvPr id="17" name="T03/figure:0:image" descr="T1 · 示例图 · 响应曲线；合成演示值">    </p:cNvPr>
+          <p:cNvPr id="17" name="T03/figure:0:image" descr="A/B 为条件；合成数据">    </p:cNvPr>
           <p:cNvPicPr>
             <a:picLocks noChangeAspect="1"/>
           </p:cNvPicPr>
@@ -3760,8 +3888,8 @@
         </p:blipFill>
         <p:spPr>
           <a:xfrm>
-            <a:off x="828675" y="1790700"/>
-            <a:ext cx="3524250" cy="2114550"/>
+            <a:off x="874511" y="1669828"/>
+            <a:ext cx="3432579" cy="2529269"/>
           </a:xfrm>
           <a:prstGeom prst="rect">
             <a:avLst/>
@@ -3776,7 +3904,7 @@
         </p:nvSpPr>
         <p:spPr>
           <a:xfrm>
-            <a:off x="590550" y="3990975"/>
+            <a:off x="590550" y="4332446"/>
             <a:ext cx="4000500" cy="257175"/>
           </a:xfrm>
           <a:prstGeom prst="rect">
@@ -3804,7 +3932,7 @@
                 <a:ea typeface="Noto Sans CJK SC" pitchFamily="34" charset="-122"/>
                 <a:cs typeface="Noto Sans CJK SC" pitchFamily="34" charset="-120"/>
               </a:rPr>
-              <a:t>T1 · 示例图 · 响应曲线；合成演示值</a:t>
+              <a:t>A/B 为条件；合成数据</a:t>
             </a:r>
             <a:endParaRPr lang="zh-CN" sz="1350" dirty="0"/>
           </a:p>
@@ -3818,8 +3946,8 @@
         </p:nvSpPr>
         <p:spPr>
           <a:xfrm>
-            <a:off x="5143500" y="1790700"/>
-            <a:ext cx="3905250" cy="2457450"/>
+            <a:off x="5351261" y="1641253"/>
+            <a:ext cx="3489729" cy="2586419"/>
           </a:xfrm>
           <a:prstGeom prst="rect">
             <a:avLst/>
@@ -3827,19 +3955,24 @@
           <a:solidFill>
             <a:srgbClr val="FFFFFF"/>
           </a:solidFill>
-          <a:ln w="12700">
+          <a:ln w="7620">
             <a:solidFill>
-              <a:srgbClr val="FFFFFF">
-                <a:alpha val="0"/>
-              </a:srgbClr>
+              <a:srgbClr val="CCD4DD"/>
             </a:solidFill>
             <a:prstDash val="solid"/>
           </a:ln>
+          <a:effectLst>
+            <a:outerShdw sx="100000" sy="100000" kx="0" ky="0" algn="bl" rotWithShape="0" blurRad="28575" dist="19050" dir="5400000">
+              <a:srgbClr val="263B50">
+                <a:alpha val="12000"/>
+              </a:srgbClr>
+            </a:outerShdw>
+          </a:effectLst>
         </p:spPr>
       </p:sp>
       <p:pic>
         <p:nvPicPr>
-          <p:cNvPr id="20" name="T03/figure:1:image" descr="T1 · 示例图 · 效应与区间；合成演示值">    </p:cNvPr>
+          <p:cNvPr id="20" name="T03/figure:1:image" descr="Ref. 为参考，V1–V3 为变体；合成数据">    </p:cNvPr>
           <p:cNvPicPr>
             <a:picLocks noChangeAspect="1"/>
           </p:cNvPicPr>
@@ -3853,8 +3986,8 @@
         </p:blipFill>
         <p:spPr>
           <a:xfrm>
-            <a:off x="5334000" y="1790700"/>
-            <a:ext cx="3524250" cy="2114550"/>
+            <a:off x="5379836" y="1669828"/>
+            <a:ext cx="3432579" cy="2529269"/>
           </a:xfrm>
           <a:prstGeom prst="rect">
             <a:avLst/>
@@ -3869,7 +4002,7 @@
         </p:nvSpPr>
         <p:spPr>
           <a:xfrm>
-            <a:off x="5143500" y="3990975"/>
+            <a:off x="5143500" y="4332446"/>
             <a:ext cx="3905250" cy="257175"/>
           </a:xfrm>
           <a:prstGeom prst="rect">
@@ -3897,7 +4030,7 @@
                 <a:ea typeface="Noto Sans CJK SC" pitchFamily="34" charset="-122"/>
                 <a:cs typeface="Noto Sans CJK SC" pitchFamily="34" charset="-120"/>
               </a:rPr>
-              <a:t>T1 · 示例图 · 效应与区间；合成演示值</a:t>
+              <a:t>Ref. 为参考，V1–V3 为变体；合成数据</a:t>
             </a:r>
             <a:endParaRPr lang="zh-CN" sz="1350" dirty="0"/>
           </a:p>
@@ -3911,8 +4044,8 @@
         </p:nvSpPr>
         <p:spPr>
           <a:xfrm>
-            <a:off x="10448925" y="2457450"/>
-            <a:ext cx="0" cy="247650"/>
+            <a:off x="10448925" y="2314575"/>
+            <a:ext cx="0" cy="257175"/>
           </a:xfrm>
           <a:prstGeom prst="line">
             <a:avLst/>
@@ -3935,8 +4068,8 @@
         </p:nvSpPr>
         <p:spPr>
           <a:xfrm>
-            <a:off x="10448925" y="3295650"/>
-            <a:ext cx="0" cy="247650"/>
+            <a:off x="10448925" y="3184970"/>
+            <a:ext cx="0" cy="257175"/>
           </a:xfrm>
           <a:prstGeom prst="line">
             <a:avLst/>
@@ -3959,14 +4092,14 @@
         </p:nvSpPr>
         <p:spPr>
           <a:xfrm>
-            <a:off x="9372600" y="1866900"/>
-            <a:ext cx="2152650" cy="590550"/>
+            <a:off x="9372600" y="1701356"/>
+            <a:ext cx="2152650" cy="613219"/>
           </a:xfrm>
           <a:prstGeom prst="rect">
             <a:avLst/>
           </a:prstGeom>
           <a:solidFill>
-            <a:srgbClr val="FFFFFF"/>
+            <a:srgbClr val="F0F3F6"/>
           </a:solidFill>
           <a:ln w="11430">
             <a:solidFill>
@@ -3984,7 +4117,7 @@
         </p:nvSpPr>
         <p:spPr>
           <a:xfrm>
-            <a:off x="9372600" y="1866900"/>
+            <a:off x="9372600" y="1701356"/>
             <a:ext cx="2152650" cy="0"/>
           </a:xfrm>
           <a:prstGeom prst="line">
@@ -3993,7 +4126,7 @@
           <a:noFill/>
           <a:ln w="19050">
             <a:solidFill>
-              <a:srgbClr val="173C70"/>
+              <a:srgbClr val="536A7A"/>
             </a:solidFill>
             <a:prstDash val="solid"/>
           </a:ln>
@@ -4007,7 +4140,7 @@
         </p:nvSpPr>
         <p:spPr>
           <a:xfrm>
-            <a:off x="9486900" y="2028825"/>
+            <a:off x="9486900" y="1874615"/>
             <a:ext cx="1924050" cy="266700"/>
           </a:xfrm>
           <a:prstGeom prst="rect">
@@ -4029,7 +4162,7 @@
             <a:r>
               <a:rPr lang="zh-CN" altLang="en-US" sz="1800" b="1" dirty="0">
                 <a:solidFill>
-                  <a:srgbClr val="173C70"/>
+                  <a:srgbClr val="536A7A"/>
                 </a:solidFill>
                 <a:latin typeface="Noto Sans CJK SC" pitchFamily="34" charset="0"/>
                 <a:ea typeface="Noto Sans CJK SC" pitchFamily="34" charset="-122"/>
@@ -4049,14 +4182,14 @@
         </p:nvSpPr>
         <p:spPr>
           <a:xfrm>
-            <a:off x="9372600" y="2705100"/>
-            <a:ext cx="2152650" cy="590550"/>
+            <a:off x="9372600" y="2571750"/>
+            <a:ext cx="2152650" cy="613219"/>
           </a:xfrm>
           <a:prstGeom prst="rect">
             <a:avLst/>
           </a:prstGeom>
           <a:solidFill>
-            <a:srgbClr val="FFFFFF"/>
+            <a:srgbClr val="E9F4F0"/>
           </a:solidFill>
           <a:ln w="11430">
             <a:solidFill>
@@ -4074,7 +4207,7 @@
         </p:nvSpPr>
         <p:spPr>
           <a:xfrm>
-            <a:off x="9372600" y="2705100"/>
+            <a:off x="9372600" y="2571750"/>
             <a:ext cx="2152650" cy="0"/>
           </a:xfrm>
           <a:prstGeom prst="line">
@@ -4083,7 +4216,7 @@
           <a:noFill/>
           <a:ln w="19050">
             <a:solidFill>
-              <a:srgbClr val="173C70"/>
+              <a:srgbClr val="146C63"/>
             </a:solidFill>
             <a:prstDash val="solid"/>
           </a:ln>
@@ -4097,7 +4230,7 @@
         </p:nvSpPr>
         <p:spPr>
           <a:xfrm>
-            <a:off x="9486900" y="2867025"/>
+            <a:off x="9486900" y="2745010"/>
             <a:ext cx="1924050" cy="266700"/>
           </a:xfrm>
           <a:prstGeom prst="rect">
@@ -4119,7 +4252,7 @@
             <a:r>
               <a:rPr lang="zh-CN" altLang="en-US" sz="1800" b="1" dirty="0">
                 <a:solidFill>
-                  <a:srgbClr val="173C70"/>
+                  <a:srgbClr val="146C63"/>
                 </a:solidFill>
                 <a:latin typeface="Noto Sans CJK SC" pitchFamily="34" charset="0"/>
                 <a:ea typeface="Noto Sans CJK SC" pitchFamily="34" charset="-122"/>
@@ -4139,14 +4272,14 @@
         </p:nvSpPr>
         <p:spPr>
           <a:xfrm>
-            <a:off x="9372600" y="3543300"/>
-            <a:ext cx="2152650" cy="590550"/>
+            <a:off x="9372600" y="3442145"/>
+            <a:ext cx="2152650" cy="613219"/>
           </a:xfrm>
           <a:prstGeom prst="rect">
             <a:avLst/>
           </a:prstGeom>
           <a:solidFill>
-            <a:srgbClr val="FFFFFF"/>
+            <a:srgbClr val="EAF2FA"/>
           </a:solidFill>
           <a:ln w="11430">
             <a:solidFill>
@@ -4164,7 +4297,7 @@
         </p:nvSpPr>
         <p:spPr>
           <a:xfrm>
-            <a:off x="9372600" y="3543300"/>
+            <a:off x="9372600" y="3442145"/>
             <a:ext cx="2152650" cy="0"/>
           </a:xfrm>
           <a:prstGeom prst="line">
@@ -4173,7 +4306,7 @@
           <a:noFill/>
           <a:ln w="19050">
             <a:solidFill>
-              <a:srgbClr val="173C70"/>
+              <a:srgbClr val="235E96"/>
             </a:solidFill>
             <a:prstDash val="solid"/>
           </a:ln>
@@ -4187,7 +4320,7 @@
         </p:nvSpPr>
         <p:spPr>
           <a:xfrm>
-            <a:off x="9486900" y="3705225"/>
+            <a:off x="9486900" y="3615404"/>
             <a:ext cx="1924050" cy="266700"/>
           </a:xfrm>
           <a:prstGeom prst="rect">
@@ -4209,7 +4342,7 @@
             <a:r>
               <a:rPr lang="zh-CN" altLang="en-US" sz="1800" b="1" dirty="0">
                 <a:solidFill>
-                  <a:srgbClr val="173C70"/>
+                  <a:srgbClr val="235E96"/>
                 </a:solidFill>
                 <a:latin typeface="Noto Sans CJK SC" pitchFamily="34" charset="0"/>
                 <a:ea typeface="Noto Sans CJK SC" pitchFamily="34" charset="-122"/>
@@ -4229,7 +4362,7 @@
         </p:nvSpPr>
         <p:spPr>
           <a:xfrm>
-            <a:off x="590550" y="4533900"/>
+            <a:off x="590550" y="4747070"/>
             <a:ext cx="4000500" cy="323850"/>
           </a:xfrm>
           <a:prstGeom prst="rect">
@@ -4244,14 +4377,14 @@
           <a:p>
             <a:pPr algn="l" indent="0" marL="0">
               <a:lnSpc>
-                <a:spcPts val="2156"/>
-              </a:lnSpc>
-              <a:buNone/>
-            </a:pPr>
-            <a:r>
-              <a:rPr lang="zh-CN" altLang="en-US" sz="1875" b="1" dirty="0">
-                <a:solidFill>
-                  <a:srgbClr val="173C70"/>
+                <a:spcPts val="2242"/>
+              </a:lnSpc>
+              <a:buNone/>
+            </a:pPr>
+            <a:r>
+              <a:rPr lang="zh-CN" altLang="en-US" sz="1950" b="1" dirty="0">
+                <a:solidFill>
+                  <a:srgbClr val="235E96"/>
                 </a:solidFill>
                 <a:latin typeface="Noto Sans CJK SC" pitchFamily="34" charset="0"/>
                 <a:ea typeface="Noto Sans CJK SC" pitchFamily="34" charset="-122"/>
@@ -4259,7 +4392,7 @@
               </a:rPr>
               <a:t>论点一的依据</a:t>
             </a:r>
-            <a:endParaRPr lang="zh-CN" sz="1875" dirty="0"/>
+            <a:endParaRPr lang="zh-CN" sz="1950" dirty="0"/>
           </a:p>
         </p:txBody>
       </p:sp>
@@ -4271,8 +4404,8 @@
         </p:nvSpPr>
         <p:spPr>
           <a:xfrm>
-            <a:off x="590550" y="4914900"/>
-            <a:ext cx="4000500" cy="419100"/>
+            <a:off x="590550" y="5128070"/>
+            <a:ext cx="4000500" cy="511397"/>
           </a:xfrm>
           <a:prstGeom prst="rect">
             <a:avLst/>
@@ -4286,12 +4419,12 @@
           <a:p>
             <a:pPr algn="l" indent="0" marL="0">
               <a:lnSpc>
-                <a:spcPts val="2139"/>
-              </a:lnSpc>
-              <a:buNone/>
-            </a:pPr>
-            <a:r>
-              <a:rPr lang="zh-CN" altLang="en-US" sz="1725" dirty="0">
+                <a:spcPts val="2232"/>
+              </a:lnSpc>
+              <a:buNone/>
+            </a:pPr>
+            <a:r>
+              <a:rPr lang="zh-CN" altLang="en-US" sz="1800" dirty="0">
                 <a:solidFill>
                   <a:srgbClr val="1C2430"/>
                 </a:solidFill>
@@ -4301,7 +4434,7 @@
               </a:rPr>
               <a:t>对应面板 A 的变量与趋势</a:t>
             </a:r>
-            <a:endParaRPr lang="zh-CN" sz="1725" dirty="0"/>
+            <a:endParaRPr lang="zh-CN" sz="1800" dirty="0"/>
           </a:p>
         </p:txBody>
       </p:sp>
@@ -4313,7 +4446,7 @@
         </p:nvSpPr>
         <p:spPr>
           <a:xfrm>
-            <a:off x="5143500" y="4533900"/>
+            <a:off x="5143500" y="4747070"/>
             <a:ext cx="6457950" cy="323850"/>
           </a:xfrm>
           <a:prstGeom prst="rect">
@@ -4328,14 +4461,14 @@
           <a:p>
             <a:pPr algn="l" indent="0" marL="0">
               <a:lnSpc>
-                <a:spcPts val="2156"/>
-              </a:lnSpc>
-              <a:buNone/>
-            </a:pPr>
-            <a:r>
-              <a:rPr lang="zh-CN" altLang="en-US" sz="1875" b="1" dirty="0">
-                <a:solidFill>
-                  <a:srgbClr val="173C70"/>
+                <a:spcPts val="2242"/>
+              </a:lnSpc>
+              <a:buNone/>
+            </a:pPr>
+            <a:r>
+              <a:rPr lang="zh-CN" altLang="en-US" sz="1950" b="1" dirty="0">
+                <a:solidFill>
+                  <a:srgbClr val="235E96"/>
                 </a:solidFill>
                 <a:latin typeface="Noto Sans CJK SC" pitchFamily="34" charset="0"/>
                 <a:ea typeface="Noto Sans CJK SC" pitchFamily="34" charset="-122"/>
@@ -4343,7 +4476,7 @@
               </a:rPr>
               <a:t>论点二的依据</a:t>
             </a:r>
-            <a:endParaRPr lang="zh-CN" sz="1875" dirty="0"/>
+            <a:endParaRPr lang="zh-CN" sz="1950" dirty="0"/>
           </a:p>
         </p:txBody>
       </p:sp>
@@ -4355,8 +4488,8 @@
         </p:nvSpPr>
         <p:spPr>
           <a:xfrm>
-            <a:off x="5143500" y="4914900"/>
-            <a:ext cx="6457950" cy="419100"/>
+            <a:off x="5143500" y="5128070"/>
+            <a:ext cx="6457950" cy="511397"/>
           </a:xfrm>
           <a:prstGeom prst="rect">
             <a:avLst/>
@@ -4370,12 +4503,12 @@
           <a:p>
             <a:pPr algn="l" indent="0" marL="0">
               <a:lnSpc>
-                <a:spcPts val="2139"/>
-              </a:lnSpc>
-              <a:buNone/>
-            </a:pPr>
-            <a:r>
-              <a:rPr lang="zh-CN" altLang="en-US" sz="1725" dirty="0">
+                <a:spcPts val="2232"/>
+              </a:lnSpc>
+              <a:buNone/>
+            </a:pPr>
+            <a:r>
+              <a:rPr lang="zh-CN" altLang="en-US" sz="1800" dirty="0">
                 <a:solidFill>
                   <a:srgbClr val="1C2430"/>
                 </a:solidFill>
@@ -4385,7 +4518,7 @@
               </a:rPr>
               <a:t>对应面板 B 的效应与区间</a:t>
             </a:r>
-            <a:endParaRPr lang="zh-CN" sz="1725" dirty="0"/>
+            <a:endParaRPr lang="zh-CN" sz="1800" dirty="0"/>
           </a:p>
         </p:txBody>
       </p:sp>
@@ -4425,7 +4558,7 @@
                 <a:ea typeface="Noto Sans CJK SC" pitchFamily="34" charset="-122"/>
                 <a:cs typeface="Noto Sans CJK SC" pitchFamily="34" charset="-120"/>
               </a:rPr>
-              <a:t>T1 · 2026 · 待替换</a:t>
+              <a:t>T1 · 2026 · 书目占位；图表均为合成示例</a:t>
             </a:r>
             <a:endParaRPr lang="zh-CN" sz="1125" dirty="0"/>
           </a:p>
@@ -4534,14 +4667,14 @@
       </p:sp>
       <p:sp>
         <p:nvSpPr>
-          <p:cNvPr id="4" name="T04/kicker"/>
-          <p:cNvSpPr/>
-          <p:nvPr/>
-        </p:nvSpPr>
-        <p:spPr>
-          <a:xfrm>
-            <a:off x="457200" y="152400"/>
-            <a:ext cx="11277600" cy="190500"/>
+          <p:cNvPr id="4" name="T04/title"/>
+          <p:cNvSpPr/>
+          <p:nvPr/>
+        </p:nvSpPr>
+        <p:spPr>
+          <a:xfrm>
+            <a:off x="457200" y="209550"/>
+            <a:ext cx="11277600" cy="438150"/>
           </a:xfrm>
           <a:prstGeom prst="rect">
             <a:avLst/>
@@ -4555,54 +4688,12 @@
           <a:p>
             <a:pPr algn="l" indent="0" marL="0">
               <a:lnSpc>
-                <a:spcPts val="1320"/>
-              </a:lnSpc>
-              <a:buNone/>
-            </a:pPr>
-            <a:r>
-              <a:rPr lang="zh-CN" altLang="en-US" sz="1200" dirty="0">
-                <a:solidFill>
-                  <a:srgbClr val="515B68"/>
-                </a:solidFill>
-                <a:latin typeface="Noto Sans CJK SC" pitchFamily="34" charset="0"/>
-                <a:ea typeface="Noto Sans CJK SC" pitchFamily="34" charset="-122"/>
-                <a:cs typeface="Noto Sans CJK SC" pitchFamily="34" charset="-120"/>
-              </a:rPr>
-              <a:t>结构模板 / 占位说明与合成数据</a:t>
-            </a:r>
-            <a:endParaRPr lang="zh-CN" sz="1200" dirty="0"/>
-          </a:p>
-        </p:txBody>
-      </p:sp>
-      <p:sp>
-        <p:nvSpPr>
-          <p:cNvPr id="5" name="T04/title"/>
-          <p:cNvSpPr/>
-          <p:nvPr/>
-        </p:nvSpPr>
-        <p:spPr>
-          <a:xfrm>
-            <a:off x="457200" y="381000"/>
-            <a:ext cx="11277600" cy="400050"/>
-          </a:xfrm>
-          <a:prstGeom prst="rect">
-            <a:avLst/>
-          </a:prstGeom>
-          <a:noFill/>
-          <a:ln/>
-        </p:spPr>
-        <p:txBody>
-          <a:bodyPr wrap="none" lIns="0" tIns="0" rIns="0" bIns="0" rtlCol="0" anchor="t"/>
-          <a:lstStyle/>
-          <a:p>
-            <a:pPr algn="l" indent="0" marL="0">
-              <a:lnSpc>
-                <a:spcPts val="2856"/>
-              </a:lnSpc>
-              <a:buNone/>
-            </a:pPr>
-            <a:r>
-              <a:rPr lang="zh-CN" altLang="en-US" sz="2550" b="1" dirty="0">
+                <a:spcPts val="3360"/>
+              </a:lnSpc>
+              <a:buNone/>
+            </a:pPr>
+            <a:r>
+              <a:rPr lang="zh-CN" altLang="en-US" sz="3000" b="1" dirty="0">
                 <a:solidFill>
                   <a:srgbClr val="1C2430"/>
                 </a:solidFill>
@@ -4612,26 +4703,49 @@
               </a:rPr>
               <a:t>研究对象与验证范围</a:t>
             </a:r>
-            <a:endParaRPr lang="zh-CN" sz="2550" dirty="0"/>
-          </a:p>
-        </p:txBody>
-      </p:sp>
-      <p:sp>
-        <p:nvSpPr>
-          <p:cNvPr id="6" name="T04/header-rule"/>
-          <p:cNvSpPr/>
-          <p:nvPr/>
-        </p:nvSpPr>
-        <p:spPr>
-          <a:xfrm>
-            <a:off x="457200" y="876300"/>
+            <a:endParaRPr lang="zh-CN" sz="3000" dirty="0"/>
+          </a:p>
+        </p:txBody>
+      </p:sp>
+      <p:sp>
+        <p:nvSpPr>
+          <p:cNvPr id="5" name="T04/header-rule"/>
+          <p:cNvSpPr/>
+          <p:nvPr/>
+        </p:nvSpPr>
+        <p:spPr>
+          <a:xfrm>
+            <a:off x="457200" y="752475"/>
             <a:ext cx="11277600" cy="0"/>
           </a:xfrm>
           <a:prstGeom prst="line">
             <a:avLst/>
           </a:prstGeom>
           <a:noFill/>
-          <a:ln w="11430">
+          <a:ln w="10478">
+            <a:solidFill>
+              <a:srgbClr val="BEC8D4"/>
+            </a:solidFill>
+            <a:prstDash val="solid"/>
+          </a:ln>
+        </p:spPr>
+      </p:sp>
+      <p:sp>
+        <p:nvSpPr>
+          <p:cNvPr id="6" name="T04/header-accent"/>
+          <p:cNvSpPr/>
+          <p:nvPr/>
+        </p:nvSpPr>
+        <p:spPr>
+          <a:xfrm>
+            <a:off x="457200" y="752475"/>
+            <a:ext cx="704850" cy="0"/>
+          </a:xfrm>
+          <a:prstGeom prst="line">
+            <a:avLst/>
+          </a:prstGeom>
+          <a:noFill/>
+          <a:ln w="28575">
             <a:solidFill>
               <a:srgbClr val="173C70"/>
             </a:solidFill>
@@ -4647,7 +4761,7 @@
         </p:nvSpPr>
         <p:spPr>
           <a:xfrm>
-            <a:off x="457200" y="1219200"/>
+            <a:off x="457200" y="1028700"/>
             <a:ext cx="11277600" cy="571500"/>
           </a:xfrm>
           <a:prstGeom prst="rect">
@@ -4709,8 +4823,8 @@
         </p:nvSpPr>
         <p:spPr>
           <a:xfrm>
-            <a:off x="457200" y="1847850"/>
-            <a:ext cx="11277600" cy="514350"/>
+            <a:off x="457200" y="1657350"/>
+            <a:ext cx="11277600" cy="558356"/>
           </a:xfrm>
           <a:prstGeom prst="rect">
             <a:avLst/>
@@ -4737,7 +4851,7 @@
                 <a:ea typeface="Noto Sans CJK SC" pitchFamily="34" charset="-122"/>
                 <a:cs typeface="Noto Sans CJK SC" pitchFamily="34" charset="-120"/>
               </a:rPr>
-              <a:t>作者姓名（替换） · 期刊与卷页（替换） · 2026 · DOI: 待替换</a:t>
+              <a:t>作者姓名（替换） · 期刊与卷页（替换） · 2026 · DOI: 书目占位；图表均为合成示例</a:t>
             </a:r>
             <a:endParaRPr lang="zh-CN" sz="1275" dirty="0"/>
           </a:p>
@@ -4751,8 +4865,8 @@
         </p:nvSpPr>
         <p:spPr>
           <a:xfrm>
-            <a:off x="457200" y="2609850"/>
-            <a:ext cx="3448050" cy="1562100"/>
+            <a:off x="457200" y="2472881"/>
+            <a:ext cx="3448050" cy="1622203"/>
           </a:xfrm>
           <a:prstGeom prst="rect">
             <a:avLst/>
@@ -4776,14 +4890,14 @@
         </p:nvSpPr>
         <p:spPr>
           <a:xfrm>
-            <a:off x="466725" y="2619375"/>
+            <a:off x="466725" y="2482406"/>
             <a:ext cx="3429000" cy="371475"/>
           </a:xfrm>
           <a:prstGeom prst="rect">
             <a:avLst/>
           </a:prstGeom>
           <a:solidFill>
-            <a:srgbClr val="EEF3F8"/>
+            <a:srgbClr val="F0F3F6"/>
           </a:solidFill>
           <a:ln w="12700">
             <a:solidFill>
@@ -4803,7 +4917,7 @@
         </p:nvSpPr>
         <p:spPr>
           <a:xfrm>
-            <a:off x="457200" y="2990850"/>
+            <a:off x="457200" y="2853881"/>
             <a:ext cx="3448050" cy="0"/>
           </a:xfrm>
           <a:prstGeom prst="line">
@@ -4826,8 +4940,8 @@
         </p:nvSpPr>
         <p:spPr>
           <a:xfrm>
-            <a:off x="581025" y="2667000"/>
-            <a:ext cx="3200400" cy="276225"/>
+            <a:off x="581025" y="2520506"/>
+            <a:ext cx="3200400" cy="295275"/>
           </a:xfrm>
           <a:prstGeom prst="rect">
             <a:avLst/>
@@ -4841,54 +4955,111 @@
           <a:p>
             <a:pPr algn="l" indent="0" marL="0">
               <a:lnSpc>
-                <a:spcPts val="2070"/>
+                <a:spcPts val="2242"/>
+              </a:lnSpc>
+              <a:buNone/>
+            </a:pPr>
+            <a:r>
+              <a:rPr lang="zh-CN" altLang="en-US" sz="1950" b="1" dirty="0">
+                <a:solidFill>
+                  <a:srgbClr val="536A7A"/>
+                </a:solidFill>
+                <a:latin typeface="Noto Sans CJK SC" pitchFamily="34" charset="0"/>
+                <a:ea typeface="Noto Sans CJK SC" pitchFamily="34" charset="-122"/>
+                <a:cs typeface="Noto Sans CJK SC" pitchFamily="34" charset="-120"/>
+              </a:rPr>
+              <a:t>研究对象</a:t>
+            </a:r>
+            <a:endParaRPr lang="zh-CN" sz="1950" dirty="0"/>
+          </a:p>
+        </p:txBody>
+      </p:sp>
+      <p:sp>
+        <p:nvSpPr>
+          <p:cNvPr id="13" name="T04/card/region-1/body"/>
+          <p:cNvSpPr/>
+          <p:nvPr/>
+        </p:nvSpPr>
+        <p:spPr>
+          <a:xfrm>
+            <a:off x="590550" y="2958656"/>
+            <a:ext cx="3181350" cy="1041178"/>
+          </a:xfrm>
+          <a:prstGeom prst="rect">
+            <a:avLst/>
+          </a:prstGeom>
+          <a:noFill/>
+          <a:ln/>
+        </p:spPr>
+        <p:txBody>
+          <a:bodyPr wrap="none" lIns="0" tIns="0" rIns="0" bIns="0" rtlCol="0" anchor="t"/>
+          <a:lstStyle/>
+          <a:p>
+            <a:pPr algn="l" indent="0" marL="0">
+              <a:lnSpc>
+                <a:spcPts val="2232"/>
+              </a:lnSpc>
+              <a:buNone/>
+            </a:pPr>
+            <a:r>
+              <a:rPr lang="zh-CN" altLang="en-US" sz="1800" dirty="0">
+                <a:solidFill>
+                  <a:srgbClr val="1C2430"/>
+                </a:solidFill>
+                <a:latin typeface="Noto Sans CJK SC" pitchFamily="34" charset="0"/>
+                <a:ea typeface="Noto Sans CJK SC" pitchFamily="34" charset="-122"/>
+                <a:cs typeface="Noto Sans CJK SC" pitchFamily="34" charset="-120"/>
+              </a:rPr>
+              <a:t>填写物种、样本来源和实验</a:t>
+            </a:r>
+            <a:pPr algn="l" indent="0" marL="0">
+              <a:lnSpc>
+                <a:spcPts val="2232"/>
               </a:lnSpc>
               <a:buNone/>
             </a:pPr>
             <a:r>
               <a:rPr lang="zh-CN" altLang="en-US" sz="1800" b="1" dirty="0">
                 <a:solidFill>
-                  <a:srgbClr val="173C70"/>
-                </a:solidFill>
-                <a:latin typeface="Noto Sans CJK SC" pitchFamily="34" charset="0"/>
-                <a:ea typeface="Noto Sans CJK SC" pitchFamily="34" charset="-122"/>
-                <a:cs typeface="Noto Sans CJK SC" pitchFamily="34" charset="-120"/>
-              </a:rPr>
-              <a:t>研究对象</a:t>
+                  <a:srgbClr val="536A7A"/>
+                </a:solidFill>
+                <a:latin typeface="Noto Sans CJK SC" pitchFamily="34" charset="0"/>
+                <a:ea typeface="Noto Sans CJK SC" pitchFamily="34" charset="-122"/>
+                <a:cs typeface="Noto Sans CJK SC" pitchFamily="34" charset="-120"/>
+              </a:rPr>
+              <a:t>单</a:t>
             </a:r>
             <a:endParaRPr lang="zh-CN" sz="1800" dirty="0"/>
           </a:p>
-        </p:txBody>
-      </p:sp>
-      <p:sp>
-        <p:nvSpPr>
-          <p:cNvPr id="13" name="T04/card/region-1/body"/>
-          <p:cNvSpPr/>
-          <p:nvPr/>
-        </p:nvSpPr>
-        <p:spPr>
-          <a:xfrm>
-            <a:off x="590550" y="3105150"/>
-            <a:ext cx="3181350" cy="971550"/>
-          </a:xfrm>
-          <a:prstGeom prst="rect">
-            <a:avLst/>
-          </a:prstGeom>
-          <a:noFill/>
-          <a:ln/>
-        </p:spPr>
-        <p:txBody>
-          <a:bodyPr wrap="none" lIns="0" tIns="0" rIns="0" bIns="0" rtlCol="0" anchor="t"/>
-          <a:lstStyle/>
-          <a:p>
-            <a:pPr algn="l" indent="0" marL="0">
-              <a:lnSpc>
-                <a:spcPts val="2139"/>
-              </a:lnSpc>
-              <a:buNone/>
-            </a:pPr>
-            <a:r>
-              <a:rPr lang="zh-CN" altLang="en-US" sz="1725" dirty="0">
+          <a:p>
+            <a:pPr algn="l" indent="0" marL="0">
+              <a:lnSpc>
+                <a:spcPts val="2232"/>
+              </a:lnSpc>
+              <a:buNone/>
+            </a:pPr>
+            <a:r>
+              <a:rPr lang="zh-CN" altLang="en-US" sz="1800" b="1" dirty="0">
+                <a:solidFill>
+                  <a:srgbClr val="536A7A"/>
+                </a:solidFill>
+                <a:latin typeface="Noto Sans CJK SC" pitchFamily="34" charset="0"/>
+                <a:ea typeface="Noto Sans CJK SC" pitchFamily="34" charset="-122"/>
+                <a:cs typeface="Noto Sans CJK SC" pitchFamily="34" charset="-120"/>
+              </a:rPr>
+              <a:t>位</a:t>
+            </a:r>
+            <a:endParaRPr lang="zh-CN" sz="1800" dirty="0"/>
+          </a:p>
+          <a:p>
+            <a:pPr algn="l" indent="0" marL="0">
+              <a:lnSpc>
+                <a:spcPts val="2232"/>
+              </a:lnSpc>
+              <a:buNone/>
+            </a:pPr>
+            <a:r>
+              <a:rPr lang="zh-CN" altLang="en-US" sz="1800" dirty="0">
                 <a:solidFill>
                   <a:srgbClr val="1C2430"/>
                 </a:solidFill>
@@ -4896,29 +5067,9 @@
                 <a:ea typeface="Noto Sans CJK SC" pitchFamily="34" charset="-122"/>
                 <a:cs typeface="Noto Sans CJK SC" pitchFamily="34" charset="-120"/>
               </a:rPr>
-              <a:t>填写物种、样本来源和实验单位</a:t>
-            </a:r>
-            <a:endParaRPr lang="zh-CN" sz="1725" dirty="0"/>
-          </a:p>
-          <a:p>
-            <a:pPr algn="l" indent="0" marL="0">
-              <a:lnSpc>
-                <a:spcPts val="2139"/>
-              </a:lnSpc>
-              <a:buNone/>
-            </a:pPr>
-            <a:r>
-              <a:rPr lang="zh-CN" altLang="en-US" sz="1725" dirty="0">
-                <a:solidFill>
-                  <a:srgbClr val="1C2430"/>
-                </a:solidFill>
-                <a:latin typeface="Noto Sans CJK SC" pitchFamily="34" charset="0"/>
-                <a:ea typeface="Noto Sans CJK SC" pitchFamily="34" charset="-122"/>
-                <a:cs typeface="Noto Sans CJK SC" pitchFamily="34" charset="-120"/>
-              </a:rPr>
               <a:t>区分个体数与重复观测次数</a:t>
             </a:r>
-            <a:endParaRPr lang="zh-CN" sz="1725" dirty="0"/>
+            <a:endParaRPr lang="zh-CN" sz="1800" dirty="0"/>
           </a:p>
         </p:txBody>
       </p:sp>
@@ -4930,8 +5081,8 @@
         </p:nvSpPr>
         <p:spPr>
           <a:xfrm>
-            <a:off x="4191000" y="2609850"/>
-            <a:ext cx="3448050" cy="1562100"/>
+            <a:off x="4191000" y="2472881"/>
+            <a:ext cx="3448050" cy="1622203"/>
           </a:xfrm>
           <a:prstGeom prst="rect">
             <a:avLst/>
@@ -4955,14 +5106,14 @@
         </p:nvSpPr>
         <p:spPr>
           <a:xfrm>
-            <a:off x="4200525" y="2619375"/>
+            <a:off x="4200525" y="2482406"/>
             <a:ext cx="3429000" cy="371475"/>
           </a:xfrm>
           <a:prstGeom prst="rect">
             <a:avLst/>
           </a:prstGeom>
           <a:solidFill>
-            <a:srgbClr val="EEF3F8"/>
+            <a:srgbClr val="EAF2FA"/>
           </a:solidFill>
           <a:ln w="12700">
             <a:solidFill>
@@ -4982,7 +5133,7 @@
         </p:nvSpPr>
         <p:spPr>
           <a:xfrm>
-            <a:off x="4191000" y="2990850"/>
+            <a:off x="4191000" y="2853881"/>
             <a:ext cx="3448050" cy="0"/>
           </a:xfrm>
           <a:prstGeom prst="line">
@@ -5005,8 +5156,8 @@
         </p:nvSpPr>
         <p:spPr>
           <a:xfrm>
-            <a:off x="4314825" y="2667000"/>
-            <a:ext cx="3200400" cy="276225"/>
+            <a:off x="4314825" y="2520506"/>
+            <a:ext cx="3200400" cy="295275"/>
           </a:xfrm>
           <a:prstGeom prst="rect">
             <a:avLst/>
@@ -5020,54 +5171,125 @@
           <a:p>
             <a:pPr algn="l" indent="0" marL="0">
               <a:lnSpc>
-                <a:spcPts val="2070"/>
+                <a:spcPts val="2242"/>
+              </a:lnSpc>
+              <a:buNone/>
+            </a:pPr>
+            <a:r>
+              <a:rPr lang="zh-CN" altLang="en-US" sz="1950" b="1" dirty="0">
+                <a:solidFill>
+                  <a:srgbClr val="235E96"/>
+                </a:solidFill>
+                <a:latin typeface="Noto Sans CJK SC" pitchFamily="34" charset="0"/>
+                <a:ea typeface="Noto Sans CJK SC" pitchFamily="34" charset="-122"/>
+                <a:cs typeface="Noto Sans CJK SC" pitchFamily="34" charset="-120"/>
+              </a:rPr>
+              <a:t>分析任务</a:t>
+            </a:r>
+            <a:endParaRPr lang="zh-CN" sz="1950" dirty="0"/>
+          </a:p>
+        </p:txBody>
+      </p:sp>
+      <p:sp>
+        <p:nvSpPr>
+          <p:cNvPr id="18" name="T04/card/region-2/body"/>
+          <p:cNvSpPr/>
+          <p:nvPr/>
+        </p:nvSpPr>
+        <p:spPr>
+          <a:xfrm>
+            <a:off x="4324350" y="2958656"/>
+            <a:ext cx="3181350" cy="1041178"/>
+          </a:xfrm>
+          <a:prstGeom prst="rect">
+            <a:avLst/>
+          </a:prstGeom>
+          <a:noFill/>
+          <a:ln/>
+        </p:spPr>
+        <p:txBody>
+          <a:bodyPr wrap="none" lIns="0" tIns="0" rIns="0" bIns="0" rtlCol="0" anchor="t"/>
+          <a:lstStyle/>
+          <a:p>
+            <a:pPr algn="l" indent="0" marL="0">
+              <a:lnSpc>
+                <a:spcPts val="2232"/>
+              </a:lnSpc>
+              <a:buNone/>
+            </a:pPr>
+            <a:r>
+              <a:rPr lang="zh-CN" altLang="en-US" sz="1800" dirty="0">
+                <a:solidFill>
+                  <a:srgbClr val="1C2430"/>
+                </a:solidFill>
+                <a:latin typeface="Noto Sans CJK SC" pitchFamily="34" charset="0"/>
+                <a:ea typeface="Noto Sans CJK SC" pitchFamily="34" charset="-122"/>
+                <a:cs typeface="Noto Sans CJK SC" pitchFamily="34" charset="-120"/>
+              </a:rPr>
+              <a:t>列出任务</a:t>
+            </a:r>
+            <a:pPr algn="l" indent="0" marL="0">
+              <a:lnSpc>
+                <a:spcPts val="2232"/>
               </a:lnSpc>
               <a:buNone/>
             </a:pPr>
             <a:r>
               <a:rPr lang="zh-CN" altLang="en-US" sz="1800" b="1" dirty="0">
                 <a:solidFill>
-                  <a:srgbClr val="173C70"/>
-                </a:solidFill>
-                <a:latin typeface="Noto Sans CJK SC" pitchFamily="34" charset="0"/>
-                <a:ea typeface="Noto Sans CJK SC" pitchFamily="34" charset="-122"/>
-                <a:cs typeface="Noto Sans CJK SC" pitchFamily="34" charset="-120"/>
-              </a:rPr>
-              <a:t>分析任务</a:t>
+                  <a:srgbClr val="235E96"/>
+                </a:solidFill>
+                <a:latin typeface="Noto Sans CJK SC" pitchFamily="34" charset="0"/>
+                <a:ea typeface="Noto Sans CJK SC" pitchFamily="34" charset="-122"/>
+                <a:cs typeface="Noto Sans CJK SC" pitchFamily="34" charset="-120"/>
+              </a:rPr>
+              <a:t>输入</a:t>
+            </a:r>
+            <a:pPr algn="l" indent="0" marL="0">
+              <a:lnSpc>
+                <a:spcPts val="2232"/>
+              </a:lnSpc>
+              <a:buNone/>
+            </a:pPr>
+            <a:r>
+              <a:rPr lang="zh-CN" altLang="en-US" sz="1800" dirty="0">
+                <a:solidFill>
+                  <a:srgbClr val="1C2430"/>
+                </a:solidFill>
+                <a:latin typeface="Noto Sans CJK SC" pitchFamily="34" charset="0"/>
+                <a:ea typeface="Noto Sans CJK SC" pitchFamily="34" charset="-122"/>
+                <a:cs typeface="Noto Sans CJK SC" pitchFamily="34" charset="-120"/>
+              </a:rPr>
+              <a:t>和预期</a:t>
+            </a:r>
+            <a:pPr algn="l" indent="0" marL="0">
+              <a:lnSpc>
+                <a:spcPts val="2232"/>
+              </a:lnSpc>
+              <a:buNone/>
+            </a:pPr>
+            <a:r>
+              <a:rPr lang="zh-CN" altLang="en-US" sz="1800" b="1" dirty="0">
+                <a:solidFill>
+                  <a:srgbClr val="235E96"/>
+                </a:solidFill>
+                <a:latin typeface="Noto Sans CJK SC" pitchFamily="34" charset="0"/>
+                <a:ea typeface="Noto Sans CJK SC" pitchFamily="34" charset="-122"/>
+                <a:cs typeface="Noto Sans CJK SC" pitchFamily="34" charset="-120"/>
+              </a:rPr>
+              <a:t>输出</a:t>
             </a:r>
             <a:endParaRPr lang="zh-CN" sz="1800" dirty="0"/>
           </a:p>
-        </p:txBody>
-      </p:sp>
-      <p:sp>
-        <p:nvSpPr>
-          <p:cNvPr id="18" name="T04/card/region-2/body"/>
-          <p:cNvSpPr/>
-          <p:nvPr/>
-        </p:nvSpPr>
-        <p:spPr>
-          <a:xfrm>
-            <a:off x="4324350" y="3105150"/>
-            <a:ext cx="3181350" cy="971550"/>
-          </a:xfrm>
-          <a:prstGeom prst="rect">
-            <a:avLst/>
-          </a:prstGeom>
-          <a:noFill/>
-          <a:ln/>
-        </p:spPr>
-        <p:txBody>
-          <a:bodyPr wrap="none" lIns="0" tIns="0" rIns="0" bIns="0" rtlCol="0" anchor="t"/>
-          <a:lstStyle/>
-          <a:p>
-            <a:pPr algn="l" indent="0" marL="0">
-              <a:lnSpc>
-                <a:spcPts val="2139"/>
-              </a:lnSpc>
-              <a:buNone/>
-            </a:pPr>
-            <a:r>
-              <a:rPr lang="zh-CN" altLang="en-US" sz="1725" dirty="0">
+          <a:p>
+            <a:pPr algn="l" indent="0" marL="0">
+              <a:lnSpc>
+                <a:spcPts val="2232"/>
+              </a:lnSpc>
+              <a:buNone/>
+            </a:pPr>
+            <a:r>
+              <a:rPr lang="zh-CN" altLang="en-US" sz="1800" dirty="0">
                 <a:solidFill>
                   <a:srgbClr val="1C2430"/>
                 </a:solidFill>
@@ -5075,29 +5297,9 @@
                 <a:ea typeface="Noto Sans CJK SC" pitchFamily="34" charset="-122"/>
                 <a:cs typeface="Noto Sans CJK SC" pitchFamily="34" charset="-120"/>
               </a:rPr>
-              <a:t>列出任务输入和预期输出</a:t>
-            </a:r>
-            <a:endParaRPr lang="zh-CN" sz="1725" dirty="0"/>
-          </a:p>
-          <a:p>
-            <a:pPr algn="l" indent="0" marL="0">
-              <a:lnSpc>
-                <a:spcPts val="2139"/>
-              </a:lnSpc>
-              <a:buNone/>
-            </a:pPr>
-            <a:r>
-              <a:rPr lang="zh-CN" altLang="en-US" sz="1725" dirty="0">
-                <a:solidFill>
-                  <a:srgbClr val="1C2430"/>
-                </a:solidFill>
-                <a:latin typeface="Noto Sans CJK SC" pitchFamily="34" charset="0"/>
-                <a:ea typeface="Noto Sans CJK SC" pitchFamily="34" charset="-122"/>
-                <a:cs typeface="Noto Sans CJK SC" pitchFamily="34" charset="-120"/>
-              </a:rPr>
               <a:t>说明是否承担实际管理决策</a:t>
             </a:r>
-            <a:endParaRPr lang="zh-CN" sz="1725" dirty="0"/>
+            <a:endParaRPr lang="zh-CN" sz="1800" dirty="0"/>
           </a:p>
         </p:txBody>
       </p:sp>
@@ -5109,8 +5311,8 @@
         </p:nvSpPr>
         <p:spPr>
           <a:xfrm>
-            <a:off x="7924800" y="2609850"/>
-            <a:ext cx="3810000" cy="1562100"/>
+            <a:off x="7924800" y="2472881"/>
+            <a:ext cx="3810000" cy="1622203"/>
           </a:xfrm>
           <a:prstGeom prst="rect">
             <a:avLst/>
@@ -5134,14 +5336,14 @@
         </p:nvSpPr>
         <p:spPr>
           <a:xfrm>
-            <a:off x="7934325" y="2619375"/>
+            <a:off x="7934325" y="2482406"/>
             <a:ext cx="3790950" cy="371475"/>
           </a:xfrm>
           <a:prstGeom prst="rect">
             <a:avLst/>
           </a:prstGeom>
           <a:solidFill>
-            <a:srgbClr val="EEF3F8"/>
+            <a:srgbClr val="EAF2FA"/>
           </a:solidFill>
           <a:ln w="12700">
             <a:solidFill>
@@ -5161,7 +5363,7 @@
         </p:nvSpPr>
         <p:spPr>
           <a:xfrm>
-            <a:off x="7924800" y="2990850"/>
+            <a:off x="7924800" y="2853881"/>
             <a:ext cx="3810000" cy="0"/>
           </a:xfrm>
           <a:prstGeom prst="line">
@@ -5184,8 +5386,8 @@
         </p:nvSpPr>
         <p:spPr>
           <a:xfrm>
-            <a:off x="8048625" y="2667000"/>
-            <a:ext cx="3562350" cy="276225"/>
+            <a:off x="8048625" y="2520506"/>
+            <a:ext cx="3562350" cy="295275"/>
           </a:xfrm>
           <a:prstGeom prst="rect">
             <a:avLst/>
@@ -5199,14 +5401,14 @@
           <a:p>
             <a:pPr algn="l" indent="0" marL="0">
               <a:lnSpc>
-                <a:spcPts val="2070"/>
-              </a:lnSpc>
-              <a:buNone/>
-            </a:pPr>
-            <a:r>
-              <a:rPr lang="zh-CN" altLang="en-US" sz="1800" b="1" dirty="0">
-                <a:solidFill>
-                  <a:srgbClr val="173C70"/>
+                <a:spcPts val="2242"/>
+              </a:lnSpc>
+              <a:buNone/>
+            </a:pPr>
+            <a:r>
+              <a:rPr lang="zh-CN" altLang="en-US" sz="1950" b="1" dirty="0">
+                <a:solidFill>
+                  <a:srgbClr val="235E96"/>
                 </a:solidFill>
                 <a:latin typeface="Noto Sans CJK SC" pitchFamily="34" charset="0"/>
                 <a:ea typeface="Noto Sans CJK SC" pitchFamily="34" charset="-122"/>
@@ -5214,39 +5416,59 @@
               </a:rPr>
               <a:t>实验身份</a:t>
             </a:r>
+            <a:endParaRPr lang="zh-CN" sz="1950" dirty="0"/>
+          </a:p>
+        </p:txBody>
+      </p:sp>
+      <p:sp>
+        <p:nvSpPr>
+          <p:cNvPr id="23" name="T04/card/region-3/body"/>
+          <p:cNvSpPr/>
+          <p:nvPr/>
+        </p:nvSpPr>
+        <p:spPr>
+          <a:xfrm>
+            <a:off x="8058150" y="2958656"/>
+            <a:ext cx="3543300" cy="1041178"/>
+          </a:xfrm>
+          <a:prstGeom prst="rect">
+            <a:avLst/>
+          </a:prstGeom>
+          <a:noFill/>
+          <a:ln/>
+        </p:spPr>
+        <p:txBody>
+          <a:bodyPr wrap="none" lIns="0" tIns="0" rIns="0" bIns="0" rtlCol="0" anchor="t"/>
+          <a:lstStyle/>
+          <a:p>
+            <a:pPr algn="l" indent="0" marL="0">
+              <a:lnSpc>
+                <a:spcPts val="2232"/>
+              </a:lnSpc>
+              <a:buNone/>
+            </a:pPr>
+            <a:r>
+              <a:rPr lang="zh-CN" altLang="en-US" sz="1800" dirty="0">
+                <a:solidFill>
+                  <a:srgbClr val="1C2430"/>
+                </a:solidFill>
+                <a:latin typeface="Noto Sans CJK SC" pitchFamily="34" charset="0"/>
+                <a:ea typeface="Noto Sans CJK SC" pitchFamily="34" charset="-122"/>
+                <a:cs typeface="Noto Sans CJK SC" pitchFamily="34" charset="-120"/>
+              </a:rPr>
+              <a:t>标明仿真、实验室或真实田间</a:t>
+            </a:r>
             <a:endParaRPr lang="zh-CN" sz="1800" dirty="0"/>
           </a:p>
-        </p:txBody>
-      </p:sp>
-      <p:sp>
-        <p:nvSpPr>
-          <p:cNvPr id="23" name="T04/card/region-3/body"/>
-          <p:cNvSpPr/>
-          <p:nvPr/>
-        </p:nvSpPr>
-        <p:spPr>
-          <a:xfrm>
-            <a:off x="8058150" y="3105150"/>
-            <a:ext cx="3543300" cy="971550"/>
-          </a:xfrm>
-          <a:prstGeom prst="rect">
-            <a:avLst/>
-          </a:prstGeom>
-          <a:noFill/>
-          <a:ln/>
-        </p:spPr>
-        <p:txBody>
-          <a:bodyPr wrap="none" lIns="0" tIns="0" rIns="0" bIns="0" rtlCol="0" anchor="t"/>
-          <a:lstStyle/>
-          <a:p>
-            <a:pPr algn="l" indent="0" marL="0">
-              <a:lnSpc>
-                <a:spcPts val="2139"/>
-              </a:lnSpc>
-              <a:buNone/>
-            </a:pPr>
-            <a:r>
-              <a:rPr lang="zh-CN" altLang="en-US" sz="1725" dirty="0">
+          <a:p>
+            <a:pPr algn="l" indent="0" marL="0">
+              <a:lnSpc>
+                <a:spcPts val="2232"/>
+              </a:lnSpc>
+              <a:buNone/>
+            </a:pPr>
+            <a:r>
+              <a:rPr lang="zh-CN" altLang="en-US" sz="1800" dirty="0">
                 <a:solidFill>
                   <a:srgbClr val="1C2430"/>
                 </a:solidFill>
@@ -5254,29 +5476,9 @@
                 <a:ea typeface="Noto Sans CJK SC" pitchFamily="34" charset="-122"/>
                 <a:cs typeface="Noto Sans CJK SC" pitchFamily="34" charset="-120"/>
               </a:rPr>
-              <a:t>标明仿真、实验室或真实田间</a:t>
-            </a:r>
-            <a:endParaRPr lang="zh-CN" sz="1725" dirty="0"/>
-          </a:p>
-          <a:p>
-            <a:pPr algn="l" indent="0" marL="0">
-              <a:lnSpc>
-                <a:spcPts val="2139"/>
-              </a:lnSpc>
-              <a:buNone/>
-            </a:pPr>
-            <a:r>
-              <a:rPr lang="zh-CN" altLang="en-US" sz="1725" dirty="0">
-                <a:solidFill>
-                  <a:srgbClr val="1C2430"/>
-                </a:solidFill>
-                <a:latin typeface="Noto Sans CJK SC" pitchFamily="34" charset="0"/>
-                <a:ea typeface="Noto Sans CJK SC" pitchFamily="34" charset="-122"/>
-                <a:cs typeface="Noto Sans CJK SC" pitchFamily="34" charset="-120"/>
-              </a:rPr>
               <a:t>报告环境范围与观测周期</a:t>
             </a:r>
-            <a:endParaRPr lang="zh-CN" sz="1725" dirty="0"/>
+            <a:endParaRPr lang="zh-CN" sz="1800" dirty="0"/>
           </a:p>
         </p:txBody>
       </p:sp>
@@ -5288,7 +5490,7 @@
         </p:nvSpPr>
         <p:spPr>
           <a:xfrm>
-            <a:off x="457200" y="4762500"/>
+            <a:off x="457200" y="4694396"/>
             <a:ext cx="7124700" cy="0"/>
           </a:xfrm>
           <a:prstGeom prst="line">
@@ -5311,7 +5513,7 @@
         </p:nvSpPr>
         <p:spPr>
           <a:xfrm>
-            <a:off x="457200" y="4762500"/>
+            <a:off x="457200" y="4694396"/>
             <a:ext cx="342900" cy="0"/>
           </a:xfrm>
           <a:prstGeom prst="line">
@@ -5320,7 +5522,7 @@
           <a:noFill/>
           <a:ln w="17145">
             <a:solidFill>
-              <a:srgbClr val="173C70"/>
+              <a:srgbClr val="235E96"/>
             </a:solidFill>
             <a:prstDash val="solid"/>
           </a:ln>
@@ -5334,7 +5536,7 @@
         </p:nvSpPr>
         <p:spPr>
           <a:xfrm>
-            <a:off x="457200" y="4419600"/>
+            <a:off x="457200" y="4351496"/>
             <a:ext cx="7124700" cy="323850"/>
           </a:xfrm>
           <a:prstGeom prst="rect">
@@ -5349,14 +5551,14 @@
           <a:p>
             <a:pPr algn="l" indent="0" marL="0">
               <a:lnSpc>
-                <a:spcPts val="2156"/>
-              </a:lnSpc>
-              <a:buNone/>
-            </a:pPr>
-            <a:r>
-              <a:rPr lang="zh-CN" altLang="en-US" sz="1875" b="1" dirty="0">
-                <a:solidFill>
-                  <a:srgbClr val="173C70"/>
+                <a:spcPts val="2242"/>
+              </a:lnSpc>
+              <a:buNone/>
+            </a:pPr>
+            <a:r>
+              <a:rPr lang="zh-CN" altLang="en-US" sz="1950" b="1" dirty="0">
+                <a:solidFill>
+                  <a:srgbClr val="235E96"/>
                 </a:solidFill>
                 <a:latin typeface="Noto Sans CJK SC" pitchFamily="34" charset="0"/>
                 <a:ea typeface="Noto Sans CJK SC" pitchFamily="34" charset="-122"/>
@@ -5364,7 +5566,7 @@
               </a:rPr>
               <a:t>实际验证内容</a:t>
             </a:r>
-            <a:endParaRPr lang="zh-CN" sz="1875" dirty="0"/>
+            <a:endParaRPr lang="zh-CN" sz="1950" dirty="0"/>
           </a:p>
         </p:txBody>
       </p:sp>
@@ -5376,8 +5578,8 @@
         </p:nvSpPr>
         <p:spPr>
           <a:xfrm>
-            <a:off x="457200" y="4895850"/>
-            <a:ext cx="7124700" cy="1104900"/>
+            <a:off x="457200" y="4827746"/>
+            <a:ext cx="7124700" cy="1167956"/>
           </a:xfrm>
           <a:prstGeom prst="rect">
             <a:avLst/>
@@ -5438,8 +5640,8 @@
         </p:nvSpPr>
         <p:spPr>
           <a:xfrm>
-            <a:off x="7867650" y="4514850"/>
-            <a:ext cx="3867150" cy="1524000"/>
+            <a:off x="7867650" y="4446746"/>
+            <a:ext cx="3867150" cy="1587056"/>
           </a:xfrm>
           <a:prstGeom prst="rect">
             <a:avLst/>
@@ -5463,14 +5665,14 @@
         </p:nvSpPr>
         <p:spPr>
           <a:xfrm>
-            <a:off x="7981950" y="4400550"/>
-            <a:ext cx="1181100" cy="320040"/>
+            <a:off x="7981950" y="4332446"/>
+            <a:ext cx="1257300" cy="342900"/>
           </a:xfrm>
           <a:prstGeom prst="rect">
             <a:avLst/>
           </a:prstGeom>
           <a:solidFill>
-            <a:srgbClr val="173C70"/>
+            <a:srgbClr val="536A7A"/>
           </a:solidFill>
           <a:ln w="12700">
             <a:solidFill>
@@ -5490,8 +5692,8 @@
         </p:nvSpPr>
         <p:spPr>
           <a:xfrm>
-            <a:off x="8086725" y="4429125"/>
-            <a:ext cx="971550" cy="262890"/>
+            <a:off x="8086725" y="4361021"/>
+            <a:ext cx="1047750" cy="285750"/>
           </a:xfrm>
           <a:prstGeom prst="rect">
             <a:avLst/>
@@ -5505,12 +5707,12 @@
           <a:p>
             <a:pPr algn="l" indent="0" marL="0">
               <a:lnSpc>
-                <a:spcPts val="2070"/>
-              </a:lnSpc>
-              <a:buNone/>
-            </a:pPr>
-            <a:r>
-              <a:rPr lang="zh-CN" altLang="en-US" sz="1800" b="1" dirty="0">
+                <a:spcPts val="2242"/>
+              </a:lnSpc>
+              <a:buNone/>
+            </a:pPr>
+            <a:r>
+              <a:rPr lang="zh-CN" altLang="en-US" sz="1950" b="1" dirty="0">
                 <a:solidFill>
                   <a:srgbClr val="FFFFFF"/>
                 </a:solidFill>
@@ -5520,39 +5722,59 @@
               </a:rPr>
               <a:t>外推范围</a:t>
             </a:r>
+            <a:endParaRPr lang="zh-CN" sz="1950" dirty="0"/>
+          </a:p>
+        </p:txBody>
+      </p:sp>
+      <p:sp>
+        <p:nvSpPr>
+          <p:cNvPr id="31" name="T04/card/region-5/body"/>
+          <p:cNvSpPr/>
+          <p:nvPr/>
+        </p:nvSpPr>
+        <p:spPr>
+          <a:xfrm>
+            <a:off x="8001000" y="4818221"/>
+            <a:ext cx="3600450" cy="1120331"/>
+          </a:xfrm>
+          <a:prstGeom prst="rect">
+            <a:avLst/>
+          </a:prstGeom>
+          <a:noFill/>
+          <a:ln/>
+        </p:spPr>
+        <p:txBody>
+          <a:bodyPr wrap="none" lIns="0" tIns="0" rIns="0" bIns="0" rtlCol="0" anchor="t"/>
+          <a:lstStyle/>
+          <a:p>
+            <a:pPr algn="l" indent="0" marL="0">
+              <a:lnSpc>
+                <a:spcPts val="2232"/>
+              </a:lnSpc>
+              <a:buNone/>
+            </a:pPr>
+            <a:r>
+              <a:rPr lang="zh-CN" altLang="en-US" sz="1800" dirty="0">
+                <a:solidFill>
+                  <a:srgbClr val="1C2430"/>
+                </a:solidFill>
+                <a:latin typeface="Noto Sans CJK SC" pitchFamily="34" charset="0"/>
+                <a:ea typeface="Noto Sans CJK SC" pitchFamily="34" charset="-122"/>
+                <a:cs typeface="Noto Sans CJK SC" pitchFamily="34" charset="-120"/>
+              </a:rPr>
+              <a:t>指出未包含的场景与人群</a:t>
+            </a:r>
             <a:endParaRPr lang="zh-CN" sz="1800" dirty="0"/>
           </a:p>
-        </p:txBody>
-      </p:sp>
-      <p:sp>
-        <p:nvSpPr>
-          <p:cNvPr id="31" name="T04/card/region-5/body"/>
-          <p:cNvSpPr/>
-          <p:nvPr/>
-        </p:nvSpPr>
-        <p:spPr>
-          <a:xfrm>
-            <a:off x="8001000" y="4863465"/>
-            <a:ext cx="3600450" cy="1080135"/>
-          </a:xfrm>
-          <a:prstGeom prst="rect">
-            <a:avLst/>
-          </a:prstGeom>
-          <a:noFill/>
-          <a:ln/>
-        </p:spPr>
-        <p:txBody>
-          <a:bodyPr wrap="none" lIns="0" tIns="0" rIns="0" bIns="0" rtlCol="0" anchor="t"/>
-          <a:lstStyle/>
-          <a:p>
-            <a:pPr algn="l" indent="0" marL="0">
-              <a:lnSpc>
-                <a:spcPts val="2139"/>
-              </a:lnSpc>
-              <a:buNone/>
-            </a:pPr>
-            <a:r>
-              <a:rPr lang="zh-CN" altLang="en-US" sz="1725" dirty="0">
+          <a:p>
+            <a:pPr algn="l" indent="0" marL="0">
+              <a:lnSpc>
+                <a:spcPts val="2232"/>
+              </a:lnSpc>
+              <a:buNone/>
+            </a:pPr>
+            <a:r>
+              <a:rPr lang="zh-CN" altLang="en-US" sz="1800" dirty="0">
                 <a:solidFill>
                   <a:srgbClr val="1C2430"/>
                 </a:solidFill>
@@ -5560,29 +5782,9 @@
                 <a:ea typeface="Noto Sans CJK SC" pitchFamily="34" charset="-122"/>
                 <a:cs typeface="Noto Sans CJK SC" pitchFamily="34" charset="-120"/>
               </a:rPr>
-              <a:t>指出未包含的场景与人群</a:t>
-            </a:r>
-            <a:endParaRPr lang="zh-CN" sz="1725" dirty="0"/>
-          </a:p>
-          <a:p>
-            <a:pPr algn="l" indent="0" marL="0">
-              <a:lnSpc>
-                <a:spcPts val="2139"/>
-              </a:lnSpc>
-              <a:buNone/>
-            </a:pPr>
-            <a:r>
-              <a:rPr lang="zh-CN" altLang="en-US" sz="1725" dirty="0">
-                <a:solidFill>
-                  <a:srgbClr val="1C2430"/>
-                </a:solidFill>
-                <a:latin typeface="Noto Sans CJK SC" pitchFamily="34" charset="0"/>
-                <a:ea typeface="Noto Sans CJK SC" pitchFamily="34" charset="-122"/>
-                <a:cs typeface="Noto Sans CJK SC" pitchFamily="34" charset="-120"/>
-              </a:rPr>
               <a:t>避免把短期结果扩展为长期收益</a:t>
             </a:r>
-            <a:endParaRPr lang="zh-CN" sz="1725" dirty="0"/>
+            <a:endParaRPr lang="zh-CN" sz="1800" dirty="0"/>
           </a:p>
         </p:txBody>
       </p:sp>
@@ -5622,7 +5824,7 @@
                 <a:ea typeface="Noto Sans CJK SC" pitchFamily="34" charset="-122"/>
                 <a:cs typeface="Noto Sans CJK SC" pitchFamily="34" charset="-120"/>
               </a:rPr>
-              <a:t>T1 · 2026 · 待替换</a:t>
+              <a:t>T1 · 2026 · 书目占位；图表均为合成示例</a:t>
             </a:r>
             <a:endParaRPr lang="zh-CN" sz="1125" dirty="0"/>
           </a:p>
@@ -5731,14 +5933,14 @@
       </p:sp>
       <p:sp>
         <p:nvSpPr>
-          <p:cNvPr id="4" name="T05/kicker"/>
-          <p:cNvSpPr/>
-          <p:nvPr/>
-        </p:nvSpPr>
-        <p:spPr>
-          <a:xfrm>
-            <a:off x="457200" y="152400"/>
-            <a:ext cx="11277600" cy="190500"/>
+          <p:cNvPr id="4" name="T05/title"/>
+          <p:cNvSpPr/>
+          <p:nvPr/>
+        </p:nvSpPr>
+        <p:spPr>
+          <a:xfrm>
+            <a:off x="457200" y="209550"/>
+            <a:ext cx="11277600" cy="438150"/>
           </a:xfrm>
           <a:prstGeom prst="rect">
             <a:avLst/>
@@ -5752,54 +5954,12 @@
           <a:p>
             <a:pPr algn="l" indent="0" marL="0">
               <a:lnSpc>
-                <a:spcPts val="1320"/>
-              </a:lnSpc>
-              <a:buNone/>
-            </a:pPr>
-            <a:r>
-              <a:rPr lang="zh-CN" altLang="en-US" sz="1200" dirty="0">
-                <a:solidFill>
-                  <a:srgbClr val="515B68"/>
-                </a:solidFill>
-                <a:latin typeface="Noto Sans CJK SC" pitchFamily="34" charset="0"/>
-                <a:ea typeface="Noto Sans CJK SC" pitchFamily="34" charset="-122"/>
-                <a:cs typeface="Noto Sans CJK SC" pitchFamily="34" charset="-120"/>
-              </a:rPr>
-              <a:t>结构模板 / 占位说明与合成数据</a:t>
-            </a:r>
-            <a:endParaRPr lang="zh-CN" sz="1200" dirty="0"/>
-          </a:p>
-        </p:txBody>
-      </p:sp>
-      <p:sp>
-        <p:nvSpPr>
-          <p:cNvPr id="5" name="T05/title"/>
-          <p:cNvSpPr/>
-          <p:nvPr/>
-        </p:nvSpPr>
-        <p:spPr>
-          <a:xfrm>
-            <a:off x="457200" y="381000"/>
-            <a:ext cx="11277600" cy="400050"/>
-          </a:xfrm>
-          <a:prstGeom prst="rect">
-            <a:avLst/>
-          </a:prstGeom>
-          <a:noFill/>
-          <a:ln/>
-        </p:spPr>
-        <p:txBody>
-          <a:bodyPr wrap="none" lIns="0" tIns="0" rIns="0" bIns="0" rtlCol="0" anchor="t"/>
-          <a:lstStyle/>
-          <a:p>
-            <a:pPr algn="l" indent="0" marL="0">
-              <a:lnSpc>
-                <a:spcPts val="2856"/>
-              </a:lnSpc>
-              <a:buNone/>
-            </a:pPr>
-            <a:r>
-              <a:rPr lang="zh-CN" altLang="en-US" sz="2550" b="1" dirty="0">
+                <a:spcPts val="3360"/>
+              </a:lnSpc>
+              <a:buNone/>
+            </a:pPr>
+            <a:r>
+              <a:rPr lang="zh-CN" altLang="en-US" sz="3000" b="1" dirty="0">
                 <a:solidFill>
                   <a:srgbClr val="1C2430"/>
                 </a:solidFill>
@@ -5809,26 +5969,49 @@
               </a:rPr>
               <a:t>贡献与基线的差异</a:t>
             </a:r>
-            <a:endParaRPr lang="zh-CN" sz="2550" dirty="0"/>
-          </a:p>
-        </p:txBody>
-      </p:sp>
-      <p:sp>
-        <p:nvSpPr>
-          <p:cNvPr id="6" name="T05/header-rule"/>
-          <p:cNvSpPr/>
-          <p:nvPr/>
-        </p:nvSpPr>
-        <p:spPr>
-          <a:xfrm>
-            <a:off x="457200" y="876300"/>
+            <a:endParaRPr lang="zh-CN" sz="3000" dirty="0"/>
+          </a:p>
+        </p:txBody>
+      </p:sp>
+      <p:sp>
+        <p:nvSpPr>
+          <p:cNvPr id="5" name="T05/header-rule"/>
+          <p:cNvSpPr/>
+          <p:nvPr/>
+        </p:nvSpPr>
+        <p:spPr>
+          <a:xfrm>
+            <a:off x="457200" y="752475"/>
             <a:ext cx="11277600" cy="0"/>
           </a:xfrm>
           <a:prstGeom prst="line">
             <a:avLst/>
           </a:prstGeom>
           <a:noFill/>
-          <a:ln w="11430">
+          <a:ln w="10478">
+            <a:solidFill>
+              <a:srgbClr val="BEC8D4"/>
+            </a:solidFill>
+            <a:prstDash val="solid"/>
+          </a:ln>
+        </p:spPr>
+      </p:sp>
+      <p:sp>
+        <p:nvSpPr>
+          <p:cNvPr id="6" name="T05/header-accent"/>
+          <p:cNvSpPr/>
+          <p:nvPr/>
+        </p:nvSpPr>
+        <p:spPr>
+          <a:xfrm>
+            <a:off x="457200" y="752475"/>
+            <a:ext cx="704850" cy="0"/>
+          </a:xfrm>
+          <a:prstGeom prst="line">
+            <a:avLst/>
+          </a:prstGeom>
+          <a:noFill/>
+          <a:ln w="28575">
             <a:solidFill>
               <a:srgbClr val="173C70"/>
             </a:solidFill>
@@ -5844,7 +6027,7 @@
         </p:nvSpPr>
         <p:spPr>
           <a:xfrm>
-            <a:off x="457200" y="1219200"/>
+            <a:off x="457200" y="1028700"/>
             <a:ext cx="11277600" cy="571500"/>
           </a:xfrm>
           <a:prstGeom prst="rect">
@@ -5906,8 +6089,8 @@
         </p:nvSpPr>
         <p:spPr>
           <a:xfrm>
-            <a:off x="457200" y="1847850"/>
-            <a:ext cx="11277600" cy="514350"/>
+            <a:off x="457200" y="1657350"/>
+            <a:ext cx="11277600" cy="558356"/>
           </a:xfrm>
           <a:prstGeom prst="rect">
             <a:avLst/>
@@ -5934,51 +6117,9 @@
                 <a:ea typeface="Noto Sans CJK SC" pitchFamily="34" charset="-122"/>
                 <a:cs typeface="Noto Sans CJK SC" pitchFamily="34" charset="-120"/>
               </a:rPr>
-              <a:t>作者姓名（替换） · 期刊与卷页（替换） · 2026 · DOI: 待替换</a:t>
+              <a:t>作者姓名（替换） · 期刊与卷页（替换） · 2026 · DOI: 书目占位；图表均为合成示例</a:t>
             </a:r>
             <a:endParaRPr lang="zh-CN" sz="1275" dirty="0"/>
-          </a:p>
-        </p:txBody>
-      </p:sp>
-      <p:sp>
-        <p:nvSpPr>
-          <p:cNvPr id="9" name="T05/takeaway"/>
-          <p:cNvSpPr/>
-          <p:nvPr/>
-        </p:nvSpPr>
-        <p:spPr>
-          <a:xfrm>
-            <a:off x="457200" y="5867400"/>
-            <a:ext cx="7677150" cy="285750"/>
-          </a:xfrm>
-          <a:prstGeom prst="rect">
-            <a:avLst/>
-          </a:prstGeom>
-          <a:noFill/>
-          <a:ln/>
-        </p:spPr>
-        <p:txBody>
-          <a:bodyPr wrap="none" lIns="0" tIns="0" rIns="0" bIns="0" rtlCol="0" anchor="t"/>
-          <a:lstStyle/>
-          <a:p>
-            <a:pPr algn="l" indent="0" marL="0">
-              <a:lnSpc>
-                <a:spcPts val="2160"/>
-              </a:lnSpc>
-              <a:buNone/>
-            </a:pPr>
-            <a:r>
-              <a:rPr lang="zh-CN" altLang="en-US" sz="1800" b="1" dirty="0">
-                <a:solidFill>
-                  <a:srgbClr val="173C70"/>
-                </a:solidFill>
-                <a:latin typeface="Noto Sans CJK SC" pitchFamily="34" charset="0"/>
-                <a:ea typeface="Noto Sans CJK SC" pitchFamily="34" charset="-122"/>
-                <a:cs typeface="Noto Sans CJK SC" pitchFamily="34" charset="-120"/>
-              </a:rPr>
-              <a:t>统计口径、样本单位和适用条件需与原文一致</a:t>
-            </a:r>
-            <a:endParaRPr lang="zh-CN" sz="1800" dirty="0"/>
           </a:p>
         </p:txBody>
       </p:sp>
@@ -5997,17 +6138,17 @@
           </p:nvPr>
         </p:nvGraphicFramePr>
         <p:xfrm>
-          <a:off x="457200" y="2552700"/>
-          <a:ext cx="7677150" cy="2003108"/>
+          <a:off x="457200" y="2294763"/>
+          <a:ext cx="11277600" cy="2003108"/>
         </p:xfrm>
         <a:graphic>
           <a:graphicData uri="http://schemas.openxmlformats.org/drawingml/2006/table">
             <a:tbl>
               <a:tblPr/>
               <a:tblGrid>
-                <a:gridCol w="2559050"/>
-                <a:gridCol w="2559050"/>
-                <a:gridCol w="2559050"/>
+                <a:gridCol w="3759200"/>
+                <a:gridCol w="3759200"/>
+                <a:gridCol w="3759200"/>
               </a:tblGrid>
               <a:tr h="400622">
                 <a:tc>
@@ -6838,14 +6979,14 @@
       </p:graphicFrame>
       <p:sp>
         <p:nvSpPr>
-          <p:cNvPr id="11" name="T05/table-caption"/>
-          <p:cNvSpPr/>
-          <p:nvPr/>
-        </p:nvSpPr>
-        <p:spPr>
-          <a:xfrm>
-            <a:off x="457200" y="4622483"/>
-            <a:ext cx="7677150" cy="209550"/>
+          <p:cNvPr id="10" name="T05/table-caption"/>
+          <p:cNvSpPr/>
+          <p:nvPr/>
+        </p:nvSpPr>
+        <p:spPr>
+          <a:xfrm>
+            <a:off x="457200" y="4364546"/>
+            <a:ext cx="11277600" cy="209550"/>
           </a:xfrm>
           <a:prstGeom prst="rect">
             <a:avLst/>
@@ -6880,14 +7021,14 @@
       </p:sp>
       <p:sp>
         <p:nvSpPr>
-          <p:cNvPr id="12" name="T05/card/region-1/base-rule"/>
-          <p:cNvSpPr/>
-          <p:nvPr/>
-        </p:nvSpPr>
-        <p:spPr>
-          <a:xfrm>
-            <a:off x="8401050" y="4133850"/>
-            <a:ext cx="3333750" cy="0"/>
+          <p:cNvPr id="11" name="T05/card/region-1/base-rule"/>
+          <p:cNvSpPr/>
+          <p:nvPr/>
+        </p:nvSpPr>
+        <p:spPr>
+          <a:xfrm>
+            <a:off x="457200" y="5991892"/>
+            <a:ext cx="5467350" cy="0"/>
           </a:xfrm>
           <a:prstGeom prst="line">
             <a:avLst/>
@@ -6903,20 +7044,20 @@
       </p:sp>
       <p:sp>
         <p:nvSpPr>
-          <p:cNvPr id="13" name="T05/card/region-1/side-mark"/>
-          <p:cNvSpPr/>
-          <p:nvPr/>
-        </p:nvSpPr>
-        <p:spPr>
-          <a:xfrm>
-            <a:off x="8401050" y="2571750"/>
+          <p:cNvPr id="12" name="T05/card/region-1/side-mark"/>
+          <p:cNvSpPr/>
+          <p:nvPr/>
+        </p:nvSpPr>
+        <p:spPr>
+          <a:xfrm>
+            <a:off x="457200" y="4764596"/>
             <a:ext cx="47625" cy="295275"/>
           </a:xfrm>
           <a:prstGeom prst="rect">
             <a:avLst/>
           </a:prstGeom>
           <a:solidFill>
-            <a:srgbClr val="173C70"/>
+            <a:srgbClr val="235E96"/>
           </a:solidFill>
           <a:ln w="12700">
             <a:solidFill>
@@ -6930,14 +7071,14 @@
       </p:sp>
       <p:sp>
         <p:nvSpPr>
-          <p:cNvPr id="14" name="T05/card/region-1/title"/>
-          <p:cNvSpPr/>
-          <p:nvPr/>
-        </p:nvSpPr>
-        <p:spPr>
-          <a:xfrm>
-            <a:off x="8553450" y="2571750"/>
-            <a:ext cx="3181350" cy="304800"/>
+          <p:cNvPr id="13" name="T05/card/region-1/title"/>
+          <p:cNvSpPr/>
+          <p:nvPr/>
+        </p:nvSpPr>
+        <p:spPr>
+          <a:xfrm>
+            <a:off x="609600" y="4764596"/>
+            <a:ext cx="5314950" cy="304800"/>
           </a:xfrm>
           <a:prstGeom prst="rect">
             <a:avLst/>
@@ -6951,54 +7092,108 @@
           <a:p>
             <a:pPr algn="l" indent="0" marL="0">
               <a:lnSpc>
-                <a:spcPts val="2070"/>
+                <a:spcPts val="2242"/>
+              </a:lnSpc>
+              <a:buNone/>
+            </a:pPr>
+            <a:r>
+              <a:rPr lang="zh-CN" altLang="en-US" sz="1950" b="1" dirty="0">
+                <a:solidFill>
+                  <a:srgbClr val="235E96"/>
+                </a:solidFill>
+                <a:latin typeface="Noto Sans CJK SC" pitchFamily="34" charset="0"/>
+                <a:ea typeface="Noto Sans CJK SC" pitchFamily="34" charset="-122"/>
+                <a:cs typeface="Noto Sans CJK SC" pitchFamily="34" charset="-120"/>
+              </a:rPr>
+              <a:t>关键改变</a:t>
+            </a:r>
+            <a:endParaRPr lang="zh-CN" sz="1950" dirty="0"/>
+          </a:p>
+        </p:txBody>
+      </p:sp>
+      <p:sp>
+        <p:nvSpPr>
+          <p:cNvPr id="14" name="T05/card/region-1/body"/>
+          <p:cNvSpPr/>
+          <p:nvPr/>
+        </p:nvSpPr>
+        <p:spPr>
+          <a:xfrm>
+            <a:off x="609600" y="5183696"/>
+            <a:ext cx="5314950" cy="712946"/>
+          </a:xfrm>
+          <a:prstGeom prst="rect">
+            <a:avLst/>
+          </a:prstGeom>
+          <a:noFill/>
+          <a:ln/>
+        </p:spPr>
+        <p:txBody>
+          <a:bodyPr wrap="none" lIns="0" tIns="0" rIns="0" bIns="0" rtlCol="0" anchor="t"/>
+          <a:lstStyle/>
+          <a:p>
+            <a:pPr algn="l" indent="0" marL="0">
+              <a:lnSpc>
+                <a:spcPts val="2232"/>
+              </a:lnSpc>
+              <a:buNone/>
+            </a:pPr>
+            <a:r>
+              <a:rPr lang="zh-CN" altLang="en-US" sz="1800" dirty="0">
+                <a:solidFill>
+                  <a:srgbClr val="1C2430"/>
+                </a:solidFill>
+                <a:latin typeface="Noto Sans CJK SC" pitchFamily="34" charset="0"/>
+                <a:ea typeface="Noto Sans CJK SC" pitchFamily="34" charset="-122"/>
+                <a:cs typeface="Noto Sans CJK SC" pitchFamily="34" charset="-120"/>
+              </a:rPr>
+              <a:t>区分</a:t>
+            </a:r>
+            <a:pPr algn="l" indent="0" marL="0">
+              <a:lnSpc>
+                <a:spcPts val="2232"/>
               </a:lnSpc>
               <a:buNone/>
             </a:pPr>
             <a:r>
               <a:rPr lang="zh-CN" altLang="en-US" sz="1800" b="1" dirty="0">
                 <a:solidFill>
-                  <a:srgbClr val="173C70"/>
-                </a:solidFill>
-                <a:latin typeface="Noto Sans CJK SC" pitchFamily="34" charset="0"/>
-                <a:ea typeface="Noto Sans CJK SC" pitchFamily="34" charset="-122"/>
-                <a:cs typeface="Noto Sans CJK SC" pitchFamily="34" charset="-120"/>
-              </a:rPr>
-              <a:t>关键改变</a:t>
+                  <a:srgbClr val="235E96"/>
+                </a:solidFill>
+                <a:latin typeface="Noto Sans CJK SC" pitchFamily="34" charset="0"/>
+                <a:ea typeface="Noto Sans CJK SC" pitchFamily="34" charset="-122"/>
+                <a:cs typeface="Noto Sans CJK SC" pitchFamily="34" charset="-120"/>
+              </a:rPr>
+              <a:t>新增信息</a:t>
+            </a:r>
+            <a:pPr algn="l" indent="0" marL="0">
+              <a:lnSpc>
+                <a:spcPts val="2232"/>
+              </a:lnSpc>
+              <a:buNone/>
+            </a:pPr>
+            <a:r>
+              <a:rPr lang="zh-CN" altLang="en-US" sz="1800" dirty="0">
+                <a:solidFill>
+                  <a:srgbClr val="1C2430"/>
+                </a:solidFill>
+                <a:latin typeface="Noto Sans CJK SC" pitchFamily="34" charset="0"/>
+                <a:ea typeface="Noto Sans CJK SC" pitchFamily="34" charset="-122"/>
+                <a:cs typeface="Noto Sans CJK SC" pitchFamily="34" charset="-120"/>
+              </a:rPr>
+              <a:t>与算法结构变化</a:t>
             </a:r>
             <a:endParaRPr lang="zh-CN" sz="1800" dirty="0"/>
           </a:p>
-        </p:txBody>
-      </p:sp>
-      <p:sp>
-        <p:nvSpPr>
-          <p:cNvPr id="15" name="T05/card/region-1/body"/>
-          <p:cNvSpPr/>
-          <p:nvPr/>
-        </p:nvSpPr>
-        <p:spPr>
-          <a:xfrm>
-            <a:off x="8553450" y="2990850"/>
-            <a:ext cx="3181350" cy="1047750"/>
-          </a:xfrm>
-          <a:prstGeom prst="rect">
-            <a:avLst/>
-          </a:prstGeom>
-          <a:noFill/>
-          <a:ln/>
-        </p:spPr>
-        <p:txBody>
-          <a:bodyPr wrap="none" lIns="0" tIns="0" rIns="0" bIns="0" rtlCol="0" anchor="t"/>
-          <a:lstStyle/>
-          <a:p>
-            <a:pPr algn="l" indent="0" marL="0">
-              <a:lnSpc>
-                <a:spcPts val="2139"/>
-              </a:lnSpc>
-              <a:buNone/>
-            </a:pPr>
-            <a:r>
-              <a:rPr lang="zh-CN" altLang="en-US" sz="1725" dirty="0">
+          <a:p>
+            <a:pPr algn="l" indent="0" marL="0">
+              <a:lnSpc>
+                <a:spcPts val="2232"/>
+              </a:lnSpc>
+              <a:buNone/>
+            </a:pPr>
+            <a:r>
+              <a:rPr lang="zh-CN" altLang="en-US" sz="1800" dirty="0">
                 <a:solidFill>
                   <a:srgbClr val="1C2430"/>
                 </a:solidFill>
@@ -7006,19 +7201,33 @@
                 <a:ea typeface="Noto Sans CJK SC" pitchFamily="34" charset="-122"/>
                 <a:cs typeface="Noto Sans CJK SC" pitchFamily="34" charset="-120"/>
               </a:rPr>
-              <a:t>区分新增信息与算法结构变化</a:t>
-            </a:r>
-            <a:endParaRPr lang="zh-CN" sz="1725" dirty="0"/>
-          </a:p>
-          <a:p>
-            <a:pPr algn="l" indent="0" marL="0">
-              <a:lnSpc>
-                <a:spcPts val="2139"/>
-              </a:lnSpc>
-              <a:buNone/>
-            </a:pPr>
-            <a:r>
-              <a:rPr lang="zh-CN" altLang="en-US" sz="1725" dirty="0">
+              <a:t>保持对应基线的</a:t>
+            </a:r>
+            <a:pPr algn="l" indent="0" marL="0">
+              <a:lnSpc>
+                <a:spcPts val="2232"/>
+              </a:lnSpc>
+              <a:buNone/>
+            </a:pPr>
+            <a:r>
+              <a:rPr lang="zh-CN" altLang="en-US" sz="1800" b="1" dirty="0">
+                <a:solidFill>
+                  <a:srgbClr val="235E96"/>
+                </a:solidFill>
+                <a:latin typeface="Noto Sans CJK SC" pitchFamily="34" charset="0"/>
+                <a:ea typeface="Noto Sans CJK SC" pitchFamily="34" charset="-122"/>
+                <a:cs typeface="Noto Sans CJK SC" pitchFamily="34" charset="-120"/>
+              </a:rPr>
+              <a:t>输入</a:t>
+            </a:r>
+            <a:pPr algn="l" indent="0" marL="0">
+              <a:lnSpc>
+                <a:spcPts val="2232"/>
+              </a:lnSpc>
+              <a:buNone/>
+            </a:pPr>
+            <a:r>
+              <a:rPr lang="zh-CN" altLang="en-US" sz="1800" dirty="0">
                 <a:solidFill>
                   <a:srgbClr val="1C2430"/>
                 </a:solidFill>
@@ -7026,22 +7235,22 @@
                 <a:ea typeface="Noto Sans CJK SC" pitchFamily="34" charset="-122"/>
                 <a:cs typeface="Noto Sans CJK SC" pitchFamily="34" charset="-120"/>
               </a:rPr>
-              <a:t>保持对应基线的输入条件一致</a:t>
-            </a:r>
-            <a:endParaRPr lang="zh-CN" sz="1725" dirty="0"/>
-          </a:p>
-        </p:txBody>
-      </p:sp>
-      <p:sp>
-        <p:nvSpPr>
-          <p:cNvPr id="16" name="T05/card/region-2/heading-rule"/>
-          <p:cNvSpPr/>
-          <p:nvPr/>
-        </p:nvSpPr>
-        <p:spPr>
-          <a:xfrm>
-            <a:off x="8401050" y="4686300"/>
-            <a:ext cx="3333750" cy="0"/>
+              <a:t>条件一致</a:t>
+            </a:r>
+            <a:endParaRPr lang="zh-CN" sz="1800" dirty="0"/>
+          </a:p>
+        </p:txBody>
+      </p:sp>
+      <p:sp>
+        <p:nvSpPr>
+          <p:cNvPr id="15" name="T05/card/region-2/heading-rule"/>
+          <p:cNvSpPr/>
+          <p:nvPr/>
+        </p:nvSpPr>
+        <p:spPr>
+          <a:xfrm>
+            <a:off x="6248400" y="5107496"/>
+            <a:ext cx="5486400" cy="0"/>
           </a:xfrm>
           <a:prstGeom prst="line">
             <a:avLst/>
@@ -7057,13 +7266,13 @@
       </p:sp>
       <p:sp>
         <p:nvSpPr>
-          <p:cNvPr id="17" name="T05/card/region-2/heading-mark"/>
-          <p:cNvSpPr/>
-          <p:nvPr/>
-        </p:nvSpPr>
-        <p:spPr>
-          <a:xfrm>
-            <a:off x="8401050" y="4686300"/>
+          <p:cNvPr id="16" name="T05/card/region-2/heading-mark"/>
+          <p:cNvSpPr/>
+          <p:nvPr/>
+        </p:nvSpPr>
+        <p:spPr>
+          <a:xfrm>
+            <a:off x="6248400" y="5107496"/>
             <a:ext cx="342900" cy="0"/>
           </a:xfrm>
           <a:prstGeom prst="line">
@@ -7072,7 +7281,7 @@
           <a:noFill/>
           <a:ln w="17145">
             <a:solidFill>
-              <a:srgbClr val="173C70"/>
+              <a:srgbClr val="536A7A"/>
             </a:solidFill>
             <a:prstDash val="solid"/>
           </a:ln>
@@ -7080,14 +7289,14 @@
       </p:sp>
       <p:sp>
         <p:nvSpPr>
-          <p:cNvPr id="18" name="T05/card/region-2/title"/>
-          <p:cNvSpPr/>
-          <p:nvPr/>
-        </p:nvSpPr>
-        <p:spPr>
-          <a:xfrm>
-            <a:off x="8401050" y="4343400"/>
-            <a:ext cx="3333750" cy="323850"/>
+          <p:cNvPr id="17" name="T05/card/region-2/title"/>
+          <p:cNvSpPr/>
+          <p:nvPr/>
+        </p:nvSpPr>
+        <p:spPr>
+          <a:xfrm>
+            <a:off x="6248400" y="4764596"/>
+            <a:ext cx="5486400" cy="323850"/>
           </a:xfrm>
           <a:prstGeom prst="rect">
             <a:avLst/>
@@ -7101,14 +7310,14 @@
           <a:p>
             <a:pPr algn="l" indent="0" marL="0">
               <a:lnSpc>
-                <a:spcPts val="2156"/>
-              </a:lnSpc>
-              <a:buNone/>
-            </a:pPr>
-            <a:r>
-              <a:rPr lang="zh-CN" altLang="en-US" sz="1875" b="1" dirty="0">
-                <a:solidFill>
-                  <a:srgbClr val="173C70"/>
+                <a:spcPts val="2242"/>
+              </a:lnSpc>
+              <a:buNone/>
+            </a:pPr>
+            <a:r>
+              <a:rPr lang="zh-CN" altLang="en-US" sz="1950" b="1" dirty="0">
+                <a:solidFill>
+                  <a:srgbClr val="536A7A"/>
                 </a:solidFill>
                 <a:latin typeface="Noto Sans CJK SC" pitchFamily="34" charset="0"/>
                 <a:ea typeface="Noto Sans CJK SC" pitchFamily="34" charset="-122"/>
@@ -7116,20 +7325,20 @@
               </a:rPr>
               <a:t>比较条件</a:t>
             </a:r>
-            <a:endParaRPr lang="zh-CN" sz="1875" dirty="0"/>
-          </a:p>
-        </p:txBody>
-      </p:sp>
-      <p:sp>
-        <p:nvSpPr>
-          <p:cNvPr id="19" name="T05/card/region-2/body"/>
-          <p:cNvSpPr/>
-          <p:nvPr/>
-        </p:nvSpPr>
-        <p:spPr>
-          <a:xfrm>
-            <a:off x="8401050" y="4819650"/>
-            <a:ext cx="3333750" cy="1066800"/>
+            <a:endParaRPr lang="zh-CN" sz="1950" dirty="0"/>
+          </a:p>
+        </p:txBody>
+      </p:sp>
+      <p:sp>
+        <p:nvSpPr>
+          <p:cNvPr id="18" name="T05/card/region-2/body"/>
+          <p:cNvSpPr/>
+          <p:nvPr/>
+        </p:nvSpPr>
+        <p:spPr>
+          <a:xfrm>
+            <a:off x="6248400" y="5240846"/>
+            <a:ext cx="5486400" cy="712946"/>
           </a:xfrm>
           <a:prstGeom prst="rect">
             <a:avLst/>
@@ -7184,7 +7393,7 @@
       </p:sp>
       <p:sp>
         <p:nvSpPr>
-          <p:cNvPr id="20" name="T05/sources"/>
+          <p:cNvPr id="19" name="T05/sources"/>
           <p:cNvSpPr/>
           <p:nvPr/>
         </p:nvSpPr>
@@ -7218,7 +7427,7 @@
                 <a:ea typeface="Noto Sans CJK SC" pitchFamily="34" charset="-122"/>
                 <a:cs typeface="Noto Sans CJK SC" pitchFamily="34" charset="-120"/>
               </a:rPr>
-              <a:t>T1 · 2026 · 待替换</a:t>
+              <a:t>T1 · 2026 · 书目占位；图表均为合成示例</a:t>
             </a:r>
             <a:endParaRPr lang="zh-CN" sz="1125" dirty="0"/>
           </a:p>
@@ -7327,14 +7536,14 @@
       </p:sp>
       <p:sp>
         <p:nvSpPr>
-          <p:cNvPr id="4" name="T06/kicker"/>
-          <p:cNvSpPr/>
-          <p:nvPr/>
-        </p:nvSpPr>
-        <p:spPr>
-          <a:xfrm>
-            <a:off x="457200" y="152400"/>
-            <a:ext cx="11277600" cy="190500"/>
+          <p:cNvPr id="4" name="T06/title"/>
+          <p:cNvSpPr/>
+          <p:nvPr/>
+        </p:nvSpPr>
+        <p:spPr>
+          <a:xfrm>
+            <a:off x="457200" y="209550"/>
+            <a:ext cx="11277600" cy="438150"/>
           </a:xfrm>
           <a:prstGeom prst="rect">
             <a:avLst/>
@@ -7348,54 +7557,12 @@
           <a:p>
             <a:pPr algn="l" indent="0" marL="0">
               <a:lnSpc>
-                <a:spcPts val="1320"/>
-              </a:lnSpc>
-              <a:buNone/>
-            </a:pPr>
-            <a:r>
-              <a:rPr lang="zh-CN" altLang="en-US" sz="1200" dirty="0">
-                <a:solidFill>
-                  <a:srgbClr val="515B68"/>
-                </a:solidFill>
-                <a:latin typeface="Noto Sans CJK SC" pitchFamily="34" charset="0"/>
-                <a:ea typeface="Noto Sans CJK SC" pitchFamily="34" charset="-122"/>
-                <a:cs typeface="Noto Sans CJK SC" pitchFamily="34" charset="-120"/>
-              </a:rPr>
-              <a:t>结构模板 / 占位说明与合成数据</a:t>
-            </a:r>
-            <a:endParaRPr lang="zh-CN" sz="1200" dirty="0"/>
-          </a:p>
-        </p:txBody>
-      </p:sp>
-      <p:sp>
-        <p:nvSpPr>
-          <p:cNvPr id="5" name="T06/title"/>
-          <p:cNvSpPr/>
-          <p:nvPr/>
-        </p:nvSpPr>
-        <p:spPr>
-          <a:xfrm>
-            <a:off x="457200" y="381000"/>
-            <a:ext cx="11277600" cy="400050"/>
-          </a:xfrm>
-          <a:prstGeom prst="rect">
-            <a:avLst/>
-          </a:prstGeom>
-          <a:noFill/>
-          <a:ln/>
-        </p:spPr>
-        <p:txBody>
-          <a:bodyPr wrap="none" lIns="0" tIns="0" rIns="0" bIns="0" rtlCol="0" anchor="t"/>
-          <a:lstStyle/>
-          <a:p>
-            <a:pPr algn="l" indent="0" marL="0">
-              <a:lnSpc>
-                <a:spcPts val="2856"/>
-              </a:lnSpc>
-              <a:buNone/>
-            </a:pPr>
-            <a:r>
-              <a:rPr lang="zh-CN" altLang="en-US" sz="2550" b="1" dirty="0">
+                <a:spcPts val="3360"/>
+              </a:lnSpc>
+              <a:buNone/>
+            </a:pPr>
+            <a:r>
+              <a:rPr lang="zh-CN" altLang="en-US" sz="3000" b="1" dirty="0">
                 <a:solidFill>
                   <a:srgbClr val="1C2430"/>
                 </a:solidFill>
@@ -7405,26 +7572,49 @@
               </a:rPr>
               <a:t>精读讨论提纲</a:t>
             </a:r>
-            <a:endParaRPr lang="zh-CN" sz="2550" dirty="0"/>
-          </a:p>
-        </p:txBody>
-      </p:sp>
-      <p:sp>
-        <p:nvSpPr>
-          <p:cNvPr id="6" name="T06/header-rule"/>
-          <p:cNvSpPr/>
-          <p:nvPr/>
-        </p:nvSpPr>
-        <p:spPr>
-          <a:xfrm>
-            <a:off x="457200" y="876300"/>
+            <a:endParaRPr lang="zh-CN" sz="3000" dirty="0"/>
+          </a:p>
+        </p:txBody>
+      </p:sp>
+      <p:sp>
+        <p:nvSpPr>
+          <p:cNvPr id="5" name="T06/header-rule"/>
+          <p:cNvSpPr/>
+          <p:nvPr/>
+        </p:nvSpPr>
+        <p:spPr>
+          <a:xfrm>
+            <a:off x="457200" y="752475"/>
             <a:ext cx="11277600" cy="0"/>
           </a:xfrm>
           <a:prstGeom prst="line">
             <a:avLst/>
           </a:prstGeom>
           <a:noFill/>
-          <a:ln w="11430">
+          <a:ln w="10478">
+            <a:solidFill>
+              <a:srgbClr val="BEC8D4"/>
+            </a:solidFill>
+            <a:prstDash val="solid"/>
+          </a:ln>
+        </p:spPr>
+      </p:sp>
+      <p:sp>
+        <p:nvSpPr>
+          <p:cNvPr id="6" name="T06/header-accent"/>
+          <p:cNvSpPr/>
+          <p:nvPr/>
+        </p:nvSpPr>
+        <p:spPr>
+          <a:xfrm>
+            <a:off x="457200" y="752475"/>
+            <a:ext cx="704850" cy="0"/>
+          </a:xfrm>
+          <a:prstGeom prst="line">
+            <a:avLst/>
+          </a:prstGeom>
+          <a:noFill/>
+          <a:ln w="28575">
             <a:solidFill>
               <a:srgbClr val="173C70"/>
             </a:solidFill>
@@ -7440,8 +7630,8 @@
         </p:nvSpPr>
         <p:spPr>
           <a:xfrm>
-            <a:off x="7715250" y="2667000"/>
-            <a:ext cx="4019550" cy="3371850"/>
+            <a:off x="7715250" y="2527745"/>
+            <a:ext cx="4019550" cy="3505962"/>
           </a:xfrm>
           <a:prstGeom prst="rect">
             <a:avLst/>
@@ -7465,14 +7655,14 @@
         </p:nvSpPr>
         <p:spPr>
           <a:xfrm>
-            <a:off x="7829550" y="2552700"/>
-            <a:ext cx="1181100" cy="323850"/>
+            <a:off x="7829550" y="2413445"/>
+            <a:ext cx="1352550" cy="342900"/>
           </a:xfrm>
           <a:prstGeom prst="rect">
             <a:avLst/>
           </a:prstGeom>
           <a:solidFill>
-            <a:srgbClr val="173C70"/>
+            <a:srgbClr val="235E96"/>
           </a:solidFill>
           <a:ln w="12700">
             <a:solidFill>
@@ -7492,8 +7682,8 @@
         </p:nvSpPr>
         <p:spPr>
           <a:xfrm>
-            <a:off x="7934325" y="2581275"/>
-            <a:ext cx="971550" cy="276225"/>
+            <a:off x="7934325" y="2442020"/>
+            <a:ext cx="1143000" cy="285750"/>
           </a:xfrm>
           <a:prstGeom prst="rect">
             <a:avLst/>
@@ -7507,12 +7697,12 @@
           <a:p>
             <a:pPr algn="l" indent="0" marL="0">
               <a:lnSpc>
-                <a:spcPts val="2070"/>
-              </a:lnSpc>
-              <a:buNone/>
-            </a:pPr>
-            <a:r>
-              <a:rPr lang="zh-CN" altLang="en-US" sz="1800" b="1" dirty="0">
+                <a:spcPts val="2242"/>
+              </a:lnSpc>
+              <a:buNone/>
+            </a:pPr>
+            <a:r>
+              <a:rPr lang="zh-CN" altLang="en-US" sz="1950" b="1" dirty="0">
                 <a:solidFill>
                   <a:srgbClr val="FFFFFF"/>
                 </a:solidFill>
@@ -7522,39 +7712,303 @@
               </a:rPr>
               <a:t>讨论依据</a:t>
             </a:r>
+            <a:endParaRPr lang="zh-CN" sz="1950" dirty="0"/>
+          </a:p>
+        </p:txBody>
+      </p:sp>
+      <p:sp>
+        <p:nvSpPr>
+          <p:cNvPr id="10" name="T06/paper-title"/>
+          <p:cNvSpPr/>
+          <p:nvPr/>
+        </p:nvSpPr>
+        <p:spPr>
+          <a:xfrm>
+            <a:off x="457200" y="1028700"/>
+            <a:ext cx="11277600" cy="571500"/>
+          </a:xfrm>
+          <a:prstGeom prst="rect">
+            <a:avLst/>
+          </a:prstGeom>
+          <a:noFill/>
+          <a:ln/>
+        </p:spPr>
+        <p:txBody>
+          <a:bodyPr wrap="none" lIns="0" tIns="0" rIns="0" bIns="0" rtlCol="0" anchor="t"/>
+          <a:lstStyle/>
+          <a:p>
+            <a:pPr algn="l" indent="0" marL="0">
+              <a:lnSpc>
+                <a:spcPts val="2250"/>
+              </a:lnSpc>
+              <a:buNone/>
+            </a:pPr>
+            <a:r>
+              <a:rPr lang="zh-CN" altLang="en-US" sz="1875" b="1" dirty="0">
+                <a:solidFill>
+                  <a:srgbClr val="1C2430"/>
+                </a:solidFill>
+                <a:latin typeface="Noto Sans CJK SC" pitchFamily="34" charset="0"/>
+                <a:ea typeface="Noto Sans CJK SC" pitchFamily="34" charset="-122"/>
+                <a:cs typeface="Noto Sans CJK SC" pitchFamily="34" charset="-120"/>
+              </a:rPr>
+              <a:t>Full article title: connecting decision models, experimental evidence and independent </a:t>
+            </a:r>
+            <a:endParaRPr lang="zh-CN" sz="1875" dirty="0"/>
+          </a:p>
+          <a:p>
+            <a:pPr algn="l" indent="0" marL="0">
+              <a:lnSpc>
+                <a:spcPts val="2250"/>
+              </a:lnSpc>
+              <a:buNone/>
+            </a:pPr>
+            <a:r>
+              <a:rPr lang="zh-CN" altLang="en-US" sz="1875" b="1" dirty="0">
+                <a:solidFill>
+                  <a:srgbClr val="1C2430"/>
+                </a:solidFill>
+                <a:latin typeface="Noto Sans CJK SC" pitchFamily="34" charset="0"/>
+                <a:ea typeface="Noto Sans CJK SC" pitchFamily="34" charset="-122"/>
+                <a:cs typeface="Noto Sans CJK SC" pitchFamily="34" charset="-120"/>
+              </a:rPr>
+              <a:t>validation in crop cultivation</a:t>
+            </a:r>
+            <a:endParaRPr lang="zh-CN" sz="1875" dirty="0"/>
+          </a:p>
+        </p:txBody>
+      </p:sp>
+      <p:sp>
+        <p:nvSpPr>
+          <p:cNvPr id="11" name="T06/paper-bibliography"/>
+          <p:cNvSpPr/>
+          <p:nvPr/>
+        </p:nvSpPr>
+        <p:spPr>
+          <a:xfrm>
+            <a:off x="457200" y="1657350"/>
+            <a:ext cx="11277600" cy="558356"/>
+          </a:xfrm>
+          <a:prstGeom prst="rect">
+            <a:avLst/>
+          </a:prstGeom>
+          <a:noFill/>
+          <a:ln/>
+        </p:spPr>
+        <p:txBody>
+          <a:bodyPr wrap="none" lIns="0" tIns="0" rIns="0" bIns="0" rtlCol="0" anchor="t"/>
+          <a:lstStyle/>
+          <a:p>
+            <a:pPr algn="l" indent="0" marL="0">
+              <a:lnSpc>
+                <a:spcPts val="1556"/>
+              </a:lnSpc>
+              <a:buNone/>
+            </a:pPr>
+            <a:r>
+              <a:rPr lang="zh-CN" altLang="en-US" sz="1275" dirty="0">
+                <a:solidFill>
+                  <a:srgbClr val="515B68"/>
+                </a:solidFill>
+                <a:latin typeface="Noto Sans CJK SC" pitchFamily="34" charset="0"/>
+                <a:ea typeface="Noto Sans CJK SC" pitchFamily="34" charset="-122"/>
+                <a:cs typeface="Noto Sans CJK SC" pitchFamily="34" charset="-120"/>
+              </a:rPr>
+              <a:t>作者姓名（替换） · 期刊与卷页（替换） · 2026 · DOI: 书目占位；图表均为合成示例</a:t>
+            </a:r>
+            <a:endParaRPr lang="zh-CN" sz="1275" dirty="0"/>
+          </a:p>
+        </p:txBody>
+      </p:sp>
+      <p:sp>
+        <p:nvSpPr>
+          <p:cNvPr id="12" name="T06/figure:0:paper"/>
+          <p:cNvSpPr/>
+          <p:nvPr/>
+        </p:nvSpPr>
+        <p:spPr>
+          <a:xfrm>
+            <a:off x="7953338" y="2887504"/>
+            <a:ext cx="3543375" cy="2625947"/>
+          </a:xfrm>
+          <a:prstGeom prst="rect">
+            <a:avLst/>
+          </a:prstGeom>
+          <a:solidFill>
+            <a:srgbClr val="FFFFFF"/>
+          </a:solidFill>
+          <a:ln w="7620">
+            <a:solidFill>
+              <a:srgbClr val="CCD4DD"/>
+            </a:solidFill>
+            <a:prstDash val="solid"/>
+          </a:ln>
+          <a:effectLst>
+            <a:outerShdw sx="100000" sy="100000" kx="0" ky="0" algn="bl" rotWithShape="0" blurRad="28575" dist="19050" dir="5400000">
+              <a:srgbClr val="263B50">
+                <a:alpha val="12000"/>
+              </a:srgbClr>
+            </a:outerShdw>
+          </a:effectLst>
+        </p:spPr>
+      </p:sp>
+      <p:pic>
+        <p:nvPicPr>
+          <p:cNvPr id="13" name="T06/figure:0:image" descr="A/B 为条件；合成数据">    </p:cNvPr>
+          <p:cNvPicPr>
+            <a:picLocks noChangeAspect="1"/>
+          </p:cNvPicPr>
+          <p:nvPr/>
+        </p:nvPicPr>
+        <p:blipFill>
+          <a:blip r:embed="rId1"/>
+          <a:stretch>
+            <a:fillRect/>
+          </a:stretch>
+        </p:blipFill>
+        <p:spPr>
+          <a:xfrm>
+            <a:off x="7981913" y="2916079"/>
+            <a:ext cx="3486225" cy="2568797"/>
+          </a:xfrm>
+          <a:prstGeom prst="rect">
+            <a:avLst/>
+          </a:prstGeom>
+        </p:spPr>
+      </p:pic>
+      <p:sp>
+        <p:nvSpPr>
+          <p:cNvPr id="14" name="T06/figure:0:caption"/>
+          <p:cNvSpPr/>
+          <p:nvPr/>
+        </p:nvSpPr>
+        <p:spPr>
+          <a:xfrm>
+            <a:off x="7848600" y="5618226"/>
+            <a:ext cx="3752850" cy="257175"/>
+          </a:xfrm>
+          <a:prstGeom prst="rect">
+            <a:avLst/>
+          </a:prstGeom>
+          <a:noFill/>
+          <a:ln/>
+        </p:spPr>
+        <p:txBody>
+          <a:bodyPr wrap="none" lIns="0" tIns="0" rIns="0" bIns="0" rtlCol="0" anchor="t"/>
+          <a:lstStyle/>
+          <a:p>
+            <a:pPr algn="l" indent="0" marL="0">
+              <a:lnSpc>
+                <a:spcPts val="1674"/>
+              </a:lnSpc>
+              <a:buNone/>
+            </a:pPr>
+            <a:r>
+              <a:rPr lang="zh-CN" altLang="en-US" sz="1350" dirty="0">
+                <a:solidFill>
+                  <a:srgbClr val="515B68"/>
+                </a:solidFill>
+                <a:latin typeface="Noto Sans CJK SC" pitchFamily="34" charset="0"/>
+                <a:ea typeface="Noto Sans CJK SC" pitchFamily="34" charset="-122"/>
+                <a:cs typeface="Noto Sans CJK SC" pitchFamily="34" charset="-120"/>
+              </a:rPr>
+              <a:t>A/B 为条件；合成数据</a:t>
+            </a:r>
+            <a:endParaRPr lang="zh-CN" sz="1350" dirty="0"/>
+          </a:p>
+        </p:txBody>
+      </p:sp>
+      <p:sp>
+        <p:nvSpPr>
+          <p:cNvPr id="15" name="T06/card/region-1/title"/>
+          <p:cNvSpPr/>
+          <p:nvPr/>
+        </p:nvSpPr>
+        <p:spPr>
+          <a:xfrm>
+            <a:off x="457200" y="2432495"/>
+            <a:ext cx="6991350" cy="323850"/>
+          </a:xfrm>
+          <a:prstGeom prst="rect">
+            <a:avLst/>
+          </a:prstGeom>
+          <a:noFill/>
+          <a:ln/>
+        </p:spPr>
+        <p:txBody>
+          <a:bodyPr wrap="none" lIns="0" tIns="0" rIns="0" bIns="0" rtlCol="0" anchor="t"/>
+          <a:lstStyle/>
+          <a:p>
+            <a:pPr algn="l" indent="0" marL="0">
+              <a:lnSpc>
+                <a:spcPts val="2242"/>
+              </a:lnSpc>
+              <a:buNone/>
+            </a:pPr>
+            <a:r>
+              <a:rPr lang="zh-CN" altLang="en-US" sz="1950" b="1" dirty="0">
+                <a:solidFill>
+                  <a:srgbClr val="173C70"/>
+                </a:solidFill>
+                <a:latin typeface="Noto Sans CJK SC" pitchFamily="34" charset="0"/>
+                <a:ea typeface="Noto Sans CJK SC" pitchFamily="34" charset="-122"/>
+                <a:cs typeface="Noto Sans CJK SC" pitchFamily="34" charset="-120"/>
+              </a:rPr>
+              <a:t>本次讨论问题</a:t>
+            </a:r>
+            <a:endParaRPr lang="zh-CN" sz="1950" dirty="0"/>
+          </a:p>
+        </p:txBody>
+      </p:sp>
+      <p:sp>
+        <p:nvSpPr>
+          <p:cNvPr id="16" name="T06/card/region-1/body"/>
+          <p:cNvSpPr/>
+          <p:nvPr/>
+        </p:nvSpPr>
+        <p:spPr>
+          <a:xfrm>
+            <a:off x="457200" y="2813495"/>
+            <a:ext cx="6991350" cy="590550"/>
+          </a:xfrm>
+          <a:prstGeom prst="rect">
+            <a:avLst/>
+          </a:prstGeom>
+          <a:noFill/>
+          <a:ln/>
+        </p:spPr>
+        <p:txBody>
+          <a:bodyPr wrap="none" lIns="0" tIns="0" rIns="0" bIns="0" rtlCol="0" anchor="t"/>
+          <a:lstStyle/>
+          <a:p>
+            <a:pPr algn="l" indent="0" marL="0">
+              <a:lnSpc>
+                <a:spcPts val="2232"/>
+              </a:lnSpc>
+              <a:buNone/>
+            </a:pPr>
+            <a:r>
+              <a:rPr lang="zh-CN" altLang="en-US" sz="1800" dirty="0">
+                <a:solidFill>
+                  <a:srgbClr val="1C2430"/>
+                </a:solidFill>
+                <a:latin typeface="Noto Sans CJK SC" pitchFamily="34" charset="0"/>
+                <a:ea typeface="Noto Sans CJK SC" pitchFamily="34" charset="-122"/>
+                <a:cs typeface="Noto Sans CJK SC" pitchFamily="34" charset="-120"/>
+              </a:rPr>
+              <a:t>用一个具体科学问题组织精读</a:t>
+            </a:r>
             <a:endParaRPr lang="zh-CN" sz="1800" dirty="0"/>
           </a:p>
-        </p:txBody>
-      </p:sp>
-      <p:sp>
-        <p:nvSpPr>
-          <p:cNvPr id="10" name="T06/paper-title"/>
-          <p:cNvSpPr/>
-          <p:nvPr/>
-        </p:nvSpPr>
-        <p:spPr>
-          <a:xfrm>
-            <a:off x="457200" y="1219200"/>
-            <a:ext cx="11277600" cy="571500"/>
-          </a:xfrm>
-          <a:prstGeom prst="rect">
-            <a:avLst/>
-          </a:prstGeom>
-          <a:noFill/>
-          <a:ln/>
-        </p:spPr>
-        <p:txBody>
-          <a:bodyPr wrap="none" lIns="0" tIns="0" rIns="0" bIns="0" rtlCol="0" anchor="t"/>
-          <a:lstStyle/>
-          <a:p>
-            <a:pPr algn="l" indent="0" marL="0">
-              <a:lnSpc>
-                <a:spcPts val="2250"/>
-              </a:lnSpc>
-              <a:buNone/>
-            </a:pPr>
-            <a:r>
-              <a:rPr lang="zh-CN" altLang="en-US" sz="1875" b="1" dirty="0">
+          <a:p>
+            <a:pPr algn="l" indent="0" marL="0">
+              <a:lnSpc>
+                <a:spcPts val="2232"/>
+              </a:lnSpc>
+              <a:buNone/>
+            </a:pPr>
+            <a:r>
+              <a:rPr lang="zh-CN" altLang="en-US" sz="1800" dirty="0">
                 <a:solidFill>
                   <a:srgbClr val="1C2430"/>
                 </a:solidFill>
@@ -7562,84 +8016,47 @@
                 <a:ea typeface="Noto Sans CJK SC" pitchFamily="34" charset="-122"/>
                 <a:cs typeface="Noto Sans CJK SC" pitchFamily="34" charset="-120"/>
               </a:rPr>
-              <a:t>Full article title: connecting decision models, experimental evidence and independent </a:t>
-            </a:r>
-            <a:endParaRPr lang="zh-CN" sz="1875" dirty="0"/>
-          </a:p>
-          <a:p>
-            <a:pPr algn="l" indent="0" marL="0">
-              <a:lnSpc>
-                <a:spcPts val="2250"/>
-              </a:lnSpc>
-              <a:buNone/>
-            </a:pPr>
-            <a:r>
-              <a:rPr lang="zh-CN" altLang="en-US" sz="1875" b="1" dirty="0">
-                <a:solidFill>
-                  <a:srgbClr val="1C2430"/>
-                </a:solidFill>
-                <a:latin typeface="Noto Sans CJK SC" pitchFamily="34" charset="0"/>
-                <a:ea typeface="Noto Sans CJK SC" pitchFamily="34" charset="-122"/>
-                <a:cs typeface="Noto Sans CJK SC" pitchFamily="34" charset="-120"/>
-              </a:rPr>
-              <a:t>validation in crop cultivation</a:t>
-            </a:r>
-            <a:endParaRPr lang="zh-CN" sz="1875" dirty="0"/>
-          </a:p>
-        </p:txBody>
-      </p:sp>
-      <p:sp>
-        <p:nvSpPr>
-          <p:cNvPr id="11" name="T06/paper-bibliography"/>
-          <p:cNvSpPr/>
-          <p:nvPr/>
-        </p:nvSpPr>
-        <p:spPr>
-          <a:xfrm>
-            <a:off x="457200" y="1847850"/>
-            <a:ext cx="11277600" cy="514350"/>
-          </a:xfrm>
-          <a:prstGeom prst="rect">
-            <a:avLst/>
-          </a:prstGeom>
-          <a:noFill/>
-          <a:ln/>
-        </p:spPr>
-        <p:txBody>
-          <a:bodyPr wrap="none" lIns="0" tIns="0" rIns="0" bIns="0" rtlCol="0" anchor="t"/>
-          <a:lstStyle/>
-          <a:p>
-            <a:pPr algn="l" indent="0" marL="0">
-              <a:lnSpc>
-                <a:spcPts val="1556"/>
-              </a:lnSpc>
-              <a:buNone/>
-            </a:pPr>
-            <a:r>
-              <a:rPr lang="zh-CN" altLang="en-US" sz="1275" dirty="0">
-                <a:solidFill>
-                  <a:srgbClr val="515B68"/>
-                </a:solidFill>
-                <a:latin typeface="Noto Sans CJK SC" pitchFamily="34" charset="0"/>
-                <a:ea typeface="Noto Sans CJK SC" pitchFamily="34" charset="-122"/>
-                <a:cs typeface="Noto Sans CJK SC" pitchFamily="34" charset="-120"/>
-              </a:rPr>
-              <a:t>作者姓名（替换） · 期刊与卷页（替换） · 2026 · DOI: 待替换</a:t>
-            </a:r>
-            <a:endParaRPr lang="zh-CN" sz="1275" dirty="0"/>
-          </a:p>
-        </p:txBody>
-      </p:sp>
-      <p:sp>
-        <p:nvSpPr>
-          <p:cNvPr id="12" name="T06/figure:0:paper"/>
-          <p:cNvSpPr/>
-          <p:nvPr/>
-        </p:nvSpPr>
-        <p:spPr>
-          <a:xfrm>
-            <a:off x="7848600" y="2990850"/>
-            <a:ext cx="3752850" cy="2895600"/>
+              <a:t>方法、实验和局限围绕该问题展开</a:t>
+            </a:r>
+            <a:endParaRPr lang="zh-CN" sz="1800" dirty="0"/>
+          </a:p>
+        </p:txBody>
+      </p:sp>
+      <p:sp>
+        <p:nvSpPr>
+          <p:cNvPr id="17" name="T06/card/region-2/frame"/>
+          <p:cNvSpPr/>
+          <p:nvPr/>
+        </p:nvSpPr>
+        <p:spPr>
+          <a:xfrm>
+            <a:off x="457200" y="3782187"/>
+            <a:ext cx="3371850" cy="2251520"/>
+          </a:xfrm>
+          <a:prstGeom prst="rect">
+            <a:avLst/>
+          </a:prstGeom>
+          <a:solidFill>
+            <a:srgbClr val="FFFFFF"/>
+          </a:solidFill>
+          <a:ln w="14288">
+            <a:solidFill>
+              <a:srgbClr val="235E96"/>
+            </a:solidFill>
+            <a:prstDash val="solid"/>
+          </a:ln>
+        </p:spPr>
+      </p:sp>
+      <p:sp>
+        <p:nvSpPr>
+          <p:cNvPr id="18" name="T06/card/region-2/title-cutout"/>
+          <p:cNvSpPr/>
+          <p:nvPr/>
+        </p:nvSpPr>
+        <p:spPr>
+          <a:xfrm>
+            <a:off x="590550" y="3629787"/>
+            <a:ext cx="1085850" cy="323850"/>
           </a:xfrm>
           <a:prstGeom prst="rect">
             <a:avLst/>
@@ -7657,40 +8074,39 @@
           </a:ln>
         </p:spPr>
       </p:sp>
-      <p:pic>
-        <p:nvPicPr>
-          <p:cNvPr id="13" name="T06/figure:0:image" descr="T1 · 示例图 · 响应曲线；合成演示值">    </p:cNvPr>
-          <p:cNvPicPr>
-            <a:picLocks noChangeAspect="1"/>
-          </p:cNvPicPr>
-          <p:nvPr/>
-        </p:nvPicPr>
-        <p:blipFill>
-          <a:blip r:embed="rId1"/>
-          <a:stretch>
-            <a:fillRect/>
-          </a:stretch>
-        </p:blipFill>
-        <p:spPr>
-          <a:xfrm>
-            <a:off x="7848600" y="3141345"/>
-            <a:ext cx="3752850" cy="2251710"/>
-          </a:xfrm>
-          <a:prstGeom prst="rect">
-            <a:avLst/>
-          </a:prstGeom>
-        </p:spPr>
-      </p:pic>
-      <p:sp>
-        <p:nvSpPr>
-          <p:cNvPr id="14" name="T06/figure:0:caption"/>
-          <p:cNvSpPr/>
-          <p:nvPr/>
-        </p:nvSpPr>
-        <p:spPr>
-          <a:xfrm>
-            <a:off x="7848600" y="5629275"/>
-            <a:ext cx="3752850" cy="257175"/>
+      <p:sp>
+        <p:nvSpPr>
+          <p:cNvPr id="19" name="T06/card/region-2/base-rule"/>
+          <p:cNvSpPr/>
+          <p:nvPr/>
+        </p:nvSpPr>
+        <p:spPr>
+          <a:xfrm>
+            <a:off x="647700" y="5881307"/>
+            <a:ext cx="333375" cy="0"/>
+          </a:xfrm>
+          <a:prstGeom prst="line">
+            <a:avLst/>
+          </a:prstGeom>
+          <a:noFill/>
+          <a:ln w="28575">
+            <a:solidFill>
+              <a:srgbClr val="235E96"/>
+            </a:solidFill>
+            <a:prstDash val="solid"/>
+          </a:ln>
+        </p:spPr>
+      </p:sp>
+      <p:sp>
+        <p:nvSpPr>
+          <p:cNvPr id="20" name="T06/card/region-2/title"/>
+          <p:cNvSpPr/>
+          <p:nvPr/>
+        </p:nvSpPr>
+        <p:spPr>
+          <a:xfrm>
+            <a:off x="647700" y="3639312"/>
+            <a:ext cx="2990850" cy="361950"/>
           </a:xfrm>
           <a:prstGeom prst="rect">
             <a:avLst/>
@@ -7704,35 +8120,35 @@
           <a:p>
             <a:pPr algn="l" indent="0" marL="0">
               <a:lnSpc>
-                <a:spcPts val="1674"/>
-              </a:lnSpc>
-              <a:buNone/>
-            </a:pPr>
-            <a:r>
-              <a:rPr lang="zh-CN" altLang="en-US" sz="1350" dirty="0">
-                <a:solidFill>
-                  <a:srgbClr val="515B68"/>
-                </a:solidFill>
-                <a:latin typeface="Noto Sans CJK SC" pitchFamily="34" charset="0"/>
-                <a:ea typeface="Noto Sans CJK SC" pitchFamily="34" charset="-122"/>
-                <a:cs typeface="Noto Sans CJK SC" pitchFamily="34" charset="-120"/>
-              </a:rPr>
-              <a:t>T1 · 示例图 · 响应曲线；合成演示值</a:t>
-            </a:r>
-            <a:endParaRPr lang="zh-CN" sz="1350" dirty="0"/>
-          </a:p>
-        </p:txBody>
-      </p:sp>
-      <p:sp>
-        <p:nvSpPr>
-          <p:cNvPr id="15" name="T06/card/region-1/title"/>
-          <p:cNvSpPr/>
-          <p:nvPr/>
-        </p:nvSpPr>
-        <p:spPr>
-          <a:xfrm>
-            <a:off x="457200" y="2571750"/>
-            <a:ext cx="6991350" cy="323850"/>
+                <a:spcPts val="2242"/>
+              </a:lnSpc>
+              <a:buNone/>
+            </a:pPr>
+            <a:r>
+              <a:rPr lang="zh-CN" altLang="en-US" sz="1950" b="1" dirty="0">
+                <a:solidFill>
+                  <a:srgbClr val="235E96"/>
+                </a:solidFill>
+                <a:latin typeface="Noto Sans CJK SC" pitchFamily="34" charset="0"/>
+                <a:ea typeface="Noto Sans CJK SC" pitchFamily="34" charset="-122"/>
+                <a:cs typeface="Noto Sans CJK SC" pitchFamily="34" charset="-120"/>
+              </a:rPr>
+              <a:t>方法审查</a:t>
+            </a:r>
+            <a:endParaRPr lang="zh-CN" sz="1950" dirty="0"/>
+          </a:p>
+        </p:txBody>
+      </p:sp>
+      <p:sp>
+        <p:nvSpPr>
+          <p:cNvPr id="21" name="T06/card/region-2/body"/>
+          <p:cNvSpPr/>
+          <p:nvPr/>
+        </p:nvSpPr>
+        <p:spPr>
+          <a:xfrm>
+            <a:off x="647700" y="4172712"/>
+            <a:ext cx="2990850" cy="1670495"/>
           </a:xfrm>
           <a:prstGeom prst="rect">
             <a:avLst/>
@@ -7746,54 +8162,29 @@
           <a:p>
             <a:pPr algn="l" indent="0" marL="0">
               <a:lnSpc>
-                <a:spcPts val="2156"/>
-              </a:lnSpc>
-              <a:buNone/>
-            </a:pPr>
-            <a:r>
-              <a:rPr lang="zh-CN" altLang="en-US" sz="1875" b="1" dirty="0">
-                <a:solidFill>
-                  <a:srgbClr val="173C70"/>
-                </a:solidFill>
-                <a:latin typeface="Noto Sans CJK SC" pitchFamily="34" charset="0"/>
-                <a:ea typeface="Noto Sans CJK SC" pitchFamily="34" charset="-122"/>
-                <a:cs typeface="Noto Sans CJK SC" pitchFamily="34" charset="-120"/>
-              </a:rPr>
-              <a:t>本次讨论问题</a:t>
-            </a:r>
-            <a:endParaRPr lang="zh-CN" sz="1875" dirty="0"/>
-          </a:p>
-        </p:txBody>
-      </p:sp>
-      <p:sp>
-        <p:nvSpPr>
-          <p:cNvPr id="16" name="T06/card/region-1/body"/>
-          <p:cNvSpPr/>
-          <p:nvPr/>
-        </p:nvSpPr>
-        <p:spPr>
-          <a:xfrm>
-            <a:off x="457200" y="2952750"/>
-            <a:ext cx="6991350" cy="552450"/>
-          </a:xfrm>
-          <a:prstGeom prst="rect">
-            <a:avLst/>
-          </a:prstGeom>
-          <a:noFill/>
-          <a:ln/>
-        </p:spPr>
-        <p:txBody>
-          <a:bodyPr wrap="none" lIns="0" tIns="0" rIns="0" bIns="0" rtlCol="0" anchor="t"/>
-          <a:lstStyle/>
-          <a:p>
-            <a:pPr algn="l" indent="0" marL="0">
-              <a:lnSpc>
-                <a:spcPts val="2139"/>
-              </a:lnSpc>
-              <a:buNone/>
-            </a:pPr>
-            <a:r>
-              <a:rPr lang="zh-CN" altLang="en-US" sz="1725" dirty="0">
+                <a:spcPts val="2232"/>
+              </a:lnSpc>
+              <a:buNone/>
+            </a:pPr>
+            <a:r>
+              <a:rPr lang="zh-CN" altLang="en-US" sz="1800" b="1" dirty="0">
+                <a:solidFill>
+                  <a:srgbClr val="235E96"/>
+                </a:solidFill>
+                <a:latin typeface="Noto Sans CJK SC" pitchFamily="34" charset="0"/>
+                <a:ea typeface="Noto Sans CJK SC" pitchFamily="34" charset="-122"/>
+                <a:cs typeface="Noto Sans CJK SC" pitchFamily="34" charset="-120"/>
+              </a:rPr>
+              <a:t>输入</a:t>
+            </a:r>
+            <a:pPr algn="l" indent="0" marL="0">
+              <a:lnSpc>
+                <a:spcPts val="2232"/>
+              </a:lnSpc>
+              <a:buNone/>
+            </a:pPr>
+            <a:r>
+              <a:rPr lang="zh-CN" altLang="en-US" sz="1800" dirty="0">
                 <a:solidFill>
                   <a:srgbClr val="1C2430"/>
                 </a:solidFill>
@@ -7801,19 +8192,19 @@
                 <a:ea typeface="Noto Sans CJK SC" pitchFamily="34" charset="-122"/>
                 <a:cs typeface="Noto Sans CJK SC" pitchFamily="34" charset="-120"/>
               </a:rPr>
-              <a:t>用一个具体科学问题组织精读</a:t>
-            </a:r>
-            <a:endParaRPr lang="zh-CN" sz="1725" dirty="0"/>
-          </a:p>
-          <a:p>
-            <a:pPr algn="l" indent="0" marL="0">
-              <a:lnSpc>
-                <a:spcPts val="2139"/>
-              </a:lnSpc>
-              <a:buNone/>
-            </a:pPr>
-            <a:r>
-              <a:rPr lang="zh-CN" altLang="en-US" sz="1725" dirty="0">
+              <a:t>假设和关键算子是否明</a:t>
+            </a:r>
+            <a:endParaRPr lang="zh-CN" sz="1800" dirty="0"/>
+          </a:p>
+          <a:p>
+            <a:pPr algn="l" indent="0" marL="0">
+              <a:lnSpc>
+                <a:spcPts val="2232"/>
+              </a:lnSpc>
+              <a:buNone/>
+            </a:pPr>
+            <a:r>
+              <a:rPr lang="zh-CN" altLang="en-US" sz="1800" dirty="0">
                 <a:solidFill>
                   <a:srgbClr val="1C2430"/>
                 </a:solidFill>
@@ -7821,22 +8212,62 @@
                 <a:ea typeface="Noto Sans CJK SC" pitchFamily="34" charset="-122"/>
                 <a:cs typeface="Noto Sans CJK SC" pitchFamily="34" charset="-120"/>
               </a:rPr>
-              <a:t>方法、实验和局限围绕该问题展开</a:t>
-            </a:r>
-            <a:endParaRPr lang="zh-CN" sz="1725" dirty="0"/>
-          </a:p>
-        </p:txBody>
-      </p:sp>
-      <p:sp>
-        <p:nvSpPr>
-          <p:cNvPr id="17" name="T06/card/region-2/frame"/>
-          <p:cNvSpPr/>
-          <p:nvPr/>
-        </p:nvSpPr>
-        <p:spPr>
-          <a:xfrm>
-            <a:off x="457200" y="3714750"/>
-            <a:ext cx="3371850" cy="2324100"/>
+              <a:t>确</a:t>
+            </a:r>
+            <a:endParaRPr lang="zh-CN" sz="1800" dirty="0"/>
+          </a:p>
+          <a:p>
+            <a:pPr algn="l" indent="0" marL="0">
+              <a:lnSpc>
+                <a:spcPts val="2232"/>
+              </a:lnSpc>
+              <a:buNone/>
+            </a:pPr>
+            <a:r>
+              <a:rPr lang="zh-CN" altLang="en-US" sz="1800" dirty="0">
+                <a:solidFill>
+                  <a:srgbClr val="1C2430"/>
+                </a:solidFill>
+                <a:latin typeface="Noto Sans CJK SC" pitchFamily="34" charset="0"/>
+                <a:ea typeface="Noto Sans CJK SC" pitchFamily="34" charset="-122"/>
+                <a:cs typeface="Noto Sans CJK SC" pitchFamily="34" charset="-120"/>
+              </a:rPr>
+              <a:t>机制图与实际实现是否一致</a:t>
+            </a:r>
+            <a:endParaRPr lang="zh-CN" sz="1800" dirty="0"/>
+          </a:p>
+          <a:p>
+            <a:pPr algn="l" indent="0" marL="0">
+              <a:lnSpc>
+                <a:spcPts val="2232"/>
+              </a:lnSpc>
+              <a:buNone/>
+            </a:pPr>
+            <a:r>
+              <a:rPr lang="zh-CN" altLang="en-US" sz="1800" dirty="0">
+                <a:solidFill>
+                  <a:srgbClr val="1C2430"/>
+                </a:solidFill>
+                <a:latin typeface="Noto Sans CJK SC" pitchFamily="34" charset="0"/>
+                <a:ea typeface="Noto Sans CJK SC" pitchFamily="34" charset="-122"/>
+                <a:cs typeface="Noto Sans CJK SC" pitchFamily="34" charset="-120"/>
+              </a:rPr>
+              <a:t>额外模块提供了什么新信息</a:t>
+            </a:r>
+            <a:endParaRPr lang="zh-CN" sz="1800" dirty="0"/>
+          </a:p>
+        </p:txBody>
+      </p:sp>
+      <p:sp>
+        <p:nvSpPr>
+          <p:cNvPr id="22" name="T06/card/region-3/frame"/>
+          <p:cNvSpPr/>
+          <p:nvPr/>
+        </p:nvSpPr>
+        <p:spPr>
+          <a:xfrm>
+            <a:off x="4057650" y="3734562"/>
+            <a:ext cx="3390900" cy="2299145"/>
           </a:xfrm>
           <a:prstGeom prst="rect">
             <a:avLst/>
@@ -7854,20 +8285,20 @@
       </p:sp>
       <p:sp>
         <p:nvSpPr>
-          <p:cNvPr id="18" name="T06/card/region-2/heading-fill"/>
-          <p:cNvSpPr/>
-          <p:nvPr/>
-        </p:nvSpPr>
-        <p:spPr>
-          <a:xfrm>
-            <a:off x="466725" y="3724275"/>
-            <a:ext cx="3352800" cy="371475"/>
+          <p:cNvPr id="23" name="T06/card/region-3/tab"/>
+          <p:cNvSpPr/>
+          <p:nvPr/>
+        </p:nvSpPr>
+        <p:spPr>
+          <a:xfrm>
+            <a:off x="4171950" y="3620262"/>
+            <a:ext cx="1257300" cy="342900"/>
           </a:xfrm>
           <a:prstGeom prst="rect">
             <a:avLst/>
           </a:prstGeom>
           <a:solidFill>
-            <a:srgbClr val="EEF3F8"/>
+            <a:srgbClr val="235E96"/>
           </a:solidFill>
           <a:ln w="12700">
             <a:solidFill>
@@ -7881,37 +8312,14 @@
       </p:sp>
       <p:sp>
         <p:nvSpPr>
-          <p:cNvPr id="19" name="T06/card/region-2/heading-rule"/>
-          <p:cNvSpPr/>
-          <p:nvPr/>
-        </p:nvSpPr>
-        <p:spPr>
-          <a:xfrm>
-            <a:off x="457200" y="4095750"/>
-            <a:ext cx="3371850" cy="0"/>
-          </a:xfrm>
-          <a:prstGeom prst="line">
-            <a:avLst/>
-          </a:prstGeom>
-          <a:noFill/>
-          <a:ln w="9525">
-            <a:solidFill>
-              <a:srgbClr val="BEC8D4"/>
-            </a:solidFill>
-            <a:prstDash val="solid"/>
-          </a:ln>
-        </p:spPr>
-      </p:sp>
-      <p:sp>
-        <p:nvSpPr>
-          <p:cNvPr id="20" name="T06/card/region-2/title"/>
-          <p:cNvSpPr/>
-          <p:nvPr/>
-        </p:nvSpPr>
-        <p:spPr>
-          <a:xfrm>
-            <a:off x="581025" y="3771900"/>
-            <a:ext cx="3124200" cy="276225"/>
+          <p:cNvPr id="24" name="T06/card/region-3/title"/>
+          <p:cNvSpPr/>
+          <p:nvPr/>
+        </p:nvSpPr>
+        <p:spPr>
+          <a:xfrm>
+            <a:off x="4276725" y="3648837"/>
+            <a:ext cx="1047750" cy="285750"/>
           </a:xfrm>
           <a:prstGeom prst="rect">
             <a:avLst/>
@@ -7925,54 +8333,74 @@
           <a:p>
             <a:pPr algn="l" indent="0" marL="0">
               <a:lnSpc>
-                <a:spcPts val="2070"/>
-              </a:lnSpc>
-              <a:buNone/>
-            </a:pPr>
-            <a:r>
-              <a:rPr lang="zh-CN" altLang="en-US" sz="1800" b="1" dirty="0">
-                <a:solidFill>
-                  <a:srgbClr val="173C70"/>
-                </a:solidFill>
-                <a:latin typeface="Noto Sans CJK SC" pitchFamily="34" charset="0"/>
-                <a:ea typeface="Noto Sans CJK SC" pitchFamily="34" charset="-122"/>
-                <a:cs typeface="Noto Sans CJK SC" pitchFamily="34" charset="-120"/>
-              </a:rPr>
-              <a:t>方法审查</a:t>
+                <a:spcPts val="2242"/>
+              </a:lnSpc>
+              <a:buNone/>
+            </a:pPr>
+            <a:r>
+              <a:rPr lang="zh-CN" altLang="en-US" sz="1950" b="1" dirty="0">
+                <a:solidFill>
+                  <a:srgbClr val="FFFFFF"/>
+                </a:solidFill>
+                <a:latin typeface="Noto Sans CJK SC" pitchFamily="34" charset="0"/>
+                <a:ea typeface="Noto Sans CJK SC" pitchFamily="34" charset="-122"/>
+                <a:cs typeface="Noto Sans CJK SC" pitchFamily="34" charset="-120"/>
+              </a:rPr>
+              <a:t>实验审查</a:t>
+            </a:r>
+            <a:endParaRPr lang="zh-CN" sz="1950" dirty="0"/>
+          </a:p>
+        </p:txBody>
+      </p:sp>
+      <p:sp>
+        <p:nvSpPr>
+          <p:cNvPr id="25" name="T06/card/region-3/body"/>
+          <p:cNvSpPr/>
+          <p:nvPr/>
+        </p:nvSpPr>
+        <p:spPr>
+          <a:xfrm>
+            <a:off x="4191000" y="4106037"/>
+            <a:ext cx="3124200" cy="1832420"/>
+          </a:xfrm>
+          <a:prstGeom prst="rect">
+            <a:avLst/>
+          </a:prstGeom>
+          <a:noFill/>
+          <a:ln/>
+        </p:spPr>
+        <p:txBody>
+          <a:bodyPr wrap="none" lIns="0" tIns="0" rIns="0" bIns="0" rtlCol="0" anchor="t"/>
+          <a:lstStyle/>
+          <a:p>
+            <a:pPr algn="l" indent="0" marL="0">
+              <a:lnSpc>
+                <a:spcPts val="2232"/>
+              </a:lnSpc>
+              <a:buNone/>
+            </a:pPr>
+            <a:r>
+              <a:rPr lang="zh-CN" altLang="en-US" sz="1800" dirty="0">
+                <a:solidFill>
+                  <a:srgbClr val="1C2430"/>
+                </a:solidFill>
+                <a:latin typeface="Noto Sans CJK SC" pitchFamily="34" charset="0"/>
+                <a:ea typeface="Noto Sans CJK SC" pitchFamily="34" charset="-122"/>
+                <a:cs typeface="Noto Sans CJK SC" pitchFamily="34" charset="-120"/>
+              </a:rPr>
+              <a:t>基线、划分与重复是否合适</a:t>
             </a:r>
             <a:endParaRPr lang="zh-CN" sz="1800" dirty="0"/>
           </a:p>
-        </p:txBody>
-      </p:sp>
-      <p:sp>
-        <p:nvSpPr>
-          <p:cNvPr id="21" name="T06/card/region-2/body"/>
-          <p:cNvSpPr/>
-          <p:nvPr/>
-        </p:nvSpPr>
-        <p:spPr>
-          <a:xfrm>
-            <a:off x="590550" y="4210050"/>
-            <a:ext cx="3105150" cy="1733550"/>
-          </a:xfrm>
-          <a:prstGeom prst="rect">
-            <a:avLst/>
-          </a:prstGeom>
-          <a:noFill/>
-          <a:ln/>
-        </p:spPr>
-        <p:txBody>
-          <a:bodyPr wrap="none" lIns="0" tIns="0" rIns="0" bIns="0" rtlCol="0" anchor="t"/>
-          <a:lstStyle/>
-          <a:p>
-            <a:pPr algn="l" indent="0" marL="0">
-              <a:lnSpc>
-                <a:spcPts val="2139"/>
-              </a:lnSpc>
-              <a:buNone/>
-            </a:pPr>
-            <a:r>
-              <a:rPr lang="zh-CN" altLang="en-US" sz="1725" dirty="0">
+          <a:p>
+            <a:pPr algn="l" indent="0" marL="0">
+              <a:lnSpc>
+                <a:spcPts val="2232"/>
+              </a:lnSpc>
+              <a:buNone/>
+            </a:pPr>
+            <a:r>
+              <a:rPr lang="zh-CN" altLang="en-US" sz="1800" dirty="0">
                 <a:solidFill>
                   <a:srgbClr val="1C2430"/>
                 </a:solidFill>
@@ -7980,19 +8408,19 @@
                 <a:ea typeface="Noto Sans CJK SC" pitchFamily="34" charset="-122"/>
                 <a:cs typeface="Noto Sans CJK SC" pitchFamily="34" charset="-120"/>
               </a:rPr>
-              <a:t>输入假设和关键算子是否明确</a:t>
-            </a:r>
-            <a:endParaRPr lang="zh-CN" sz="1725" dirty="0"/>
-          </a:p>
-          <a:p>
-            <a:pPr algn="l" indent="0" marL="0">
-              <a:lnSpc>
-                <a:spcPts val="2139"/>
-              </a:lnSpc>
-              <a:buNone/>
-            </a:pPr>
-            <a:r>
-              <a:rPr lang="zh-CN" altLang="en-US" sz="1725" dirty="0">
+              <a:t>误差、失败与外推是否充分报</a:t>
+            </a:r>
+            <a:endParaRPr lang="zh-CN" sz="1800" dirty="0"/>
+          </a:p>
+          <a:p>
+            <a:pPr algn="l" indent="0" marL="0">
+              <a:lnSpc>
+                <a:spcPts val="2232"/>
+              </a:lnSpc>
+              <a:buNone/>
+            </a:pPr>
+            <a:r>
+              <a:rPr lang="zh-CN" altLang="en-US" sz="1800" dirty="0">
                 <a:solidFill>
                   <a:srgbClr val="1C2430"/>
                 </a:solidFill>
@@ -8000,19 +8428,19 @@
                 <a:ea typeface="Noto Sans CJK SC" pitchFamily="34" charset="-122"/>
                 <a:cs typeface="Noto Sans CJK SC" pitchFamily="34" charset="-120"/>
               </a:rPr>
-              <a:t>机制图与实际实现是否一致</a:t>
-            </a:r>
-            <a:endParaRPr lang="zh-CN" sz="1725" dirty="0"/>
-          </a:p>
-          <a:p>
-            <a:pPr algn="l" indent="0" marL="0">
-              <a:lnSpc>
-                <a:spcPts val="2139"/>
-              </a:lnSpc>
-              <a:buNone/>
-            </a:pPr>
-            <a:r>
-              <a:rPr lang="zh-CN" altLang="en-US" sz="1725" dirty="0">
+              <a:t>告</a:t>
+            </a:r>
+            <a:endParaRPr lang="zh-CN" sz="1800" dirty="0"/>
+          </a:p>
+          <a:p>
+            <a:pPr algn="l" indent="0" marL="0">
+              <a:lnSpc>
+                <a:spcPts val="2232"/>
+              </a:lnSpc>
+              <a:buNone/>
+            </a:pPr>
+            <a:r>
+              <a:rPr lang="zh-CN" altLang="en-US" sz="1800" dirty="0">
                 <a:solidFill>
                   <a:srgbClr val="1C2430"/>
                 </a:solidFill>
@@ -8020,185 +8448,9 @@
                 <a:ea typeface="Noto Sans CJK SC" pitchFamily="34" charset="-122"/>
                 <a:cs typeface="Noto Sans CJK SC" pitchFamily="34" charset="-120"/>
               </a:rPr>
-              <a:t>额外模块提供了什么新信息</a:t>
-            </a:r>
-            <a:endParaRPr lang="zh-CN" sz="1725" dirty="0"/>
-          </a:p>
-        </p:txBody>
-      </p:sp>
-      <p:sp>
-        <p:nvSpPr>
-          <p:cNvPr id="22" name="T06/card/region-3/frame"/>
-          <p:cNvSpPr/>
-          <p:nvPr/>
-        </p:nvSpPr>
-        <p:spPr>
-          <a:xfrm>
-            <a:off x="4057650" y="3829050"/>
-            <a:ext cx="3390900" cy="2209800"/>
-          </a:xfrm>
-          <a:prstGeom prst="rect">
-            <a:avLst/>
-          </a:prstGeom>
-          <a:solidFill>
-            <a:srgbClr val="FFFFFF"/>
-          </a:solidFill>
-          <a:ln w="10478">
-            <a:solidFill>
-              <a:srgbClr val="BEC8D4"/>
-            </a:solidFill>
-            <a:prstDash val="solid"/>
-          </a:ln>
-        </p:spPr>
-      </p:sp>
-      <p:sp>
-        <p:nvSpPr>
-          <p:cNvPr id="23" name="T06/card/region-3/tab"/>
-          <p:cNvSpPr/>
-          <p:nvPr/>
-        </p:nvSpPr>
-        <p:spPr>
-          <a:xfrm>
-            <a:off x="4171950" y="3714750"/>
-            <a:ext cx="1181100" cy="320040"/>
-          </a:xfrm>
-          <a:prstGeom prst="rect">
-            <a:avLst/>
-          </a:prstGeom>
-          <a:solidFill>
-            <a:srgbClr val="173C70"/>
-          </a:solidFill>
-          <a:ln w="12700">
-            <a:solidFill>
-              <a:srgbClr val="FFFFFF">
-                <a:alpha val="0"/>
-              </a:srgbClr>
-            </a:solidFill>
-            <a:prstDash val="solid"/>
-          </a:ln>
-        </p:spPr>
-      </p:sp>
-      <p:sp>
-        <p:nvSpPr>
-          <p:cNvPr id="24" name="T06/card/region-3/title"/>
-          <p:cNvSpPr/>
-          <p:nvPr/>
-        </p:nvSpPr>
-        <p:spPr>
-          <a:xfrm>
-            <a:off x="4276725" y="3743325"/>
-            <a:ext cx="971550" cy="262890"/>
-          </a:xfrm>
-          <a:prstGeom prst="rect">
-            <a:avLst/>
-          </a:prstGeom>
-          <a:noFill/>
-          <a:ln/>
-        </p:spPr>
-        <p:txBody>
-          <a:bodyPr wrap="none" lIns="0" tIns="0" rIns="0" bIns="0" rtlCol="0" anchor="t"/>
-          <a:lstStyle/>
-          <a:p>
-            <a:pPr algn="l" indent="0" marL="0">
-              <a:lnSpc>
-                <a:spcPts val="2070"/>
-              </a:lnSpc>
-              <a:buNone/>
-            </a:pPr>
-            <a:r>
-              <a:rPr lang="zh-CN" altLang="en-US" sz="1800" b="1" dirty="0">
-                <a:solidFill>
-                  <a:srgbClr val="FFFFFF"/>
-                </a:solidFill>
-                <a:latin typeface="Noto Sans CJK SC" pitchFamily="34" charset="0"/>
-                <a:ea typeface="Noto Sans CJK SC" pitchFamily="34" charset="-122"/>
-                <a:cs typeface="Noto Sans CJK SC" pitchFamily="34" charset="-120"/>
-              </a:rPr>
-              <a:t>实验审查</a:t>
+              <a:t>结果支持到哪个层级的结论</a:t>
             </a:r>
             <a:endParaRPr lang="zh-CN" sz="1800" dirty="0"/>
-          </a:p>
-        </p:txBody>
-      </p:sp>
-      <p:sp>
-        <p:nvSpPr>
-          <p:cNvPr id="25" name="T06/card/region-3/body"/>
-          <p:cNvSpPr/>
-          <p:nvPr/>
-        </p:nvSpPr>
-        <p:spPr>
-          <a:xfrm>
-            <a:off x="4191000" y="4177665"/>
-            <a:ext cx="3124200" cy="1765935"/>
-          </a:xfrm>
-          <a:prstGeom prst="rect">
-            <a:avLst/>
-          </a:prstGeom>
-          <a:noFill/>
-          <a:ln/>
-        </p:spPr>
-        <p:txBody>
-          <a:bodyPr wrap="none" lIns="0" tIns="0" rIns="0" bIns="0" rtlCol="0" anchor="t"/>
-          <a:lstStyle/>
-          <a:p>
-            <a:pPr algn="l" indent="0" marL="0">
-              <a:lnSpc>
-                <a:spcPts val="2139"/>
-              </a:lnSpc>
-              <a:buNone/>
-            </a:pPr>
-            <a:r>
-              <a:rPr lang="zh-CN" altLang="en-US" sz="1725" dirty="0">
-                <a:solidFill>
-                  <a:srgbClr val="1C2430"/>
-                </a:solidFill>
-                <a:latin typeface="Noto Sans CJK SC" pitchFamily="34" charset="0"/>
-                <a:ea typeface="Noto Sans CJK SC" pitchFamily="34" charset="-122"/>
-                <a:cs typeface="Noto Sans CJK SC" pitchFamily="34" charset="-120"/>
-              </a:rPr>
-              <a:t>基线、划分与重复是否合适</a:t>
-            </a:r>
-            <a:endParaRPr lang="zh-CN" sz="1725" dirty="0"/>
-          </a:p>
-          <a:p>
-            <a:pPr algn="l" indent="0" marL="0">
-              <a:lnSpc>
-                <a:spcPts val="2139"/>
-              </a:lnSpc>
-              <a:buNone/>
-            </a:pPr>
-            <a:r>
-              <a:rPr lang="zh-CN" altLang="en-US" sz="1725" dirty="0">
-                <a:solidFill>
-                  <a:srgbClr val="1C2430"/>
-                </a:solidFill>
-                <a:latin typeface="Noto Sans CJK SC" pitchFamily="34" charset="0"/>
-                <a:ea typeface="Noto Sans CJK SC" pitchFamily="34" charset="-122"/>
-                <a:cs typeface="Noto Sans CJK SC" pitchFamily="34" charset="-120"/>
-              </a:rPr>
-              <a:t>误差、失败与外推是否充分报告</a:t>
-            </a:r>
-            <a:endParaRPr lang="zh-CN" sz="1725" dirty="0"/>
-          </a:p>
-          <a:p>
-            <a:pPr algn="l" indent="0" marL="0">
-              <a:lnSpc>
-                <a:spcPts val="2139"/>
-              </a:lnSpc>
-              <a:buNone/>
-            </a:pPr>
-            <a:r>
-              <a:rPr lang="zh-CN" altLang="en-US" sz="1725" dirty="0">
-                <a:solidFill>
-                  <a:srgbClr val="1C2430"/>
-                </a:solidFill>
-                <a:latin typeface="Noto Sans CJK SC" pitchFamily="34" charset="0"/>
-                <a:ea typeface="Noto Sans CJK SC" pitchFamily="34" charset="-122"/>
-                <a:cs typeface="Noto Sans CJK SC" pitchFamily="34" charset="-120"/>
-              </a:rPr>
-              <a:t>结果支持到哪个层级的结论</a:t>
-            </a:r>
-            <a:endParaRPr lang="zh-CN" sz="1725" dirty="0"/>
           </a:p>
         </p:txBody>
       </p:sp>
@@ -8238,7 +8490,7 @@
                 <a:ea typeface="Noto Sans CJK SC" pitchFamily="34" charset="-122"/>
                 <a:cs typeface="Noto Sans CJK SC" pitchFamily="34" charset="-120"/>
               </a:rPr>
-              <a:t>T1 · 2026 · 待替换</a:t>
+              <a:t>T1 · 2026 · 书目占位；图表均为合成示例</a:t>
             </a:r>
             <a:endParaRPr lang="zh-CN" sz="1125" dirty="0"/>
           </a:p>
